--- a/contrib/ntut-vla/docs/VLA-Guardrail-Follow-Aug2026.pptx
+++ b/contrib/ntut-vla/docs/VLA-Guardrail-Follow-Aug2026.pptx
@@ -5,21 +5,21 @@
     <p:sldMasterId id="2147483648" r:id="rId1"/>
   </p:sldMasterIdLst>
   <p:sldIdLst>
-    <p:sldId id="256" r:id="rId2"/>
-    <p:sldId id="257" r:id="rId3"/>
-    <p:sldId id="258" r:id="rId4"/>
-    <p:sldId id="259" r:id="rId5"/>
-    <p:sldId id="260" r:id="rId6"/>
-    <p:sldId id="261" r:id="rId7"/>
-    <p:sldId id="262" r:id="rId8"/>
-    <p:sldId id="263" r:id="rId9"/>
-    <p:sldId id="264" r:id="rId10"/>
-    <p:sldId id="265" r:id="rId11"/>
-    <p:sldId id="266" r:id="rId12"/>
-    <p:sldId id="267" r:id="rId13"/>
-    <p:sldId id="268" r:id="rId14"/>
+    <p:sldId id="256" r:id="rId7"/>
+    <p:sldId id="257" r:id="rId8"/>
+    <p:sldId id="258" r:id="rId9"/>
+    <p:sldId id="259" r:id="rId10"/>
+    <p:sldId id="260" r:id="rId11"/>
+    <p:sldId id="261" r:id="rId12"/>
+    <p:sldId id="262" r:id="rId13"/>
+    <p:sldId id="263" r:id="rId14"/>
+    <p:sldId id="264" r:id="rId15"/>
+    <p:sldId id="265" r:id="rId16"/>
+    <p:sldId id="266" r:id="rId17"/>
+    <p:sldId id="267" r:id="rId18"/>
+    <p:sldId id="268" r:id="rId19"/>
   </p:sldIdLst>
-  <p:sldSz cx="9144000" cy="5143500" type="screen16x9"/>
+  <p:sldSz cx="9144000" cy="5143500" type="screen4x3"/>
   <p:notesSz cx="6858000" cy="9144000"/>
   <p:defaultTextStyle>
     <a:defPPr>
@@ -116,285 +116,7 @@
       </a:defRPr>
     </a:lvl9pPr>
   </p:defaultTextStyle>
-  <p:extLst>
-    <p:ext uri="{EFAFB233-063F-42B5-8137-9DF3F51BA10A}">
-      <p15:sldGuideLst xmlns:p15="http://schemas.microsoft.com/office/powerpoint/2012/main">
-        <p15:guide id="1" orient="horz" pos="2160">
-          <p15:clr>
-            <a:srgbClr val="A4A3A4"/>
-          </p15:clr>
-        </p15:guide>
-        <p15:guide id="2" pos="2880">
-          <p15:clr>
-            <a:srgbClr val="A4A3A4"/>
-          </p15:clr>
-        </p15:guide>
-      </p15:sldGuideLst>
-    </p:ext>
-  </p:extLst>
 </p:presentation>
-</file>
-
-<file path=ppt/changesInfos/changesInfo1.xml><?xml version="1.0" encoding="utf-8"?>
-<pc:chgInfo xmlns:a="http://schemas.openxmlformats.org/drawingml/2006/main" xmlns:r="http://schemas.openxmlformats.org/officeDocument/2006/relationships" xmlns:ac="http://schemas.microsoft.com/office/drawing/2013/main/command" xmlns:pc="http://schemas.microsoft.com/office/powerpoint/2013/main/command">
-  <pc:docChgLst>
-    <pc:chgData name="Nathanael Tjahyadi" userId="3d812bafe33aef0e" providerId="LiveId" clId="{29437703-73C4-43CF-9915-CA63B3397B0D}"/>
-    <pc:docChg chg="undo custSel modSld">
-      <pc:chgData name="Nathanael Tjahyadi" userId="3d812bafe33aef0e" providerId="LiveId" clId="{29437703-73C4-43CF-9915-CA63B3397B0D}" dt="2026-08-05T07:39:46.095" v="120" actId="6549"/>
-      <pc:docMkLst>
-        <pc:docMk/>
-      </pc:docMkLst>
-      <pc:sldChg chg="delSp modSp mod">
-        <pc:chgData name="Nathanael Tjahyadi" userId="3d812bafe33aef0e" providerId="LiveId" clId="{29437703-73C4-43CF-9915-CA63B3397B0D}" dt="2026-08-05T07:28:52.466" v="117" actId="1076"/>
-        <pc:sldMkLst>
-          <pc:docMk/>
-          <pc:sldMk cId="0" sldId="256"/>
-        </pc:sldMkLst>
-        <pc:spChg chg="mod">
-          <ac:chgData name="Nathanael Tjahyadi" userId="3d812bafe33aef0e" providerId="LiveId" clId="{29437703-73C4-43CF-9915-CA63B3397B0D}" dt="2026-08-05T07:28:52.466" v="117" actId="1076"/>
-          <ac:spMkLst>
-            <pc:docMk/>
-            <pc:sldMk cId="0" sldId="256"/>
-            <ac:spMk id="4" creationId="{00000000-0000-0000-0000-000000000000}"/>
-          </ac:spMkLst>
-        </pc:spChg>
-        <pc:spChg chg="del mod">
-          <ac:chgData name="Nathanael Tjahyadi" userId="3d812bafe33aef0e" providerId="LiveId" clId="{29437703-73C4-43CF-9915-CA63B3397B0D}" dt="2026-08-05T06:29:31.338" v="5"/>
-          <ac:spMkLst>
-            <pc:docMk/>
-            <pc:sldMk cId="0" sldId="256"/>
-            <ac:spMk id="5" creationId="{00000000-0000-0000-0000-000000000000}"/>
-          </ac:spMkLst>
-        </pc:spChg>
-        <pc:spChg chg="del mod">
-          <ac:chgData name="Nathanael Tjahyadi" userId="3d812bafe33aef0e" providerId="LiveId" clId="{29437703-73C4-43CF-9915-CA63B3397B0D}" dt="2026-08-05T06:29:28.159" v="2"/>
-          <ac:spMkLst>
-            <pc:docMk/>
-            <pc:sldMk cId="0" sldId="256"/>
-            <ac:spMk id="7" creationId="{00000000-0000-0000-0000-000000000000}"/>
-          </ac:spMkLst>
-        </pc:spChg>
-      </pc:sldChg>
-      <pc:sldChg chg="modSp mod">
-        <pc:chgData name="Nathanael Tjahyadi" userId="3d812bafe33aef0e" providerId="LiveId" clId="{29437703-73C4-43CF-9915-CA63B3397B0D}" dt="2026-08-05T06:29:49.462" v="16" actId="20577"/>
-        <pc:sldMkLst>
-          <pc:docMk/>
-          <pc:sldMk cId="0" sldId="257"/>
-        </pc:sldMkLst>
-        <pc:spChg chg="mod">
-          <ac:chgData name="Nathanael Tjahyadi" userId="3d812bafe33aef0e" providerId="LiveId" clId="{29437703-73C4-43CF-9915-CA63B3397B0D}" dt="2026-08-05T06:29:49.462" v="16" actId="20577"/>
-          <ac:spMkLst>
-            <pc:docMk/>
-            <pc:sldMk cId="0" sldId="257"/>
-            <ac:spMk id="2" creationId="{00000000-0000-0000-0000-000000000000}"/>
-          </ac:spMkLst>
-        </pc:spChg>
-        <pc:spChg chg="mod">
-          <ac:chgData name="Nathanael Tjahyadi" userId="3d812bafe33aef0e" providerId="LiveId" clId="{29437703-73C4-43CF-9915-CA63B3397B0D}" dt="2026-08-05T06:29:44.248" v="6" actId="6549"/>
-          <ac:spMkLst>
-            <pc:docMk/>
-            <pc:sldMk cId="0" sldId="257"/>
-            <ac:spMk id="3" creationId="{00000000-0000-0000-0000-000000000000}"/>
-          </ac:spMkLst>
-        </pc:spChg>
-      </pc:sldChg>
-      <pc:sldChg chg="modSp mod">
-        <pc:chgData name="Nathanael Tjahyadi" userId="3d812bafe33aef0e" providerId="LiveId" clId="{29437703-73C4-43CF-9915-CA63B3397B0D}" dt="2026-08-05T07:39:46.095" v="120" actId="6549"/>
-        <pc:sldMkLst>
-          <pc:docMk/>
-          <pc:sldMk cId="0" sldId="258"/>
-        </pc:sldMkLst>
-        <pc:spChg chg="mod">
-          <ac:chgData name="Nathanael Tjahyadi" userId="3d812bafe33aef0e" providerId="LiveId" clId="{29437703-73C4-43CF-9915-CA63B3397B0D}" dt="2026-08-05T07:39:46.095" v="120" actId="6549"/>
-          <ac:spMkLst>
-            <pc:docMk/>
-            <pc:sldMk cId="0" sldId="258"/>
-            <ac:spMk id="3" creationId="{00000000-0000-0000-0000-000000000000}"/>
-          </ac:spMkLst>
-        </pc:spChg>
-        <pc:spChg chg="mod">
-          <ac:chgData name="Nathanael Tjahyadi" userId="3d812bafe33aef0e" providerId="LiveId" clId="{29437703-73C4-43CF-9915-CA63B3397B0D}" dt="2026-08-05T06:30:15.273" v="20" actId="1076"/>
-          <ac:spMkLst>
-            <pc:docMk/>
-            <pc:sldMk cId="0" sldId="258"/>
-            <ac:spMk id="4" creationId="{00000000-0000-0000-0000-000000000000}"/>
-          </ac:spMkLst>
-        </pc:spChg>
-        <pc:spChg chg="mod">
-          <ac:chgData name="Nathanael Tjahyadi" userId="3d812bafe33aef0e" providerId="LiveId" clId="{29437703-73C4-43CF-9915-CA63B3397B0D}" dt="2026-08-05T06:30:12.971" v="19" actId="1076"/>
-          <ac:spMkLst>
-            <pc:docMk/>
-            <pc:sldMk cId="0" sldId="258"/>
-            <ac:spMk id="7" creationId="{00000000-0000-0000-0000-000000000000}"/>
-          </ac:spMkLst>
-        </pc:spChg>
-        <pc:spChg chg="mod">
-          <ac:chgData name="Nathanael Tjahyadi" userId="3d812bafe33aef0e" providerId="LiveId" clId="{29437703-73C4-43CF-9915-CA63B3397B0D}" dt="2026-08-05T06:30:12.971" v="19" actId="1076"/>
-          <ac:spMkLst>
-            <pc:docMk/>
-            <pc:sldMk cId="0" sldId="258"/>
-            <ac:spMk id="8" creationId="{00000000-0000-0000-0000-000000000000}"/>
-          </ac:spMkLst>
-        </pc:spChg>
-        <pc:spChg chg="mod">
-          <ac:chgData name="Nathanael Tjahyadi" userId="3d812bafe33aef0e" providerId="LiveId" clId="{29437703-73C4-43CF-9915-CA63B3397B0D}" dt="2026-08-05T06:30:12.971" v="19" actId="1076"/>
-          <ac:spMkLst>
-            <pc:docMk/>
-            <pc:sldMk cId="0" sldId="258"/>
-            <ac:spMk id="9" creationId="{00000000-0000-0000-0000-000000000000}"/>
-          </ac:spMkLst>
-        </pc:spChg>
-        <pc:spChg chg="mod">
-          <ac:chgData name="Nathanael Tjahyadi" userId="3d812bafe33aef0e" providerId="LiveId" clId="{29437703-73C4-43CF-9915-CA63B3397B0D}" dt="2026-08-05T06:30:12.971" v="19" actId="1076"/>
-          <ac:spMkLst>
-            <pc:docMk/>
-            <pc:sldMk cId="0" sldId="258"/>
-            <ac:spMk id="10" creationId="{00000000-0000-0000-0000-000000000000}"/>
-          </ac:spMkLst>
-        </pc:spChg>
-        <pc:spChg chg="mod">
-          <ac:chgData name="Nathanael Tjahyadi" userId="3d812bafe33aef0e" providerId="LiveId" clId="{29437703-73C4-43CF-9915-CA63B3397B0D}" dt="2026-08-05T06:30:12.971" v="19" actId="1076"/>
-          <ac:spMkLst>
-            <pc:docMk/>
-            <pc:sldMk cId="0" sldId="258"/>
-            <ac:spMk id="11" creationId="{00000000-0000-0000-0000-000000000000}"/>
-          </ac:spMkLst>
-        </pc:spChg>
-        <pc:spChg chg="mod">
-          <ac:chgData name="Nathanael Tjahyadi" userId="3d812bafe33aef0e" providerId="LiveId" clId="{29437703-73C4-43CF-9915-CA63B3397B0D}" dt="2026-08-05T06:30:12.971" v="19" actId="1076"/>
-          <ac:spMkLst>
-            <pc:docMk/>
-            <pc:sldMk cId="0" sldId="258"/>
-            <ac:spMk id="12" creationId="{00000000-0000-0000-0000-000000000000}"/>
-          </ac:spMkLst>
-        </pc:spChg>
-        <pc:spChg chg="mod">
-          <ac:chgData name="Nathanael Tjahyadi" userId="3d812bafe33aef0e" providerId="LiveId" clId="{29437703-73C4-43CF-9915-CA63B3397B0D}" dt="2026-08-05T06:30:09.611" v="18" actId="1076"/>
-          <ac:spMkLst>
-            <pc:docMk/>
-            <pc:sldMk cId="0" sldId="258"/>
-            <ac:spMk id="14" creationId="{00000000-0000-0000-0000-000000000000}"/>
-          </ac:spMkLst>
-        </pc:spChg>
-        <pc:spChg chg="mod">
-          <ac:chgData name="Nathanael Tjahyadi" userId="3d812bafe33aef0e" providerId="LiveId" clId="{29437703-73C4-43CF-9915-CA63B3397B0D}" dt="2026-08-05T06:30:12.971" v="19" actId="1076"/>
-          <ac:spMkLst>
-            <pc:docMk/>
-            <pc:sldMk cId="0" sldId="258"/>
-            <ac:spMk id="15" creationId="{00000000-0000-0000-0000-000000000000}"/>
-          </ac:spMkLst>
-        </pc:spChg>
-        <pc:spChg chg="mod">
-          <ac:chgData name="Nathanael Tjahyadi" userId="3d812bafe33aef0e" providerId="LiveId" clId="{29437703-73C4-43CF-9915-CA63B3397B0D}" dt="2026-08-05T06:30:12.971" v="19" actId="1076"/>
-          <ac:spMkLst>
-            <pc:docMk/>
-            <pc:sldMk cId="0" sldId="258"/>
-            <ac:spMk id="16" creationId="{00000000-0000-0000-0000-000000000000}"/>
-          </ac:spMkLst>
-        </pc:spChg>
-        <pc:spChg chg="mod">
-          <ac:chgData name="Nathanael Tjahyadi" userId="3d812bafe33aef0e" providerId="LiveId" clId="{29437703-73C4-43CF-9915-CA63B3397B0D}" dt="2026-08-05T06:30:12.971" v="19" actId="1076"/>
-          <ac:spMkLst>
-            <pc:docMk/>
-            <pc:sldMk cId="0" sldId="258"/>
-            <ac:spMk id="17" creationId="{00000000-0000-0000-0000-000000000000}"/>
-          </ac:spMkLst>
-        </pc:spChg>
-        <pc:spChg chg="mod">
-          <ac:chgData name="Nathanael Tjahyadi" userId="3d812bafe33aef0e" providerId="LiveId" clId="{29437703-73C4-43CF-9915-CA63B3397B0D}" dt="2026-08-05T06:30:12.971" v="19" actId="1076"/>
-          <ac:spMkLst>
-            <pc:docMk/>
-            <pc:sldMk cId="0" sldId="258"/>
-            <ac:spMk id="18" creationId="{00000000-0000-0000-0000-000000000000}"/>
-          </ac:spMkLst>
-        </pc:spChg>
-      </pc:sldChg>
-      <pc:sldChg chg="modSp mod">
-        <pc:chgData name="Nathanael Tjahyadi" userId="3d812bafe33aef0e" providerId="LiveId" clId="{29437703-73C4-43CF-9915-CA63B3397B0D}" dt="2026-08-05T06:30:36.132" v="36" actId="20577"/>
-        <pc:sldMkLst>
-          <pc:docMk/>
-          <pc:sldMk cId="0" sldId="259"/>
-        </pc:sldMkLst>
-        <pc:spChg chg="mod">
-          <ac:chgData name="Nathanael Tjahyadi" userId="3d812bafe33aef0e" providerId="LiveId" clId="{29437703-73C4-43CF-9915-CA63B3397B0D}" dt="2026-08-05T06:30:36.132" v="36" actId="20577"/>
-          <ac:spMkLst>
-            <pc:docMk/>
-            <pc:sldMk cId="0" sldId="259"/>
-            <ac:spMk id="3" creationId="{00000000-0000-0000-0000-000000000000}"/>
-          </ac:spMkLst>
-        </pc:spChg>
-      </pc:sldChg>
-      <pc:sldChg chg="modSp mod">
-        <pc:chgData name="Nathanael Tjahyadi" userId="3d812bafe33aef0e" providerId="LiveId" clId="{29437703-73C4-43CF-9915-CA63B3397B0D}" dt="2026-08-05T07:38:42.420" v="119" actId="20577"/>
-        <pc:sldMkLst>
-          <pc:docMk/>
-          <pc:sldMk cId="0" sldId="260"/>
-        </pc:sldMkLst>
-        <pc:spChg chg="mod">
-          <ac:chgData name="Nathanael Tjahyadi" userId="3d812bafe33aef0e" providerId="LiveId" clId="{29437703-73C4-43CF-9915-CA63B3397B0D}" dt="2026-08-05T07:38:42.420" v="119" actId="20577"/>
-          <ac:spMkLst>
-            <pc:docMk/>
-            <pc:sldMk cId="0" sldId="260"/>
-            <ac:spMk id="3" creationId="{00000000-0000-0000-0000-000000000000}"/>
-          </ac:spMkLst>
-        </pc:spChg>
-      </pc:sldChg>
-      <pc:sldChg chg="modSp mod">
-        <pc:chgData name="Nathanael Tjahyadi" userId="3d812bafe33aef0e" providerId="LiveId" clId="{29437703-73C4-43CF-9915-CA63B3397B0D}" dt="2026-08-05T07:26:40.979" v="61" actId="20577"/>
-        <pc:sldMkLst>
-          <pc:docMk/>
-          <pc:sldMk cId="0" sldId="262"/>
-        </pc:sldMkLst>
-        <pc:spChg chg="mod">
-          <ac:chgData name="Nathanael Tjahyadi" userId="3d812bafe33aef0e" providerId="LiveId" clId="{29437703-73C4-43CF-9915-CA63B3397B0D}" dt="2026-08-05T07:26:40.979" v="61" actId="20577"/>
-          <ac:spMkLst>
-            <pc:docMk/>
-            <pc:sldMk cId="0" sldId="262"/>
-            <ac:spMk id="3" creationId="{00000000-0000-0000-0000-000000000000}"/>
-          </ac:spMkLst>
-        </pc:spChg>
-      </pc:sldChg>
-      <pc:sldChg chg="modSp mod">
-        <pc:chgData name="Nathanael Tjahyadi" userId="3d812bafe33aef0e" providerId="LiveId" clId="{29437703-73C4-43CF-9915-CA63B3397B0D}" dt="2026-08-05T07:27:08.045" v="115" actId="20577"/>
-        <pc:sldMkLst>
-          <pc:docMk/>
-          <pc:sldMk cId="0" sldId="263"/>
-        </pc:sldMkLst>
-        <pc:spChg chg="mod">
-          <ac:chgData name="Nathanael Tjahyadi" userId="3d812bafe33aef0e" providerId="LiveId" clId="{29437703-73C4-43CF-9915-CA63B3397B0D}" dt="2026-08-05T07:27:08.045" v="115" actId="20577"/>
-          <ac:spMkLst>
-            <pc:docMk/>
-            <pc:sldMk cId="0" sldId="263"/>
-            <ac:spMk id="3" creationId="{00000000-0000-0000-0000-000000000000}"/>
-          </ac:spMkLst>
-        </pc:spChg>
-      </pc:sldChg>
-      <pc:sldChg chg="modSp mod">
-        <pc:chgData name="Nathanael Tjahyadi" userId="3d812bafe33aef0e" providerId="LiveId" clId="{29437703-73C4-43CF-9915-CA63B3397B0D}" dt="2026-08-05T07:27:16.683" v="116" actId="1076"/>
-        <pc:sldMkLst>
-          <pc:docMk/>
-          <pc:sldMk cId="0" sldId="264"/>
-        </pc:sldMkLst>
-        <pc:spChg chg="mod">
-          <ac:chgData name="Nathanael Tjahyadi" userId="3d812bafe33aef0e" providerId="LiveId" clId="{29437703-73C4-43CF-9915-CA63B3397B0D}" dt="2026-08-05T07:27:16.683" v="116" actId="1076"/>
-          <ac:spMkLst>
-            <pc:docMk/>
-            <pc:sldMk cId="0" sldId="264"/>
-            <ac:spMk id="28" creationId="{00000000-0000-0000-0000-000000000000}"/>
-          </ac:spMkLst>
-        </pc:spChg>
-        <pc:spChg chg="mod">
-          <ac:chgData name="Nathanael Tjahyadi" userId="3d812bafe33aef0e" providerId="LiveId" clId="{29437703-73C4-43CF-9915-CA63B3397B0D}" dt="2026-08-05T07:27:16.683" v="116" actId="1076"/>
-          <ac:spMkLst>
-            <pc:docMk/>
-            <pc:sldMk cId="0" sldId="264"/>
-            <ac:spMk id="33" creationId="{00000000-0000-0000-0000-000000000000}"/>
-          </ac:spMkLst>
-        </pc:spChg>
-      </pc:sldChg>
-    </pc:docChg>
-  </pc:docChgLst>
-</pc:chgInfo>
 </file>
 
 <file path=ppt/slideLayouts/slideLayout1.xml><?xml version="1.0" encoding="utf-8"?>
@@ -435,9 +157,10 @@
           <a:lstStyle/>
           <a:p>
             <a:r>
-              <a:rPr lang="en-US"/>
+              <a:rPr lang="en-US" smtClean="0"/>
               <a:t>Click to edit Master title style</a:t>
             </a:r>
+            <a:endParaRPr lang="en-US"/>
           </a:p>
         </p:txBody>
       </p:sp>
@@ -553,9 +276,10 @@
           </a:lstStyle>
           <a:p>
             <a:r>
-              <a:rPr lang="en-US"/>
+              <a:rPr lang="en-US" smtClean="0"/>
               <a:t>Click to edit Master subtitle style</a:t>
             </a:r>
+            <a:endParaRPr lang="en-US"/>
           </a:p>
         </p:txBody>
       </p:sp>
@@ -576,7 +300,7 @@
           <a:p>
             <a:fld id="{5BCAD085-E8A6-8845-BD4E-CB4CCA059FC4}" type="datetimeFigureOut">
               <a:rPr lang="en-US" smtClean="0"/>
-              <a:t>8/5/2026</a:t>
+              <a:t>1/27/13</a:t>
             </a:fld>
             <a:endParaRPr lang="en-US"/>
           </a:p>
@@ -670,9 +394,10 @@
           <a:lstStyle/>
           <a:p>
             <a:r>
-              <a:rPr lang="en-US"/>
+              <a:rPr lang="en-US" smtClean="0"/>
               <a:t>Click to edit Master title style</a:t>
             </a:r>
+            <a:endParaRPr lang="en-US"/>
           </a:p>
         </p:txBody>
       </p:sp>
@@ -693,37 +418,38 @@
           <a:p>
             <a:pPr lvl="0"/>
             <a:r>
-              <a:rPr lang="en-US"/>
+              <a:rPr lang="en-US" smtClean="0"/>
               <a:t>Click to edit Master text styles</a:t>
             </a:r>
           </a:p>
           <a:p>
             <a:pPr lvl="1"/>
             <a:r>
-              <a:rPr lang="en-US"/>
+              <a:rPr lang="en-US" smtClean="0"/>
               <a:t>Second level</a:t>
             </a:r>
           </a:p>
           <a:p>
             <a:pPr lvl="2"/>
             <a:r>
-              <a:rPr lang="en-US"/>
+              <a:rPr lang="en-US" smtClean="0"/>
               <a:t>Third level</a:t>
             </a:r>
           </a:p>
           <a:p>
             <a:pPr lvl="3"/>
             <a:r>
-              <a:rPr lang="en-US"/>
+              <a:rPr lang="en-US" smtClean="0"/>
               <a:t>Fourth level</a:t>
             </a:r>
           </a:p>
           <a:p>
             <a:pPr lvl="4"/>
             <a:r>
-              <a:rPr lang="en-US"/>
+              <a:rPr lang="en-US" smtClean="0"/>
               <a:t>Fifth level</a:t>
             </a:r>
+            <a:endParaRPr lang="en-US"/>
           </a:p>
         </p:txBody>
       </p:sp>
@@ -744,7 +470,7 @@
           <a:p>
             <a:fld id="{5BCAD085-E8A6-8845-BD4E-CB4CCA059FC4}" type="datetimeFigureOut">
               <a:rPr lang="en-US" smtClean="0"/>
-              <a:t>8/5/2026</a:t>
+              <a:t>1/27/13</a:t>
             </a:fld>
             <a:endParaRPr lang="en-US"/>
           </a:p>
@@ -843,9 +569,10 @@
           <a:lstStyle/>
           <a:p>
             <a:r>
-              <a:rPr lang="en-US"/>
+              <a:rPr lang="en-US" smtClean="0"/>
               <a:t>Click to edit Master title style</a:t>
             </a:r>
+            <a:endParaRPr lang="en-US"/>
           </a:p>
         </p:txBody>
       </p:sp>
@@ -871,37 +598,38 @@
           <a:p>
             <a:pPr lvl="0"/>
             <a:r>
-              <a:rPr lang="en-US"/>
+              <a:rPr lang="en-US" smtClean="0"/>
               <a:t>Click to edit Master text styles</a:t>
             </a:r>
           </a:p>
           <a:p>
             <a:pPr lvl="1"/>
             <a:r>
-              <a:rPr lang="en-US"/>
+              <a:rPr lang="en-US" smtClean="0"/>
               <a:t>Second level</a:t>
             </a:r>
           </a:p>
           <a:p>
             <a:pPr lvl="2"/>
             <a:r>
-              <a:rPr lang="en-US"/>
+              <a:rPr lang="en-US" smtClean="0"/>
               <a:t>Third level</a:t>
             </a:r>
           </a:p>
           <a:p>
             <a:pPr lvl="3"/>
             <a:r>
-              <a:rPr lang="en-US"/>
+              <a:rPr lang="en-US" smtClean="0"/>
               <a:t>Fourth level</a:t>
             </a:r>
           </a:p>
           <a:p>
             <a:pPr lvl="4"/>
             <a:r>
-              <a:rPr lang="en-US"/>
+              <a:rPr lang="en-US" smtClean="0"/>
               <a:t>Fifth level</a:t>
             </a:r>
+            <a:endParaRPr lang="en-US"/>
           </a:p>
         </p:txBody>
       </p:sp>
@@ -922,7 +650,7 @@
           <a:p>
             <a:fld id="{5BCAD085-E8A6-8845-BD4E-CB4CCA059FC4}" type="datetimeFigureOut">
               <a:rPr lang="en-US" smtClean="0"/>
-              <a:t>8/5/2026</a:t>
+              <a:t>1/27/13</a:t>
             </a:fld>
             <a:endParaRPr lang="en-US"/>
           </a:p>
@@ -1016,9 +744,10 @@
           <a:lstStyle/>
           <a:p>
             <a:r>
-              <a:rPr lang="en-US"/>
+              <a:rPr lang="en-US" smtClean="0"/>
               <a:t>Click to edit Master title style</a:t>
             </a:r>
+            <a:endParaRPr lang="en-US"/>
           </a:p>
         </p:txBody>
       </p:sp>
@@ -1039,37 +768,38 @@
           <a:p>
             <a:pPr lvl="0"/>
             <a:r>
-              <a:rPr lang="en-US"/>
+              <a:rPr lang="en-US" smtClean="0"/>
               <a:t>Click to edit Master text styles</a:t>
             </a:r>
           </a:p>
           <a:p>
             <a:pPr lvl="1"/>
             <a:r>
-              <a:rPr lang="en-US"/>
+              <a:rPr lang="en-US" smtClean="0"/>
               <a:t>Second level</a:t>
             </a:r>
           </a:p>
           <a:p>
             <a:pPr lvl="2"/>
             <a:r>
-              <a:rPr lang="en-US"/>
+              <a:rPr lang="en-US" smtClean="0"/>
               <a:t>Third level</a:t>
             </a:r>
           </a:p>
           <a:p>
             <a:pPr lvl="3"/>
             <a:r>
-              <a:rPr lang="en-US"/>
+              <a:rPr lang="en-US" smtClean="0"/>
               <a:t>Fourth level</a:t>
             </a:r>
           </a:p>
           <a:p>
             <a:pPr lvl="4"/>
             <a:r>
-              <a:rPr lang="en-US"/>
+              <a:rPr lang="en-US" smtClean="0"/>
               <a:t>Fifth level</a:t>
             </a:r>
+            <a:endParaRPr lang="en-US"/>
           </a:p>
         </p:txBody>
       </p:sp>
@@ -1090,7 +820,7 @@
           <a:p>
             <a:fld id="{5BCAD085-E8A6-8845-BD4E-CB4CCA059FC4}" type="datetimeFigureOut">
               <a:rPr lang="en-US" smtClean="0"/>
-              <a:t>8/5/2026</a:t>
+              <a:t>1/27/13</a:t>
             </a:fld>
             <a:endParaRPr lang="en-US"/>
           </a:p>
@@ -1193,9 +923,10 @@
           </a:lstStyle>
           <a:p>
             <a:r>
-              <a:rPr lang="en-US"/>
+              <a:rPr lang="en-US" smtClean="0"/>
               <a:t>Click to edit Master title style</a:t>
             </a:r>
+            <a:endParaRPr lang="en-US"/>
           </a:p>
         </p:txBody>
       </p:sp>
@@ -1312,7 +1043,7 @@
           <a:p>
             <a:pPr lvl="0"/>
             <a:r>
-              <a:rPr lang="en-US"/>
+              <a:rPr lang="en-US" smtClean="0"/>
               <a:t>Click to edit Master text styles</a:t>
             </a:r>
           </a:p>
@@ -1335,7 +1066,7 @@
           <a:p>
             <a:fld id="{5BCAD085-E8A6-8845-BD4E-CB4CCA059FC4}" type="datetimeFigureOut">
               <a:rPr lang="en-US" smtClean="0"/>
-              <a:t>8/5/2026</a:t>
+              <a:t>1/27/13</a:t>
             </a:fld>
             <a:endParaRPr lang="en-US"/>
           </a:p>
@@ -1429,9 +1160,10 @@
           <a:lstStyle/>
           <a:p>
             <a:r>
-              <a:rPr lang="en-US"/>
+              <a:rPr lang="en-US" smtClean="0"/>
               <a:t>Click to edit Master title style</a:t>
             </a:r>
+            <a:endParaRPr lang="en-US"/>
           </a:p>
         </p:txBody>
       </p:sp>
@@ -1485,37 +1217,38 @@
           <a:p>
             <a:pPr lvl="0"/>
             <a:r>
-              <a:rPr lang="en-US"/>
+              <a:rPr lang="en-US" smtClean="0"/>
               <a:t>Click to edit Master text styles</a:t>
             </a:r>
           </a:p>
           <a:p>
             <a:pPr lvl="1"/>
             <a:r>
-              <a:rPr lang="en-US"/>
+              <a:rPr lang="en-US" smtClean="0"/>
               <a:t>Second level</a:t>
             </a:r>
           </a:p>
           <a:p>
             <a:pPr lvl="2"/>
             <a:r>
-              <a:rPr lang="en-US"/>
+              <a:rPr lang="en-US" smtClean="0"/>
               <a:t>Third level</a:t>
             </a:r>
           </a:p>
           <a:p>
             <a:pPr lvl="3"/>
             <a:r>
-              <a:rPr lang="en-US"/>
+              <a:rPr lang="en-US" smtClean="0"/>
               <a:t>Fourth level</a:t>
             </a:r>
           </a:p>
           <a:p>
             <a:pPr lvl="4"/>
             <a:r>
-              <a:rPr lang="en-US"/>
+              <a:rPr lang="en-US" smtClean="0"/>
               <a:t>Fifth level</a:t>
             </a:r>
+            <a:endParaRPr lang="en-US"/>
           </a:p>
         </p:txBody>
       </p:sp>
@@ -1569,37 +1302,38 @@
           <a:p>
             <a:pPr lvl="0"/>
             <a:r>
-              <a:rPr lang="en-US"/>
+              <a:rPr lang="en-US" smtClean="0"/>
               <a:t>Click to edit Master text styles</a:t>
             </a:r>
           </a:p>
           <a:p>
             <a:pPr lvl="1"/>
             <a:r>
-              <a:rPr lang="en-US"/>
+              <a:rPr lang="en-US" smtClean="0"/>
               <a:t>Second level</a:t>
             </a:r>
           </a:p>
           <a:p>
             <a:pPr lvl="2"/>
             <a:r>
-              <a:rPr lang="en-US"/>
+              <a:rPr lang="en-US" smtClean="0"/>
               <a:t>Third level</a:t>
             </a:r>
           </a:p>
           <a:p>
             <a:pPr lvl="3"/>
             <a:r>
-              <a:rPr lang="en-US"/>
+              <a:rPr lang="en-US" smtClean="0"/>
               <a:t>Fourth level</a:t>
             </a:r>
           </a:p>
           <a:p>
             <a:pPr lvl="4"/>
             <a:r>
-              <a:rPr lang="en-US"/>
+              <a:rPr lang="en-US" smtClean="0"/>
               <a:t>Fifth level</a:t>
             </a:r>
+            <a:endParaRPr lang="en-US"/>
           </a:p>
         </p:txBody>
       </p:sp>
@@ -1620,7 +1354,7 @@
           <a:p>
             <a:fld id="{5BCAD085-E8A6-8845-BD4E-CB4CCA059FC4}" type="datetimeFigureOut">
               <a:rPr lang="en-US" smtClean="0"/>
-              <a:t>8/5/2026</a:t>
+              <a:t>1/27/13</a:t>
             </a:fld>
             <a:endParaRPr lang="en-US"/>
           </a:p>
@@ -1718,9 +1452,10 @@
           </a:lstStyle>
           <a:p>
             <a:r>
-              <a:rPr lang="en-US"/>
+              <a:rPr lang="en-US" smtClean="0"/>
               <a:t>Click to edit Master title style</a:t>
             </a:r>
+            <a:endParaRPr lang="en-US"/>
           </a:p>
         </p:txBody>
       </p:sp>
@@ -1783,7 +1518,7 @@
           <a:p>
             <a:pPr lvl="0"/>
             <a:r>
-              <a:rPr lang="en-US"/>
+              <a:rPr lang="en-US" smtClean="0"/>
               <a:t>Click to edit Master text styles</a:t>
             </a:r>
           </a:p>
@@ -1839,37 +1574,38 @@
           <a:p>
             <a:pPr lvl="0"/>
             <a:r>
-              <a:rPr lang="en-US"/>
+              <a:rPr lang="en-US" smtClean="0"/>
               <a:t>Click to edit Master text styles</a:t>
             </a:r>
           </a:p>
           <a:p>
             <a:pPr lvl="1"/>
             <a:r>
-              <a:rPr lang="en-US"/>
+              <a:rPr lang="en-US" smtClean="0"/>
               <a:t>Second level</a:t>
             </a:r>
           </a:p>
           <a:p>
             <a:pPr lvl="2"/>
             <a:r>
-              <a:rPr lang="en-US"/>
+              <a:rPr lang="en-US" smtClean="0"/>
               <a:t>Third level</a:t>
             </a:r>
           </a:p>
           <a:p>
             <a:pPr lvl="3"/>
             <a:r>
-              <a:rPr lang="en-US"/>
+              <a:rPr lang="en-US" smtClean="0"/>
               <a:t>Fourth level</a:t>
             </a:r>
           </a:p>
           <a:p>
             <a:pPr lvl="4"/>
             <a:r>
-              <a:rPr lang="en-US"/>
+              <a:rPr lang="en-US" smtClean="0"/>
               <a:t>Fifth level</a:t>
             </a:r>
+            <a:endParaRPr lang="en-US"/>
           </a:p>
         </p:txBody>
       </p:sp>
@@ -1932,7 +1668,7 @@
           <a:p>
             <a:pPr lvl="0"/>
             <a:r>
-              <a:rPr lang="en-US"/>
+              <a:rPr lang="en-US" smtClean="0"/>
               <a:t>Click to edit Master text styles</a:t>
             </a:r>
           </a:p>
@@ -1988,37 +1724,38 @@
           <a:p>
             <a:pPr lvl="0"/>
             <a:r>
-              <a:rPr lang="en-US"/>
+              <a:rPr lang="en-US" smtClean="0"/>
               <a:t>Click to edit Master text styles</a:t>
             </a:r>
           </a:p>
           <a:p>
             <a:pPr lvl="1"/>
             <a:r>
-              <a:rPr lang="en-US"/>
+              <a:rPr lang="en-US" smtClean="0"/>
               <a:t>Second level</a:t>
             </a:r>
           </a:p>
           <a:p>
             <a:pPr lvl="2"/>
             <a:r>
-              <a:rPr lang="en-US"/>
+              <a:rPr lang="en-US" smtClean="0"/>
               <a:t>Third level</a:t>
             </a:r>
           </a:p>
           <a:p>
             <a:pPr lvl="3"/>
             <a:r>
-              <a:rPr lang="en-US"/>
+              <a:rPr lang="en-US" smtClean="0"/>
               <a:t>Fourth level</a:t>
             </a:r>
           </a:p>
           <a:p>
             <a:pPr lvl="4"/>
             <a:r>
-              <a:rPr lang="en-US"/>
+              <a:rPr lang="en-US" smtClean="0"/>
               <a:t>Fifth level</a:t>
             </a:r>
+            <a:endParaRPr lang="en-US"/>
           </a:p>
         </p:txBody>
       </p:sp>
@@ -2039,7 +1776,7 @@
           <a:p>
             <a:fld id="{5BCAD085-E8A6-8845-BD4E-CB4CCA059FC4}" type="datetimeFigureOut">
               <a:rPr lang="en-US" smtClean="0"/>
-              <a:t>8/5/2026</a:t>
+              <a:t>1/27/13</a:t>
             </a:fld>
             <a:endParaRPr lang="en-US"/>
           </a:p>
@@ -2133,9 +1870,10 @@
           <a:lstStyle/>
           <a:p>
             <a:r>
-              <a:rPr lang="en-US"/>
+              <a:rPr lang="en-US" smtClean="0"/>
               <a:t>Click to edit Master title style</a:t>
             </a:r>
+            <a:endParaRPr lang="en-US"/>
           </a:p>
         </p:txBody>
       </p:sp>
@@ -2156,7 +1894,7 @@
           <a:p>
             <a:fld id="{5BCAD085-E8A6-8845-BD4E-CB4CCA059FC4}" type="datetimeFigureOut">
               <a:rPr lang="en-US" smtClean="0"/>
-              <a:t>8/5/2026</a:t>
+              <a:t>1/27/13</a:t>
             </a:fld>
             <a:endParaRPr lang="en-US"/>
           </a:p>
@@ -2251,7 +1989,7 @@
           <a:p>
             <a:fld id="{5BCAD085-E8A6-8845-BD4E-CB4CCA059FC4}" type="datetimeFigureOut">
               <a:rPr lang="en-US" smtClean="0"/>
-              <a:t>8/5/2026</a:t>
+              <a:t>1/27/13</a:t>
             </a:fld>
             <a:endParaRPr lang="en-US"/>
           </a:p>
@@ -2354,9 +2092,10 @@
           </a:lstStyle>
           <a:p>
             <a:r>
-              <a:rPr lang="en-US"/>
+              <a:rPr lang="en-US" smtClean="0"/>
               <a:t>Click to edit Master title style</a:t>
             </a:r>
+            <a:endParaRPr lang="en-US"/>
           </a:p>
         </p:txBody>
       </p:sp>
@@ -2410,37 +2149,38 @@
           <a:p>
             <a:pPr lvl="0"/>
             <a:r>
-              <a:rPr lang="en-US"/>
+              <a:rPr lang="en-US" smtClean="0"/>
               <a:t>Click to edit Master text styles</a:t>
             </a:r>
           </a:p>
           <a:p>
             <a:pPr lvl="1"/>
             <a:r>
-              <a:rPr lang="en-US"/>
+              <a:rPr lang="en-US" smtClean="0"/>
               <a:t>Second level</a:t>
             </a:r>
           </a:p>
           <a:p>
             <a:pPr lvl="2"/>
             <a:r>
-              <a:rPr lang="en-US"/>
+              <a:rPr lang="en-US" smtClean="0"/>
               <a:t>Third level</a:t>
             </a:r>
           </a:p>
           <a:p>
             <a:pPr lvl="3"/>
             <a:r>
-              <a:rPr lang="en-US"/>
+              <a:rPr lang="en-US" smtClean="0"/>
               <a:t>Fourth level</a:t>
             </a:r>
           </a:p>
           <a:p>
             <a:pPr lvl="4"/>
             <a:r>
-              <a:rPr lang="en-US"/>
+              <a:rPr lang="en-US" smtClean="0"/>
               <a:t>Fifth level</a:t>
             </a:r>
+            <a:endParaRPr lang="en-US"/>
           </a:p>
         </p:txBody>
       </p:sp>
@@ -2503,7 +2243,7 @@
           <a:p>
             <a:pPr lvl="0"/>
             <a:r>
-              <a:rPr lang="en-US"/>
+              <a:rPr lang="en-US" smtClean="0"/>
               <a:t>Click to edit Master text styles</a:t>
             </a:r>
           </a:p>
@@ -2526,7 +2266,7 @@
           <a:p>
             <a:fld id="{5BCAD085-E8A6-8845-BD4E-CB4CCA059FC4}" type="datetimeFigureOut">
               <a:rPr lang="en-US" smtClean="0"/>
-              <a:t>8/5/2026</a:t>
+              <a:t>1/27/13</a:t>
             </a:fld>
             <a:endParaRPr lang="en-US"/>
           </a:p>
@@ -2629,9 +2369,10 @@
           </a:lstStyle>
           <a:p>
             <a:r>
-              <a:rPr lang="en-US"/>
+              <a:rPr lang="en-US" smtClean="0"/>
               <a:t>Click to edit Master title style</a:t>
             </a:r>
+            <a:endParaRPr lang="en-US"/>
           </a:p>
         </p:txBody>
       </p:sp>
@@ -2755,7 +2496,7 @@
           <a:p>
             <a:pPr lvl="0"/>
             <a:r>
-              <a:rPr lang="en-US"/>
+              <a:rPr lang="en-US" smtClean="0"/>
               <a:t>Click to edit Master text styles</a:t>
             </a:r>
           </a:p>
@@ -2778,7 +2519,7 @@
           <a:p>
             <a:fld id="{5BCAD085-E8A6-8845-BD4E-CB4CCA059FC4}" type="datetimeFigureOut">
               <a:rPr lang="en-US" smtClean="0"/>
-              <a:t>8/5/2026</a:t>
+              <a:t>1/27/13</a:t>
             </a:fld>
             <a:endParaRPr lang="en-US"/>
           </a:p>
@@ -2887,9 +2628,10 @@
           <a:lstStyle/>
           <a:p>
             <a:r>
-              <a:rPr lang="en-US"/>
+              <a:rPr lang="en-US" smtClean="0"/>
               <a:t>Click to edit Master title style</a:t>
             </a:r>
+            <a:endParaRPr lang="en-US"/>
           </a:p>
         </p:txBody>
       </p:sp>
@@ -2920,37 +2662,38 @@
           <a:p>
             <a:pPr lvl="0"/>
             <a:r>
-              <a:rPr lang="en-US"/>
+              <a:rPr lang="en-US" smtClean="0"/>
               <a:t>Click to edit Master text styles</a:t>
             </a:r>
           </a:p>
           <a:p>
             <a:pPr lvl="1"/>
             <a:r>
-              <a:rPr lang="en-US"/>
+              <a:rPr lang="en-US" smtClean="0"/>
               <a:t>Second level</a:t>
             </a:r>
           </a:p>
           <a:p>
             <a:pPr lvl="2"/>
             <a:r>
-              <a:rPr lang="en-US"/>
+              <a:rPr lang="en-US" smtClean="0"/>
               <a:t>Third level</a:t>
             </a:r>
           </a:p>
           <a:p>
             <a:pPr lvl="3"/>
             <a:r>
-              <a:rPr lang="en-US"/>
+              <a:rPr lang="en-US" smtClean="0"/>
               <a:t>Fourth level</a:t>
             </a:r>
           </a:p>
           <a:p>
             <a:pPr lvl="4"/>
             <a:r>
-              <a:rPr lang="en-US"/>
+              <a:rPr lang="en-US" smtClean="0"/>
               <a:t>Fifth level</a:t>
             </a:r>
+            <a:endParaRPr lang="en-US"/>
           </a:p>
         </p:txBody>
       </p:sp>
@@ -2989,7 +2732,7 @@
           <a:p>
             <a:fld id="{5BCAD085-E8A6-8845-BD4E-CB4CCA059FC4}" type="datetimeFigureOut">
               <a:rPr lang="en-US" smtClean="0"/>
-              <a:t>8/5/2026</a:t>
+              <a:t>1/27/13</a:t>
             </a:fld>
             <a:endParaRPr lang="en-US"/>
           </a:p>
@@ -3348,7 +3091,7 @@
 </file>
 
 <file path=ppt/slides/slide1.xml><?xml version="1.0" encoding="utf-8"?>
-<p:sld xmlns:a="http://schemas.openxmlformats.org/drawingml/2006/main" xmlns:r="http://schemas.openxmlformats.org/officeDocument/2006/relationships" xmlns:p="http://schemas.openxmlformats.org/presentationml/2006/main">
+<p:sld xmlns:a="http://schemas.openxmlformats.org/drawingml/2006/main" xmlns:p="http://schemas.openxmlformats.org/presentationml/2006/main" xmlns:r="http://schemas.openxmlformats.org/officeDocument/2006/relationships">
   <p:cSld>
     <p:bg>
       <p:bgPr>
@@ -3364,14 +3107,7 @@
         <p:cNvGrpSpPr/>
         <p:nvPr/>
       </p:nvGrpSpPr>
-      <p:grpSpPr>
-        <a:xfrm>
-          <a:off x="0" y="0"/>
-          <a:ext cx="0" cy="0"/>
-          <a:chOff x="0" y="0"/>
-          <a:chExt cx="0" cy="0"/>
-        </a:xfrm>
-      </p:grpSpPr>
+      <p:grpSpPr/>
       <p:sp>
         <p:nvSpPr>
           <p:cNvPr id="2" name="Rectangle 1"/>
@@ -3413,7 +3149,6 @@
           <a:lstStyle/>
           <a:p>
             <a:pPr algn="ctr"/>
-            <a:endParaRPr/>
           </a:p>
         </p:txBody>
       </p:sp>
@@ -3434,7 +3169,7 @@
           <a:noFill/>
         </p:spPr>
         <p:txBody>
-          <a:bodyPr wrap="square" lIns="0" tIns="0" rIns="0" bIns="0" anchor="t">
+          <a:bodyPr wrap="square" anchor="t" lIns="0" rIns="0" tIns="0" bIns="0">
             <a:spAutoFit/>
           </a:bodyPr>
           <a:lstStyle/>
@@ -3464,7 +3199,7 @@
         </p:nvSpPr>
         <p:spPr>
           <a:xfrm>
-            <a:off x="502920" y="2002245"/>
+            <a:off x="502920" y="960120"/>
             <a:ext cx="8138160" cy="1737360"/>
           </a:xfrm>
           <a:prstGeom prst="rect">
@@ -3473,7 +3208,7 @@
           <a:noFill/>
         </p:spPr>
         <p:txBody>
-          <a:bodyPr wrap="square" lIns="0" tIns="0" rIns="0" bIns="0" anchor="t">
+          <a:bodyPr wrap="square" anchor="t" lIns="0" rIns="0" tIns="0" bIns="0">
             <a:spAutoFit/>
           </a:bodyPr>
           <a:lstStyle/>
@@ -3507,6 +3242,61 @@
                 <a:latin typeface="Poppins"/>
               </a:rPr>
               <a:t>with Vision and Language</a:t>
+            </a:r>
+          </a:p>
+        </p:txBody>
+      </p:sp>
+      <p:sp>
+        <p:nvSpPr>
+          <p:cNvPr id="5" name="TextBox 4"/>
+          <p:cNvSpPr txBox="1"/>
+          <p:nvPr/>
+        </p:nvSpPr>
+        <p:spPr>
+          <a:xfrm>
+            <a:off x="502920" y="2743200"/>
+            <a:ext cx="7863840" cy="685800"/>
+          </a:xfrm>
+          <a:prstGeom prst="rect">
+            <a:avLst/>
+          </a:prstGeom>
+          <a:noFill/>
+        </p:spPr>
+        <p:txBody>
+          <a:bodyPr wrap="square" anchor="t" lIns="0" rIns="0" tIns="0" bIns="0">
+            <a:spAutoFit/>
+          </a:bodyPr>
+          <a:lstStyle/>
+          <a:p>
+            <a:pPr algn="l">
+              <a:lnSpc>
+                <a:spcPct val="100000"/>
+              </a:lnSpc>
+            </a:pPr>
+            <a:r>
+              <a:rPr sz="1400" b="0">
+                <a:solidFill>
+                  <a:srgbClr val="EAF6F8"/>
+                </a:solidFill>
+                <a:latin typeface="Poppins"/>
+              </a:rPr>
+              <a:t>You say what to follow. The drone finds it and chases it.</a:t>
+            </a:r>
+          </a:p>
+          <a:p>
+            <a:pPr algn="l">
+              <a:lnSpc>
+                <a:spcPct val="100000"/>
+              </a:lnSpc>
+            </a:pPr>
+            <a:r>
+              <a:rPr sz="1400" b="0">
+                <a:solidFill>
+                  <a:srgbClr val="EAF6F8"/>
+                </a:solidFill>
+                <a:latin typeface="Poppins"/>
+              </a:rPr>
+              <a:t>The guardrail decides where it may not go.</a:t>
             </a:r>
           </a:p>
         </p:txBody>
@@ -3552,7 +3342,61 @@
           <a:lstStyle/>
           <a:p>
             <a:pPr algn="ctr"/>
-            <a:endParaRPr/>
+          </a:p>
+        </p:txBody>
+      </p:sp>
+      <p:sp>
+        <p:nvSpPr>
+          <p:cNvPr id="7" name="TextBox 6"/>
+          <p:cNvSpPr txBox="1"/>
+          <p:nvPr/>
+        </p:nvSpPr>
+        <p:spPr>
+          <a:xfrm>
+            <a:off x="502920" y="3886200"/>
+            <a:ext cx="7315200" cy="914400"/>
+          </a:xfrm>
+          <a:prstGeom prst="rect">
+            <a:avLst/>
+          </a:prstGeom>
+          <a:noFill/>
+        </p:spPr>
+        <p:txBody>
+          <a:bodyPr wrap="square" anchor="t" lIns="0" rIns="0" tIns="0" bIns="0">
+            <a:spAutoFit/>
+          </a:bodyPr>
+          <a:lstStyle/>
+          <a:p>
+            <a:pPr algn="l">
+              <a:lnSpc>
+                <a:spcPct val="100000"/>
+              </a:lnSpc>
+            </a:pPr>
+            <a:r>
+              <a:rPr sz="1100" b="0">
+                <a:solidFill>
+                  <a:srgbClr val="EAF6F8"/>
+                </a:solidFill>
+                <a:latin typeface="Poppins"/>
+              </a:rPr>
+              <a:t>Department of International Graduate Program, EECS</a:t>
+            </a:r>
+          </a:p>
+          <a:p>
+            <a:pPr algn="l">
+              <a:lnSpc>
+                <a:spcPct val="100000"/>
+              </a:lnSpc>
+            </a:pPr>
+            <a:r>
+              <a:rPr sz="1100" b="0">
+                <a:solidFill>
+                  <a:srgbClr val="EAF6F8"/>
+                </a:solidFill>
+                <a:latin typeface="Poppins"/>
+              </a:rPr>
+              <a:t>Advisor: Prof. Kuan-Ting Lai   ·   Presenter: Nathanael Cayadi</a:t>
+            </a:r>
           </a:p>
         </p:txBody>
       </p:sp>
@@ -3565,7 +3409,7 @@
 </file>
 
 <file path=ppt/slides/slide10.xml><?xml version="1.0" encoding="utf-8"?>
-<p:sld xmlns:a="http://schemas.openxmlformats.org/drawingml/2006/main" xmlns:r="http://schemas.openxmlformats.org/officeDocument/2006/relationships" xmlns:p="http://schemas.openxmlformats.org/presentationml/2006/main">
+<p:sld xmlns:a="http://schemas.openxmlformats.org/drawingml/2006/main" xmlns:p="http://schemas.openxmlformats.org/presentationml/2006/main" xmlns:r="http://schemas.openxmlformats.org/officeDocument/2006/relationships">
   <p:cSld>
     <p:bg>
       <p:bgPr>
@@ -3581,14 +3425,7 @@
         <p:cNvGrpSpPr/>
         <p:nvPr/>
       </p:nvGrpSpPr>
-      <p:grpSpPr>
-        <a:xfrm>
-          <a:off x="0" y="0"/>
-          <a:ext cx="0" cy="0"/>
-          <a:chOff x="0" y="0"/>
-          <a:chExt cx="0" cy="0"/>
-        </a:xfrm>
-      </p:grpSpPr>
+      <p:grpSpPr/>
       <p:sp>
         <p:nvSpPr>
           <p:cNvPr id="2" name="TextBox 1"/>
@@ -3606,7 +3443,7 @@
           <a:noFill/>
         </p:spPr>
         <p:txBody>
-          <a:bodyPr wrap="square" lIns="0" tIns="0" rIns="0" bIns="0" anchor="t">
+          <a:bodyPr wrap="square" anchor="t" lIns="0" rIns="0" tIns="0" bIns="0">
             <a:spAutoFit/>
           </a:bodyPr>
           <a:lstStyle/>
@@ -3645,7 +3482,7 @@
           <a:noFill/>
         </p:spPr>
         <p:txBody>
-          <a:bodyPr wrap="square" lIns="0" tIns="0" rIns="0" bIns="0" anchor="t">
+          <a:bodyPr wrap="square" anchor="t" lIns="0" rIns="0" tIns="0" bIns="0">
             <a:spAutoFit/>
           </a:bodyPr>
           <a:lstStyle/>
@@ -3708,7 +3545,6 @@
           <a:lstStyle/>
           <a:p>
             <a:pPr algn="ctr"/>
-            <a:endParaRPr/>
           </a:p>
         </p:txBody>
       </p:sp>
@@ -3729,7 +3565,7 @@
           <a:noFill/>
         </p:spPr>
         <p:txBody>
-          <a:bodyPr wrap="square" lIns="0" tIns="0" rIns="0" bIns="0" anchor="t">
+          <a:bodyPr wrap="square" anchor="t" lIns="0" rIns="0" tIns="0" bIns="0">
             <a:spAutoFit/>
           </a:bodyPr>
           <a:lstStyle/>
@@ -3792,7 +3628,6 @@
           <a:lstStyle/>
           <a:p>
             <a:pPr algn="ctr"/>
-            <a:endParaRPr/>
           </a:p>
         </p:txBody>
       </p:sp>
@@ -3813,7 +3648,7 @@
           <a:noFill/>
         </p:spPr>
         <p:txBody>
-          <a:bodyPr wrap="square" lIns="0" tIns="0" rIns="0" bIns="0" anchor="t">
+          <a:bodyPr wrap="square" anchor="t" lIns="0" rIns="0" tIns="0" bIns="0">
             <a:spAutoFit/>
           </a:bodyPr>
           <a:lstStyle/>
@@ -3852,7 +3687,7 @@
           <a:noFill/>
         </p:spPr>
         <p:txBody>
-          <a:bodyPr wrap="square" lIns="0" tIns="0" rIns="0" bIns="0" anchor="t">
+          <a:bodyPr wrap="square" anchor="t" lIns="0" rIns="0" tIns="0" bIns="0">
             <a:spAutoFit/>
           </a:bodyPr>
           <a:lstStyle/>
@@ -3915,7 +3750,6 @@
           <a:lstStyle/>
           <a:p>
             <a:pPr algn="ctr"/>
-            <a:endParaRPr/>
           </a:p>
         </p:txBody>
       </p:sp>
@@ -3936,7 +3770,7 @@
           <a:noFill/>
         </p:spPr>
         <p:txBody>
-          <a:bodyPr wrap="square" lIns="0" tIns="0" rIns="0" bIns="0" anchor="t">
+          <a:bodyPr wrap="square" anchor="t" lIns="0" rIns="0" tIns="0" bIns="0">
             <a:spAutoFit/>
           </a:bodyPr>
           <a:lstStyle/>
@@ -3975,7 +3809,7 @@
           <a:noFill/>
         </p:spPr>
         <p:txBody>
-          <a:bodyPr wrap="square" lIns="0" tIns="0" rIns="0" bIns="0" anchor="t">
+          <a:bodyPr wrap="square" anchor="t" lIns="0" rIns="0" tIns="0" bIns="0">
             <a:spAutoFit/>
           </a:bodyPr>
           <a:lstStyle/>
@@ -4054,7 +3888,6 @@
           <a:lstStyle/>
           <a:p>
             <a:pPr algn="ctr"/>
-            <a:endParaRPr/>
           </a:p>
         </p:txBody>
       </p:sp>
@@ -4075,7 +3908,7 @@
           <a:noFill/>
         </p:spPr>
         <p:txBody>
-          <a:bodyPr wrap="square" lIns="0" tIns="0" rIns="0" bIns="0" anchor="t">
+          <a:bodyPr wrap="square" anchor="t" lIns="0" rIns="0" tIns="0" bIns="0">
             <a:spAutoFit/>
           </a:bodyPr>
           <a:lstStyle/>
@@ -4114,7 +3947,7 @@
           <a:noFill/>
         </p:spPr>
         <p:txBody>
-          <a:bodyPr wrap="square" lIns="0" tIns="0" rIns="0" bIns="0" anchor="t">
+          <a:bodyPr wrap="square" anchor="t" lIns="0" rIns="0" tIns="0" bIns="0">
             <a:spAutoFit/>
           </a:bodyPr>
           <a:lstStyle/>
@@ -4193,7 +4026,6 @@
           <a:lstStyle/>
           <a:p>
             <a:pPr algn="ctr"/>
-            <a:endParaRPr/>
           </a:p>
         </p:txBody>
       </p:sp>
@@ -4214,7 +4046,7 @@
           <a:noFill/>
         </p:spPr>
         <p:txBody>
-          <a:bodyPr wrap="square" lIns="0" tIns="0" rIns="0" bIns="0" anchor="t">
+          <a:bodyPr wrap="square" anchor="t" lIns="0" rIns="0" tIns="0" bIns="0">
             <a:spAutoFit/>
           </a:bodyPr>
           <a:lstStyle/>
@@ -4253,7 +4085,7 @@
           <a:noFill/>
         </p:spPr>
         <p:txBody>
-          <a:bodyPr wrap="square" lIns="0" tIns="0" rIns="0" bIns="0" anchor="t">
+          <a:bodyPr wrap="square" anchor="t" lIns="0" rIns="0" tIns="0" bIns="0">
             <a:spAutoFit/>
           </a:bodyPr>
           <a:lstStyle/>
@@ -4332,7 +4164,6 @@
           <a:lstStyle/>
           <a:p>
             <a:pPr algn="ctr"/>
-            <a:endParaRPr/>
           </a:p>
         </p:txBody>
       </p:sp>
@@ -4353,7 +4184,7 @@
           <a:noFill/>
         </p:spPr>
         <p:txBody>
-          <a:bodyPr wrap="square" lIns="0" tIns="0" rIns="0" bIns="0" anchor="t">
+          <a:bodyPr wrap="square" anchor="t" lIns="0" rIns="0" tIns="0" bIns="0">
             <a:spAutoFit/>
           </a:bodyPr>
           <a:lstStyle/>
@@ -4400,7 +4231,7 @@
 </file>
 
 <file path=ppt/slides/slide11.xml><?xml version="1.0" encoding="utf-8"?>
-<p:sld xmlns:a="http://schemas.openxmlformats.org/drawingml/2006/main" xmlns:r="http://schemas.openxmlformats.org/officeDocument/2006/relationships" xmlns:p="http://schemas.openxmlformats.org/presentationml/2006/main">
+<p:sld xmlns:a="http://schemas.openxmlformats.org/drawingml/2006/main" xmlns:p="http://schemas.openxmlformats.org/presentationml/2006/main" xmlns:r="http://schemas.openxmlformats.org/officeDocument/2006/relationships">
   <p:cSld>
     <p:bg>
       <p:bgPr>
@@ -4416,14 +4247,7 @@
         <p:cNvGrpSpPr/>
         <p:nvPr/>
       </p:nvGrpSpPr>
-      <p:grpSpPr>
-        <a:xfrm>
-          <a:off x="0" y="0"/>
-          <a:ext cx="0" cy="0"/>
-          <a:chOff x="0" y="0"/>
-          <a:chExt cx="0" cy="0"/>
-        </a:xfrm>
-      </p:grpSpPr>
+      <p:grpSpPr/>
       <p:sp>
         <p:nvSpPr>
           <p:cNvPr id="2" name="TextBox 1"/>
@@ -4441,7 +4265,7 @@
           <a:noFill/>
         </p:spPr>
         <p:txBody>
-          <a:bodyPr wrap="square" lIns="0" tIns="0" rIns="0" bIns="0" anchor="t">
+          <a:bodyPr wrap="square" anchor="t" lIns="0" rIns="0" tIns="0" bIns="0">
             <a:spAutoFit/>
           </a:bodyPr>
           <a:lstStyle/>
@@ -4480,7 +4304,7 @@
           <a:noFill/>
         </p:spPr>
         <p:txBody>
-          <a:bodyPr wrap="square" lIns="0" tIns="0" rIns="0" bIns="0" anchor="t">
+          <a:bodyPr wrap="square" anchor="t" lIns="0" rIns="0" tIns="0" bIns="0">
             <a:spAutoFit/>
           </a:bodyPr>
           <a:lstStyle/>
@@ -4519,7 +4343,7 @@
           <a:noFill/>
         </p:spPr>
         <p:txBody>
-          <a:bodyPr wrap="square" lIns="0" tIns="0" rIns="0" bIns="0" anchor="t">
+          <a:bodyPr wrap="square" anchor="t" lIns="0" rIns="0" tIns="0" bIns="0">
             <a:spAutoFit/>
           </a:bodyPr>
           <a:lstStyle/>
@@ -4536,7 +4360,7 @@
                 </a:solidFill>
                 <a:latin typeface="Poppins"/>
               </a:rPr>
-              <a:t>Stated here so nobody discovers it during questions.</a:t>
+              <a:t>Volunteered, not conceded — each one is measured.</a:t>
             </a:r>
           </a:p>
         </p:txBody>
@@ -4582,7 +4406,6 @@
           <a:lstStyle/>
           <a:p>
             <a:pPr algn="ctr"/>
-            <a:endParaRPr/>
           </a:p>
         </p:txBody>
       </p:sp>
@@ -4603,7 +4426,7 @@
           <a:noFill/>
         </p:spPr>
         <p:txBody>
-          <a:bodyPr wrap="square" lIns="0" tIns="0" rIns="0" bIns="0" anchor="t">
+          <a:bodyPr wrap="square" anchor="t" lIns="0" rIns="0" tIns="0" bIns="0">
             <a:spAutoFit/>
           </a:bodyPr>
           <a:lstStyle/>
@@ -4634,7 +4457,7 @@
         <p:spPr>
           <a:xfrm>
             <a:off x="502920" y="1691640"/>
-            <a:ext cx="8138160" cy="868680"/>
+            <a:ext cx="8138160" cy="713232"/>
           </a:xfrm>
           <a:prstGeom prst="roundRect">
             <a:avLst/>
@@ -4666,7 +4489,6 @@
           <a:lstStyle/>
           <a:p>
             <a:pPr algn="ctr"/>
-            <a:endParaRPr/>
           </a:p>
         </p:txBody>
       </p:sp>
@@ -4679,101 +4501,62 @@
         <p:spPr>
           <a:xfrm>
             <a:off x="713232" y="1810512"/>
-            <a:ext cx="7680960" cy="256032"/>
-          </a:xfrm>
-          <a:prstGeom prst="rect">
-            <a:avLst/>
-          </a:prstGeom>
-          <a:noFill/>
-        </p:spPr>
-        <p:txBody>
-          <a:bodyPr wrap="square" lIns="0" tIns="0" rIns="0" bIns="0" anchor="t">
-            <a:spAutoFit/>
-          </a:bodyPr>
-          <a:lstStyle/>
-          <a:p>
-            <a:pPr algn="l">
-              <a:lnSpc>
-                <a:spcPct val="100000"/>
-              </a:lnSpc>
-            </a:pPr>
-            <a:r>
-              <a:rPr sz="1200" b="1">
+            <a:ext cx="7772400" cy="502920"/>
+          </a:xfrm>
+          <a:prstGeom prst="rect">
+            <a:avLst/>
+          </a:prstGeom>
+          <a:noFill/>
+        </p:spPr>
+        <p:txBody>
+          <a:bodyPr wrap="square" anchor="t" lIns="0" rIns="0" tIns="0" bIns="0">
+            <a:spAutoFit/>
+          </a:bodyPr>
+          <a:lstStyle/>
+          <a:p>
+            <a:pPr algn="l">
+              <a:lnSpc>
+                <a:spcPct val="100000"/>
+              </a:lnSpc>
+            </a:pPr>
+            <a:r>
+              <a:rPr sz="1050" b="0">
                 <a:solidFill>
                   <a:srgbClr val="1A1A1A"/>
                 </a:solidFill>
                 <a:latin typeface="Poppins"/>
               </a:rPr>
-              <a:t>The noun does most of the work</a:t>
-            </a:r>
-          </a:p>
-        </p:txBody>
-      </p:sp>
-      <p:sp>
-        <p:nvSpPr>
-          <p:cNvPr id="9" name="TextBox 8"/>
-          <p:cNvSpPr txBox="1"/>
-          <p:nvPr/>
-        </p:nvSpPr>
-        <p:spPr>
-          <a:xfrm>
-            <a:off x="713232" y="2103120"/>
-            <a:ext cx="7680960" cy="411480"/>
-          </a:xfrm>
-          <a:prstGeom prst="rect">
-            <a:avLst/>
-          </a:prstGeom>
-          <a:noFill/>
-        </p:spPr>
-        <p:txBody>
-          <a:bodyPr wrap="square" lIns="0" tIns="0" rIns="0" bIns="0" anchor="t">
-            <a:spAutoFit/>
-          </a:bodyPr>
-          <a:lstStyle/>
-          <a:p>
-            <a:pPr algn="l">
-              <a:lnSpc>
-                <a:spcPct val="100000"/>
-              </a:lnSpc>
-            </a:pPr>
-            <a:r>
-              <a:rPr sz="1000" b="0">
-                <a:solidFill>
-                  <a:srgbClr val="6B7280"/>
-                </a:solidFill>
-                <a:latin typeface="Poppins"/>
-              </a:rPr>
-              <a:t>"a car" alone chases city clutter and ends 51 m away. The colour check helps, but this grounds</a:t>
-            </a:r>
-          </a:p>
-          <a:p>
-            <a:pPr algn="l">
-              <a:lnSpc>
-                <a:spcPct val="100000"/>
-              </a:lnSpc>
-            </a:pPr>
-            <a:r>
-              <a:rPr sz="1000" b="0">
-                <a:solidFill>
-                  <a:srgbClr val="6B7280"/>
-                </a:solidFill>
-                <a:latin typeface="Poppins"/>
-              </a:rPr>
-              <a:t>"car", not "that particular one".</a:t>
-            </a:r>
-          </a:p>
-        </p:txBody>
-      </p:sp>
-      <p:sp>
-        <p:nvSpPr>
-          <p:cNvPr id="10" name="Rounded Rectangle 9"/>
+              <a:t>1 · The noun is grounded by a network; the colour by a fixed rule.</a:t>
+            </a:r>
+          </a:p>
+          <a:p>
+            <a:pPr algn="l">
+              <a:lnSpc>
+                <a:spcPct val="100000"/>
+              </a:lnSpc>
+            </a:pPr>
+            <a:r>
+              <a:rPr sz="1050" b="0">
+                <a:solidFill>
+                  <a:srgbClr val="1A1A1A"/>
+                </a:solidFill>
+                <a:latin typeface="Poppins"/>
+              </a:rPr>
+              <a:t>      Nine colour words exist. Anything outside them passes unverified.</a:t>
+            </a:r>
+          </a:p>
+        </p:txBody>
+      </p:sp>
+      <p:sp>
+        <p:nvSpPr>
+          <p:cNvPr id="9" name="Rounded Rectangle 8"/>
           <p:cNvSpPr/>
           <p:nvPr/>
         </p:nvSpPr>
         <p:spPr>
           <a:xfrm>
-            <a:off x="502920" y="2679192"/>
-            <a:ext cx="8138160" cy="868680"/>
+            <a:off x="502920" y="2532888"/>
+            <a:ext cx="8138160" cy="713232"/>
           </a:xfrm>
           <a:prstGeom prst="roundRect">
             <a:avLst/>
@@ -4805,114 +4588,74 @@
           <a:lstStyle/>
           <a:p>
             <a:pPr algn="ctr"/>
-            <a:endParaRPr/>
-          </a:p>
-        </p:txBody>
-      </p:sp>
-      <p:sp>
-        <p:nvSpPr>
-          <p:cNvPr id="11" name="TextBox 10"/>
-          <p:cNvSpPr txBox="1"/>
-          <p:nvPr/>
-        </p:nvSpPr>
-        <p:spPr>
-          <a:xfrm>
-            <a:off x="713232" y="2798064"/>
-            <a:ext cx="7680960" cy="256032"/>
-          </a:xfrm>
-          <a:prstGeom prst="rect">
-            <a:avLst/>
-          </a:prstGeom>
-          <a:noFill/>
-        </p:spPr>
-        <p:txBody>
-          <a:bodyPr wrap="square" lIns="0" tIns="0" rIns="0" bIns="0" anchor="t">
-            <a:spAutoFit/>
-          </a:bodyPr>
-          <a:lstStyle/>
-          <a:p>
-            <a:pPr algn="l">
-              <a:lnSpc>
-                <a:spcPct val="100000"/>
-              </a:lnSpc>
-            </a:pPr>
-            <a:r>
-              <a:rPr sz="1200" b="1">
+          </a:p>
+        </p:txBody>
+      </p:sp>
+      <p:sp>
+        <p:nvSpPr>
+          <p:cNvPr id="10" name="TextBox 9"/>
+          <p:cNvSpPr txBox="1"/>
+          <p:nvPr/>
+        </p:nvSpPr>
+        <p:spPr>
+          <a:xfrm>
+            <a:off x="713232" y="2651760"/>
+            <a:ext cx="7772400" cy="502920"/>
+          </a:xfrm>
+          <a:prstGeom prst="rect">
+            <a:avLst/>
+          </a:prstGeom>
+          <a:noFill/>
+        </p:spPr>
+        <p:txBody>
+          <a:bodyPr wrap="square" anchor="t" lIns="0" rIns="0" tIns="0" bIns="0">
+            <a:spAutoFit/>
+          </a:bodyPr>
+          <a:lstStyle/>
+          <a:p>
+            <a:pPr algn="l">
+              <a:lnSpc>
+                <a:spcPct val="100000"/>
+              </a:lnSpc>
+            </a:pPr>
+            <a:r>
+              <a:rPr sz="1050" b="0">
                 <a:solidFill>
                   <a:srgbClr val="1A1A1A"/>
                 </a:solidFill>
                 <a:latin typeface="Poppins"/>
               </a:rPr>
-              <a:t>It cannot say the object is absent</a:t>
-            </a:r>
-          </a:p>
-        </p:txBody>
-      </p:sp>
-      <p:sp>
-        <p:nvSpPr>
-          <p:cNvPr id="12" name="TextBox 11"/>
-          <p:cNvSpPr txBox="1"/>
-          <p:nvPr/>
-        </p:nvSpPr>
-        <p:spPr>
-          <a:xfrm>
-            <a:off x="713232" y="3090672"/>
-            <a:ext cx="7680960" cy="411480"/>
-          </a:xfrm>
-          <a:prstGeom prst="rect">
-            <a:avLst/>
-          </a:prstGeom>
-          <a:noFill/>
-        </p:spPr>
-        <p:txBody>
-          <a:bodyPr wrap="square" lIns="0" tIns="0" rIns="0" bIns="0" anchor="t">
-            <a:spAutoFit/>
-          </a:bodyPr>
-          <a:lstStyle/>
-          <a:p>
-            <a:pPr algn="l">
-              <a:lnSpc>
-                <a:spcPct val="100000"/>
-              </a:lnSpc>
-            </a:pPr>
-            <a:r>
-              <a:rPr sz="1000" b="0">
-                <a:solidFill>
-                  <a:srgbClr val="6B7280"/>
-                </a:solidFill>
-                <a:latin typeface="Poppins"/>
-              </a:rPr>
-              <a:t>With no car in the scene the raw detector still fires on ~75% of frames. Only the colour check</a:t>
-            </a:r>
-          </a:p>
-          <a:p>
-            <a:pPr algn="l">
-              <a:lnSpc>
-                <a:spcPct val="100000"/>
-              </a:lnSpc>
-            </a:pPr>
-            <a:r>
-              <a:rPr sz="1000" b="0">
-                <a:solidFill>
-                  <a:srgbClr val="6B7280"/>
-                </a:solidFill>
-                <a:latin typeface="Poppins"/>
-              </a:rPr>
-              <a:t>suppresses it.</a:t>
-            </a:r>
-          </a:p>
-        </p:txBody>
-      </p:sp>
-      <p:sp>
-        <p:nvSpPr>
-          <p:cNvPr id="13" name="Rounded Rectangle 12"/>
+              <a:t>2 · It cannot reliably say the object is ABSENT — only at flight level.</a:t>
+            </a:r>
+          </a:p>
+          <a:p>
+            <a:pPr algn="l">
+              <a:lnSpc>
+                <a:spcPct val="100000"/>
+              </a:lnSpc>
+            </a:pPr>
+            <a:r>
+              <a:rPr sz="1050" b="0">
+                <a:solidFill>
+                  <a:srgbClr val="1A1A1A"/>
+                </a:solidFill>
+                <a:latin typeface="Poppins"/>
+              </a:rPr>
+              <a:t>      75% ABSENT with no target against 40% with one. Per tick it does not separate.</a:t>
+            </a:r>
+          </a:p>
+        </p:txBody>
+      </p:sp>
+      <p:sp>
+        <p:nvSpPr>
+          <p:cNvPr id="11" name="Rounded Rectangle 10"/>
           <p:cNvSpPr/>
           <p:nvPr/>
         </p:nvSpPr>
         <p:spPr>
           <a:xfrm>
-            <a:off x="502920" y="3666744"/>
-            <a:ext cx="8138160" cy="868680"/>
+            <a:off x="502920" y="3374136"/>
+            <a:ext cx="8138160" cy="713232"/>
           </a:xfrm>
           <a:prstGeom prst="roundRect">
             <a:avLst/>
@@ -4944,100 +4687,60 @@
           <a:lstStyle/>
           <a:p>
             <a:pPr algn="ctr"/>
-            <a:endParaRPr/>
-          </a:p>
-        </p:txBody>
-      </p:sp>
-      <p:sp>
-        <p:nvSpPr>
-          <p:cNvPr id="14" name="TextBox 13"/>
-          <p:cNvSpPr txBox="1"/>
-          <p:nvPr/>
-        </p:nvSpPr>
-        <p:spPr>
-          <a:xfrm>
-            <a:off x="713232" y="3785615"/>
-            <a:ext cx="7680960" cy="256032"/>
-          </a:xfrm>
-          <a:prstGeom prst="rect">
-            <a:avLst/>
-          </a:prstGeom>
-          <a:noFill/>
-        </p:spPr>
-        <p:txBody>
-          <a:bodyPr wrap="square" lIns="0" tIns="0" rIns="0" bIns="0" anchor="t">
-            <a:spAutoFit/>
-          </a:bodyPr>
-          <a:lstStyle/>
-          <a:p>
-            <a:pPr algn="l">
-              <a:lnSpc>
-                <a:spcPct val="100000"/>
-              </a:lnSpc>
-            </a:pPr>
-            <a:r>
-              <a:rPr sz="1200" b="1">
+          </a:p>
+        </p:txBody>
+      </p:sp>
+      <p:sp>
+        <p:nvSpPr>
+          <p:cNvPr id="12" name="TextBox 11"/>
+          <p:cNvSpPr txBox="1"/>
+          <p:nvPr/>
+        </p:nvSpPr>
+        <p:spPr>
+          <a:xfrm>
+            <a:off x="713232" y="3493008"/>
+            <a:ext cx="7772400" cy="502920"/>
+          </a:xfrm>
+          <a:prstGeom prst="rect">
+            <a:avLst/>
+          </a:prstGeom>
+          <a:noFill/>
+        </p:spPr>
+        <p:txBody>
+          <a:bodyPr wrap="square" anchor="t" lIns="0" rIns="0" tIns="0" bIns="0">
+            <a:spAutoFit/>
+          </a:bodyPr>
+          <a:lstStyle/>
+          <a:p>
+            <a:pPr algn="l">
+              <a:lnSpc>
+                <a:spcPct val="100000"/>
+              </a:lnSpc>
+            </a:pPr>
+            <a:r>
+              <a:rPr sz="1050" b="0">
                 <a:solidFill>
                   <a:srgbClr val="1A1A1A"/>
                 </a:solidFill>
                 <a:latin typeface="Poppins"/>
               </a:rPr>
-              <a:t>The target is made easy, and it is a simulator</a:t>
-            </a:r>
-          </a:p>
-        </p:txBody>
-      </p:sp>
-      <p:sp>
-        <p:nvSpPr>
-          <p:cNvPr id="15" name="TextBox 14"/>
-          <p:cNvSpPr txBox="1"/>
-          <p:nvPr/>
-        </p:nvSpPr>
-        <p:spPr>
-          <a:xfrm>
-            <a:off x="713232" y="4078224"/>
-            <a:ext cx="7680960" cy="411480"/>
-          </a:xfrm>
-          <a:prstGeom prst="rect">
-            <a:avLst/>
-          </a:prstGeom>
-          <a:noFill/>
-        </p:spPr>
-        <p:txBody>
-          <a:bodyPr wrap="square" lIns="0" tIns="0" rIns="0" bIns="0" anchor="t">
-            <a:spAutoFit/>
-          </a:bodyPr>
-          <a:lstStyle/>
-          <a:p>
-            <a:pPr algn="l">
-              <a:lnSpc>
-                <a:spcPct val="100000"/>
-              </a:lnSpc>
-            </a:pPr>
-            <a:r>
-              <a:rPr sz="1000" b="0">
-                <a:solidFill>
-                  <a:srgbClr val="6B7280"/>
-                </a:solidFill>
-                <a:latin typeface="Poppins"/>
-              </a:rPr>
-              <a:t>The car drives straight and parks, because turns swing it through the blind spot. The obstacle map</a:t>
-            </a:r>
-          </a:p>
-          <a:p>
-            <a:pPr algn="l">
-              <a:lnSpc>
-                <a:spcPct val="100000"/>
-              </a:lnSpc>
-            </a:pPr>
-            <a:r>
-              <a:rPr sz="1000" b="0">
-                <a:solidFill>
-                  <a:srgbClr val="6B7280"/>
-                </a:solidFill>
-                <a:latin typeface="Poppins"/>
-              </a:rPr>
-              <a:t>holds buildings only — not trees or lamp posts. One flight per condition, and no hardware yet.</a:t>
+              <a:t>3 · The subject must be SMALL in frame, and it is a simulator.</a:t>
+            </a:r>
+          </a:p>
+          <a:p>
+            <a:pPr algn="l">
+              <a:lnSpc>
+                <a:spcPct val="100000"/>
+              </a:lnSpc>
+            </a:pPr>
+            <a:r>
+              <a:rPr sz="1050" b="0">
+                <a:solidFill>
+                  <a:srgbClr val="1A1A1A"/>
+                </a:solidFill>
+                <a:latin typeface="Poppins"/>
+              </a:rPr>
+              <a:t>      A 50 m block filled 99% of the image and nothing downstream worked. No hardware yet.</a:t>
             </a:r>
           </a:p>
         </p:txBody>
@@ -5051,7 +4754,7 @@
 </file>
 
 <file path=ppt/slides/slide12.xml><?xml version="1.0" encoding="utf-8"?>
-<p:sld xmlns:a="http://schemas.openxmlformats.org/drawingml/2006/main" xmlns:r="http://schemas.openxmlformats.org/officeDocument/2006/relationships" xmlns:p="http://schemas.openxmlformats.org/presentationml/2006/main">
+<p:sld xmlns:a="http://schemas.openxmlformats.org/drawingml/2006/main" xmlns:p="http://schemas.openxmlformats.org/presentationml/2006/main" xmlns:r="http://schemas.openxmlformats.org/officeDocument/2006/relationships">
   <p:cSld>
     <p:bg>
       <p:bgPr>
@@ -5067,14 +4770,7 @@
         <p:cNvGrpSpPr/>
         <p:nvPr/>
       </p:nvGrpSpPr>
-      <p:grpSpPr>
-        <a:xfrm>
-          <a:off x="0" y="0"/>
-          <a:ext cx="0" cy="0"/>
-          <a:chOff x="0" y="0"/>
-          <a:chExt cx="0" cy="0"/>
-        </a:xfrm>
-      </p:grpSpPr>
+      <p:grpSpPr/>
       <p:sp>
         <p:nvSpPr>
           <p:cNvPr id="2" name="TextBox 1"/>
@@ -5092,7 +4788,7 @@
           <a:noFill/>
         </p:spPr>
         <p:txBody>
-          <a:bodyPr wrap="square" lIns="0" tIns="0" rIns="0" bIns="0" anchor="t">
+          <a:bodyPr wrap="square" anchor="t" lIns="0" rIns="0" tIns="0" bIns="0">
             <a:spAutoFit/>
           </a:bodyPr>
           <a:lstStyle/>
@@ -5131,7 +4827,7 @@
           <a:noFill/>
         </p:spPr>
         <p:txBody>
-          <a:bodyPr wrap="square" lIns="0" tIns="0" rIns="0" bIns="0" anchor="t">
+          <a:bodyPr wrap="square" anchor="t" lIns="0" rIns="0" tIns="0" bIns="0">
             <a:spAutoFit/>
           </a:bodyPr>
           <a:lstStyle/>
@@ -5194,7 +4890,6 @@
           <a:lstStyle/>
           <a:p>
             <a:pPr algn="ctr"/>
-            <a:endParaRPr/>
           </a:p>
         </p:txBody>
       </p:sp>
@@ -5215,7 +4910,7 @@
           <a:noFill/>
         </p:spPr>
         <p:txBody>
-          <a:bodyPr wrap="square" lIns="0" tIns="0" rIns="0" bIns="0" anchor="t">
+          <a:bodyPr wrap="square" anchor="t" lIns="0" rIns="0" tIns="0" bIns="0">
             <a:spAutoFit/>
           </a:bodyPr>
           <a:lstStyle/>
@@ -5239,20 +4934,20 @@
       </p:sp>
       <p:sp>
         <p:nvSpPr>
-          <p:cNvPr id="6" name="Rectangle 5"/>
+          <p:cNvPr id="6" name="Rounded Rectangle 5"/>
           <p:cNvSpPr/>
           <p:nvPr/>
         </p:nvSpPr>
         <p:spPr>
           <a:xfrm>
             <a:off x="502920" y="1316736"/>
-            <a:ext cx="54864" cy="777240"/>
-          </a:xfrm>
-          <a:prstGeom prst="rect">
+            <a:ext cx="3977639" cy="1965960"/>
+          </a:xfrm>
+          <a:prstGeom prst="roundRect">
             <a:avLst/>
           </a:prstGeom>
           <a:solidFill>
-            <a:srgbClr val="249DB2"/>
+            <a:srgbClr val="F4F7F9"/>
           </a:solidFill>
           <a:ln>
             <a:noFill/>
@@ -5278,7 +4973,6 @@
           <a:lstStyle/>
           <a:p>
             <a:pPr algn="ctr"/>
-            <a:endParaRPr/>
           </a:p>
         </p:txBody>
       </p:sp>
@@ -5290,33 +4984,33 @@
         </p:nvSpPr>
         <p:spPr>
           <a:xfrm>
-            <a:off x="731520" y="1335024"/>
-            <a:ext cx="7863840" cy="274320"/>
-          </a:xfrm>
-          <a:prstGeom prst="rect">
-            <a:avLst/>
-          </a:prstGeom>
-          <a:noFill/>
-        </p:spPr>
-        <p:txBody>
-          <a:bodyPr wrap="square" lIns="0" tIns="0" rIns="0" bIns="0" anchor="t">
-            <a:spAutoFit/>
-          </a:bodyPr>
-          <a:lstStyle/>
-          <a:p>
-            <a:pPr algn="l">
-              <a:lnSpc>
-                <a:spcPct val="100000"/>
-              </a:lnSpc>
-            </a:pPr>
-            <a:r>
-              <a:rPr sz="1250" b="1">
+            <a:off x="685800" y="1481328"/>
+            <a:ext cx="3611880" cy="274320"/>
+          </a:xfrm>
+          <a:prstGeom prst="rect">
+            <a:avLst/>
+          </a:prstGeom>
+          <a:noFill/>
+        </p:spPr>
+        <p:txBody>
+          <a:bodyPr wrap="square" anchor="t" lIns="0" rIns="0" tIns="0" bIns="0">
+            <a:spAutoFit/>
+          </a:bodyPr>
+          <a:lstStyle/>
+          <a:p>
+            <a:pPr algn="l">
+              <a:lnSpc>
+                <a:spcPct val="100000"/>
+              </a:lnSpc>
+            </a:pPr>
+            <a:r>
+              <a:rPr sz="1300" b="1">
                 <a:solidFill>
                   <a:srgbClr val="1A1A1A"/>
                 </a:solidFill>
                 <a:latin typeface="Poppins"/>
               </a:rPr>
-              <a:t>Confidence, not just position</a:t>
+              <a:t>Decisions we need</a:t>
             </a:r>
           </a:p>
         </p:txBody>
@@ -5329,16 +5023,16 @@
         </p:nvSpPr>
         <p:spPr>
           <a:xfrm>
-            <a:off x="731520" y="1645919"/>
-            <a:ext cx="7863840" cy="457200"/>
-          </a:xfrm>
-          <a:prstGeom prst="rect">
-            <a:avLst/>
-          </a:prstGeom>
-          <a:noFill/>
-        </p:spPr>
-        <p:txBody>
-          <a:bodyPr wrap="square" lIns="0" tIns="0" rIns="0" bIns="0" anchor="t">
+            <a:off x="685800" y="1847088"/>
+            <a:ext cx="3611880" cy="1371600"/>
+          </a:xfrm>
+          <a:prstGeom prst="rect">
+            <a:avLst/>
+          </a:prstGeom>
+          <a:noFill/>
+        </p:spPr>
+        <p:txBody>
+          <a:bodyPr wrap="square" anchor="t" lIns="0" rIns="0" tIns="0" bIns="0">
             <a:spAutoFit/>
           </a:bodyPr>
           <a:lstStyle/>
@@ -5355,7 +5049,7 @@
                 </a:solidFill>
                 <a:latin typeface="Poppins"/>
               </a:rPr>
-              <a:t>A track-confirmation stage, so the system can report that the target is gone instead of</a:t>
+              <a:t>· Frame contract: ours is world-frame,</a:t>
             </a:r>
           </a:p>
           <a:p>
@@ -5371,27 +5065,91 @@
                 </a:solidFill>
                 <a:latin typeface="Poppins"/>
               </a:rPr>
-              <a:t>locking onto whatever is nearest.</a:t>
-            </a:r>
-          </a:p>
-        </p:txBody>
-      </p:sp>
-      <p:sp>
-        <p:nvSpPr>
-          <p:cNvPr id="9" name="Rectangle 8"/>
+              <a:t>   upstream is body-frame. Both cannot</a:t>
+            </a:r>
+          </a:p>
+          <a:p>
+            <a:pPr algn="l">
+              <a:lnSpc>
+                <a:spcPct val="100000"/>
+              </a:lnSpc>
+            </a:pPr>
+            <a:r>
+              <a:rPr sz="1050" b="0">
+                <a:solidFill>
+                  <a:srgbClr val="6B7280"/>
+                </a:solidFill>
+                <a:latin typeface="Poppins"/>
+              </a:rPr>
+              <a:t>   be right, and it blocks the flight</a:t>
+            </a:r>
+          </a:p>
+          <a:p>
+            <a:pPr algn="l">
+              <a:lnSpc>
+                <a:spcPct val="100000"/>
+              </a:lnSpc>
+            </a:pPr>
+            <a:r>
+              <a:rPr sz="1050" b="0">
+                <a:solidFill>
+                  <a:srgbClr val="6B7280"/>
+                </a:solidFill>
+                <a:latin typeface="Poppins"/>
+              </a:rPr>
+              <a:t>   controller work.</a:t>
+            </a:r>
+          </a:p>
+          <a:p>
+            <a:pPr algn="l">
+              <a:lnSpc>
+                <a:spcPct val="100000"/>
+              </a:lnSpc>
+            </a:pPr>
+            <a:r>
+              <a:rPr sz="1050" b="0">
+                <a:solidFill>
+                  <a:srgbClr val="6B7280"/>
+                </a:solidFill>
+                <a:latin typeface="Poppins"/>
+              </a:rPr>
+              <a:t>· COCO: we recommend dropping it,</a:t>
+            </a:r>
+          </a:p>
+          <a:p>
+            <a:pPr algn="l">
+              <a:lnSpc>
+                <a:spcPct val="100000"/>
+              </a:lnSpc>
+            </a:pPr>
+            <a:r>
+              <a:rPr sz="1050" b="0">
+                <a:solidFill>
+                  <a:srgbClr val="6B7280"/>
+                </a:solidFill>
+                <a:latin typeface="Poppins"/>
+              </a:rPr>
+              <a:t>   with the measurements attached.</a:t>
+            </a:r>
+          </a:p>
+        </p:txBody>
+      </p:sp>
+      <p:sp>
+        <p:nvSpPr>
+          <p:cNvPr id="9" name="Rounded Rectangle 8"/>
           <p:cNvSpPr/>
           <p:nvPr/>
         </p:nvSpPr>
         <p:spPr>
           <a:xfrm>
-            <a:off x="502920" y="2276856"/>
-            <a:ext cx="54864" cy="777240"/>
-          </a:xfrm>
-          <a:prstGeom prst="rect">
+            <a:off x="4663440" y="1316736"/>
+            <a:ext cx="3977639" cy="1965960"/>
+          </a:xfrm>
+          <a:prstGeom prst="roundRect">
             <a:avLst/>
           </a:prstGeom>
           <a:solidFill>
-            <a:srgbClr val="249DB2"/>
+            <a:srgbClr val="F4F7F9"/>
           </a:solidFill>
           <a:ln>
             <a:noFill/>
@@ -5417,7 +5175,6 @@
           <a:lstStyle/>
           <a:p>
             <a:pPr algn="ctr"/>
-            <a:endParaRPr/>
           </a:p>
         </p:txBody>
       </p:sp>
@@ -5429,33 +5186,33 @@
         </p:nvSpPr>
         <p:spPr>
           <a:xfrm>
-            <a:off x="731520" y="2295144"/>
-            <a:ext cx="7863840" cy="274320"/>
-          </a:xfrm>
-          <a:prstGeom prst="rect">
-            <a:avLst/>
-          </a:prstGeom>
-          <a:noFill/>
-        </p:spPr>
-        <p:txBody>
-          <a:bodyPr wrap="square" lIns="0" tIns="0" rIns="0" bIns="0" anchor="t">
-            <a:spAutoFit/>
-          </a:bodyPr>
-          <a:lstStyle/>
-          <a:p>
-            <a:pPr algn="l">
-              <a:lnSpc>
-                <a:spcPct val="100000"/>
-              </a:lnSpc>
-            </a:pPr>
-            <a:r>
-              <a:rPr sz="1250" b="1">
+            <a:off x="4846320" y="1481328"/>
+            <a:ext cx="3611880" cy="274320"/>
+          </a:xfrm>
+          <a:prstGeom prst="rect">
+            <a:avLst/>
+          </a:prstGeom>
+          <a:noFill/>
+        </p:spPr>
+        <p:txBody>
+          <a:bodyPr wrap="square" anchor="t" lIns="0" rIns="0" tIns="0" bIns="0">
+            <a:spAutoFit/>
+          </a:bodyPr>
+          <a:lstStyle/>
+          <a:p>
+            <a:pPr algn="l">
+              <a:lnSpc>
+                <a:spcPct val="100000"/>
+              </a:lnSpc>
+            </a:pPr>
+            <a:r>
+              <a:rPr sz="1300" b="1">
                 <a:solidFill>
                   <a:srgbClr val="1A1A1A"/>
                 </a:solidFill>
                 <a:latin typeface="Poppins"/>
               </a:rPr>
-              <a:t>A fence with a gap</a:t>
+              <a:t>Work in progress</a:t>
             </a:r>
           </a:p>
         </p:txBody>
@@ -5468,16 +5225,16 @@
         </p:nvSpPr>
         <p:spPr>
           <a:xfrm>
-            <a:off x="731520" y="2606040"/>
-            <a:ext cx="7863840" cy="457200"/>
-          </a:xfrm>
-          <a:prstGeom prst="rect">
-            <a:avLst/>
-          </a:prstGeom>
-          <a:noFill/>
-        </p:spPr>
-        <p:txBody>
-          <a:bodyPr wrap="square" lIns="0" tIns="0" rIns="0" bIns="0" anchor="t">
+            <a:off x="4846320" y="1847088"/>
+            <a:ext cx="3611880" cy="1371600"/>
+          </a:xfrm>
+          <a:prstGeom prst="rect">
+            <a:avLst/>
+          </a:prstGeom>
+          <a:noFill/>
+        </p:spPr>
+        <p:txBody>
+          <a:bodyPr wrap="square" anchor="t" lIns="0" rIns="0" tIns="0" bIns="0">
             <a:spAutoFit/>
           </a:bodyPr>
           <a:lstStyle/>
@@ -5494,7 +5251,7 @@
                 </a:solidFill>
                 <a:latin typeface="Poppins"/>
               </a:rPr>
-              <a:t>Built and unit-tested — it picks the open side and refuses when there is none — but not yet</a:t>
+              <a:t>· Orbit: it now circles a small target,</a:t>
             </a:r>
           </a:p>
           <a:p>
@@ -5510,116 +5267,9 @@
                 </a:solidFill>
                 <a:latin typeface="Poppins"/>
               </a:rPr>
-              <a:t>demonstrated in flight: the aircraft met street furniture the obstacle map does not contain.</a:t>
-            </a:r>
-          </a:p>
-        </p:txBody>
-      </p:sp>
-      <p:sp>
-        <p:nvSpPr>
-          <p:cNvPr id="12" name="Rectangle 11"/>
-          <p:cNvSpPr/>
-          <p:nvPr/>
-        </p:nvSpPr>
-        <p:spPr>
-          <a:xfrm>
-            <a:off x="502920" y="3236976"/>
-            <a:ext cx="54864" cy="777240"/>
-          </a:xfrm>
-          <a:prstGeom prst="rect">
-            <a:avLst/>
-          </a:prstGeom>
-          <a:solidFill>
-            <a:srgbClr val="249DB2"/>
-          </a:solidFill>
-          <a:ln>
-            <a:noFill/>
-          </a:ln>
-          <a:effectLst/>
-        </p:spPr>
-        <p:style>
-          <a:lnRef idx="1">
-            <a:schemeClr val="accent1"/>
-          </a:lnRef>
-          <a:fillRef idx="3">
-            <a:schemeClr val="accent1"/>
-          </a:fillRef>
-          <a:effectRef idx="2">
-            <a:schemeClr val="accent1"/>
-          </a:effectRef>
-          <a:fontRef idx="minor">
-            <a:schemeClr val="lt1"/>
-          </a:fontRef>
-        </p:style>
-        <p:txBody>
-          <a:bodyPr rtlCol="0" anchor="ctr"/>
-          <a:lstStyle/>
-          <a:p>
-            <a:pPr algn="ctr"/>
-            <a:endParaRPr/>
-          </a:p>
-        </p:txBody>
-      </p:sp>
-      <p:sp>
-        <p:nvSpPr>
-          <p:cNvPr id="13" name="TextBox 12"/>
-          <p:cNvSpPr txBox="1"/>
-          <p:nvPr/>
-        </p:nvSpPr>
-        <p:spPr>
-          <a:xfrm>
-            <a:off x="731520" y="3255264"/>
-            <a:ext cx="7863840" cy="274320"/>
-          </a:xfrm>
-          <a:prstGeom prst="rect">
-            <a:avLst/>
-          </a:prstGeom>
-          <a:noFill/>
-        </p:spPr>
-        <p:txBody>
-          <a:bodyPr wrap="square" lIns="0" tIns="0" rIns="0" bIns="0" anchor="t">
-            <a:spAutoFit/>
-          </a:bodyPr>
-          <a:lstStyle/>
-          <a:p>
-            <a:pPr algn="l">
-              <a:lnSpc>
-                <a:spcPct val="100000"/>
-              </a:lnSpc>
-            </a:pPr>
-            <a:r>
-              <a:rPr sz="1250" b="1">
-                <a:solidFill>
-                  <a:srgbClr val="1A1A1A"/>
-                </a:solidFill>
-                <a:latin typeface="Poppins"/>
-              </a:rPr>
-              <a:t>Toward hardware</a:t>
-            </a:r>
-          </a:p>
-        </p:txBody>
-      </p:sp>
-      <p:sp>
-        <p:nvSpPr>
-          <p:cNvPr id="14" name="TextBox 13"/>
-          <p:cNvSpPr txBox="1"/>
-          <p:nvPr/>
-        </p:nvSpPr>
-        <p:spPr>
-          <a:xfrm>
-            <a:off x="731520" y="3566160"/>
-            <a:ext cx="7863840" cy="457200"/>
-          </a:xfrm>
-          <a:prstGeom prst="rect">
-            <a:avLst/>
-          </a:prstGeom>
-          <a:noFill/>
-        </p:spPr>
-        <p:txBody>
-          <a:bodyPr wrap="square" lIns="0" tIns="0" rIns="0" bIns="0" anchor="t">
-            <a:spAutoFit/>
-          </a:bodyPr>
-          <a:lstStyle/>
+              <a:t>   more than a full lap, but does not</a:t>
+            </a:r>
+          </a:p>
           <a:p>
             <a:pPr algn="l">
               <a:lnSpc>
@@ -5633,7 +5283,7 @@
                 </a:solidFill>
                 <a:latin typeface="Poppins"/>
               </a:rPr>
-              <a:t>The guardrail already runs on any action source. The open questions are latency and camera</a:t>
+              <a:t>   hold its radius.</a:t>
             </a:r>
           </a:p>
           <a:p>
@@ -5649,7 +5299,39 @@
                 </a:solidFill>
                 <a:latin typeface="Poppins"/>
               </a:rPr>
-              <a:t>geometry on a real airframe.</a:t>
+              <a:t>· Absence: needs more pixels on the</a:t>
+            </a:r>
+          </a:p>
+          <a:p>
+            <a:pPr algn="l">
+              <a:lnSpc>
+                <a:spcPct val="100000"/>
+              </a:lnSpc>
+            </a:pPr>
+            <a:r>
+              <a:rPr sz="1050" b="0">
+                <a:solidFill>
+                  <a:srgbClr val="6B7280"/>
+                </a:solidFill>
+                <a:latin typeface="Poppins"/>
+              </a:rPr>
+              <a:t>   target, not a cleverer rule.</a:t>
+            </a:r>
+          </a:p>
+          <a:p>
+            <a:pPr algn="l">
+              <a:lnSpc>
+                <a:spcPct val="100000"/>
+              </a:lnSpc>
+            </a:pPr>
+            <a:r>
+              <a:rPr sz="1050" b="0">
+                <a:solidFill>
+                  <a:srgbClr val="6B7280"/>
+                </a:solidFill>
+                <a:latin typeface="Poppins"/>
+              </a:rPr>
+              <a:t>· Then: MAVLink through to ArduPilot.</a:t>
             </a:r>
           </a:p>
         </p:txBody>
@@ -5663,7 +5345,7 @@
 </file>
 
 <file path=ppt/slides/slide13.xml><?xml version="1.0" encoding="utf-8"?>
-<p:sld xmlns:a="http://schemas.openxmlformats.org/drawingml/2006/main" xmlns:r="http://schemas.openxmlformats.org/officeDocument/2006/relationships" xmlns:p="http://schemas.openxmlformats.org/presentationml/2006/main">
+<p:sld xmlns:a="http://schemas.openxmlformats.org/drawingml/2006/main" xmlns:p="http://schemas.openxmlformats.org/presentationml/2006/main" xmlns:r="http://schemas.openxmlformats.org/officeDocument/2006/relationships">
   <p:cSld>
     <p:bg>
       <p:bgPr>
@@ -5679,14 +5361,7 @@
         <p:cNvGrpSpPr/>
         <p:nvPr/>
       </p:nvGrpSpPr>
-      <p:grpSpPr>
-        <a:xfrm>
-          <a:off x="0" y="0"/>
-          <a:ext cx="0" cy="0"/>
-          <a:chOff x="0" y="0"/>
-          <a:chExt cx="0" cy="0"/>
-        </a:xfrm>
-      </p:grpSpPr>
+      <p:grpSpPr/>
       <p:sp>
         <p:nvSpPr>
           <p:cNvPr id="2" name="Rectangle 1"/>
@@ -5728,7 +5403,6 @@
           <a:lstStyle/>
           <a:p>
             <a:pPr algn="ctr"/>
-            <a:endParaRPr/>
           </a:p>
         </p:txBody>
       </p:sp>
@@ -5749,7 +5423,7 @@
           <a:noFill/>
         </p:spPr>
         <p:txBody>
-          <a:bodyPr wrap="square" lIns="0" tIns="0" rIns="0" bIns="0" anchor="t">
+          <a:bodyPr wrap="square" anchor="t" lIns="0" rIns="0" tIns="0" bIns="0">
             <a:spAutoFit/>
           </a:bodyPr>
           <a:lstStyle/>
@@ -5788,7 +5462,7 @@
           <a:noFill/>
         </p:spPr>
         <p:txBody>
-          <a:bodyPr wrap="square" lIns="0" tIns="0" rIns="0" bIns="0" anchor="t">
+          <a:bodyPr wrap="square" anchor="t" lIns="0" rIns="0" tIns="0" bIns="0">
             <a:spAutoFit/>
           </a:bodyPr>
           <a:lstStyle/>
@@ -5843,7 +5517,7 @@
           <a:noFill/>
         </p:spPr>
         <p:txBody>
-          <a:bodyPr wrap="square" lIns="0" tIns="0" rIns="0" bIns="0" anchor="t">
+          <a:bodyPr wrap="square" anchor="t" lIns="0" rIns="0" tIns="0" bIns="0">
             <a:spAutoFit/>
           </a:bodyPr>
           <a:lstStyle/>
@@ -5954,7 +5628,6 @@
           <a:lstStyle/>
           <a:p>
             <a:pPr algn="ctr"/>
-            <a:endParaRPr/>
           </a:p>
         </p:txBody>
       </p:sp>
@@ -5975,7 +5648,7 @@
           <a:noFill/>
         </p:spPr>
         <p:txBody>
-          <a:bodyPr wrap="square" lIns="0" tIns="0" rIns="0" bIns="0" anchor="t">
+          <a:bodyPr wrap="square" anchor="t" lIns="0" rIns="0" tIns="0" bIns="0">
             <a:spAutoFit/>
           </a:bodyPr>
           <a:lstStyle/>
@@ -6006,7 +5679,7 @@
 </file>
 
 <file path=ppt/slides/slide2.xml><?xml version="1.0" encoding="utf-8"?>
-<p:sld xmlns:a="http://schemas.openxmlformats.org/drawingml/2006/main" xmlns:r="http://schemas.openxmlformats.org/officeDocument/2006/relationships" xmlns:p="http://schemas.openxmlformats.org/presentationml/2006/main">
+<p:sld xmlns:a="http://schemas.openxmlformats.org/drawingml/2006/main" xmlns:p="http://schemas.openxmlformats.org/presentationml/2006/main" xmlns:r="http://schemas.openxmlformats.org/officeDocument/2006/relationships">
   <p:cSld>
     <p:bg>
       <p:bgPr>
@@ -6022,14 +5695,7 @@
         <p:cNvGrpSpPr/>
         <p:nvPr/>
       </p:nvGrpSpPr>
-      <p:grpSpPr>
-        <a:xfrm>
-          <a:off x="0" y="0"/>
-          <a:ext cx="0" cy="0"/>
-          <a:chOff x="0" y="0"/>
-          <a:chExt cx="0" cy="0"/>
-        </a:xfrm>
-      </p:grpSpPr>
+      <p:grpSpPr/>
       <p:sp>
         <p:nvSpPr>
           <p:cNvPr id="2" name="TextBox 1"/>
@@ -6039,39 +5705,33 @@
         <p:spPr>
           <a:xfrm>
             <a:off x="502920" y="384048"/>
-            <a:ext cx="7772400" cy="153888"/>
-          </a:xfrm>
-          <a:prstGeom prst="rect">
-            <a:avLst/>
-          </a:prstGeom>
-          <a:noFill/>
-        </p:spPr>
-        <p:txBody>
-          <a:bodyPr wrap="square" lIns="0" tIns="0" rIns="0" bIns="0" anchor="t">
-            <a:spAutoFit/>
-          </a:bodyPr>
-          <a:lstStyle/>
-          <a:p>
-            <a:pPr algn="l">
-              <a:lnSpc>
-                <a:spcPct val="100000"/>
-              </a:lnSpc>
-            </a:pPr>
-            <a:r>
-              <a:rPr lang="en-US" sz="1000" b="1" dirty="0">
+            <a:ext cx="7772400" cy="256032"/>
+          </a:xfrm>
+          <a:prstGeom prst="rect">
+            <a:avLst/>
+          </a:prstGeom>
+          <a:noFill/>
+        </p:spPr>
+        <p:txBody>
+          <a:bodyPr wrap="square" anchor="t" lIns="0" rIns="0" tIns="0" bIns="0">
+            <a:spAutoFit/>
+          </a:bodyPr>
+          <a:lstStyle/>
+          <a:p>
+            <a:pPr algn="l">
+              <a:lnSpc>
+                <a:spcPct val="100000"/>
+              </a:lnSpc>
+            </a:pPr>
+            <a:r>
+              <a:rPr sz="1000" b="1">
                 <a:solidFill>
                   <a:srgbClr val="249DB2"/>
                 </a:solidFill>
                 <a:latin typeface="Poppins"/>
               </a:rPr>
-              <a:t>Comparison</a:t>
-            </a:r>
-            <a:endParaRPr sz="1000" b="1" dirty="0">
-              <a:solidFill>
-                <a:srgbClr val="249DB2"/>
-              </a:solidFill>
-              <a:latin typeface="Poppins"/>
-            </a:endParaRPr>
+              <a:t>HEADLINE</a:t>
+            </a:r>
           </a:p>
         </p:txBody>
       </p:sp>
@@ -6084,15 +5744,15 @@
         <p:spPr>
           <a:xfrm>
             <a:off x="502920" y="658368"/>
-            <a:ext cx="8138160" cy="365485"/>
-          </a:xfrm>
-          <a:prstGeom prst="rect">
-            <a:avLst/>
-          </a:prstGeom>
-          <a:noFill/>
-        </p:spPr>
-        <p:txBody>
-          <a:bodyPr wrap="square" lIns="0" tIns="0" rIns="0" bIns="0" anchor="t">
+            <a:ext cx="8138160" cy="566928"/>
+          </a:xfrm>
+          <a:prstGeom prst="rect">
+            <a:avLst/>
+          </a:prstGeom>
+          <a:noFill/>
+        </p:spPr>
+        <p:txBody>
+          <a:bodyPr wrap="square" anchor="t" lIns="0" rIns="0" tIns="0" bIns="0">
             <a:spAutoFit/>
           </a:bodyPr>
           <a:lstStyle/>
@@ -6103,13 +5763,13 @@
               </a:lnSpc>
             </a:pPr>
             <a:r>
-              <a:rPr sz="2500" b="1" dirty="0">
+              <a:rPr sz="2500" b="1">
                 <a:solidFill>
                   <a:srgbClr val="1A1A1A"/>
                 </a:solidFill>
                 <a:latin typeface="Poppins"/>
               </a:rPr>
-              <a:t>Last report's pilot.</a:t>
+              <a:t>Last report's pilot could not do this. This one can.</a:t>
             </a:r>
           </a:p>
         </p:txBody>
@@ -6131,7 +5791,7 @@
           <a:noFill/>
         </p:spPr>
         <p:txBody>
-          <a:bodyPr wrap="square" lIns="0" tIns="0" rIns="0" bIns="0" anchor="t">
+          <a:bodyPr wrap="square" anchor="t" lIns="0" rIns="0" tIns="0" bIns="0">
             <a:spAutoFit/>
           </a:bodyPr>
           <a:lstStyle/>
@@ -6194,7 +5854,6 @@
           <a:lstStyle/>
           <a:p>
             <a:pPr algn="ctr"/>
-            <a:endParaRPr/>
           </a:p>
         </p:txBody>
       </p:sp>
@@ -6215,7 +5874,7 @@
           <a:noFill/>
         </p:spPr>
         <p:txBody>
-          <a:bodyPr wrap="square" lIns="0" tIns="0" rIns="0" bIns="0" anchor="t">
+          <a:bodyPr wrap="square" anchor="t" lIns="0" rIns="0" tIns="0" bIns="0">
             <a:spAutoFit/>
           </a:bodyPr>
           <a:lstStyle/>
@@ -6278,7 +5937,6 @@
           <a:lstStyle/>
           <a:p>
             <a:pPr algn="ctr"/>
-            <a:endParaRPr/>
           </a:p>
         </p:txBody>
       </p:sp>
@@ -6299,17 +5957,25 @@
           <a:noFill/>
         </p:spPr>
         <p:txBody>
-          <a:bodyPr wrap="square" lIns="0" tIns="0" rIns="0" bIns="0" anchor="t">
-            <a:spAutoFit/>
-          </a:bodyPr>
-          <a:lstStyle/>
-          <a:p>
-            <a:pPr algn="l">
-              <a:lnSpc>
-                <a:spcPct val="100000"/>
-              </a:lnSpc>
-            </a:pPr>
-            <a:endParaRPr/>
+          <a:bodyPr wrap="square" anchor="t" lIns="0" rIns="0" tIns="0" bIns="0">
+            <a:spAutoFit/>
+          </a:bodyPr>
+          <a:lstStyle/>
+          <a:p>
+            <a:pPr algn="l">
+              <a:lnSpc>
+                <a:spcPct val="100000"/>
+              </a:lnSpc>
+            </a:pPr>
+            <a:r>
+              <a:rPr sz="950" b="1">
+                <a:solidFill>
+                  <a:srgbClr val="FFFFFF"/>
+                </a:solidFill>
+                <a:latin typeface="Poppins"/>
+              </a:rPr>
+              <a:t/>
+            </a:r>
           </a:p>
         </p:txBody>
       </p:sp>
@@ -6330,7 +5996,7 @@
           <a:noFill/>
         </p:spPr>
         <p:txBody>
-          <a:bodyPr wrap="square" lIns="0" tIns="0" rIns="0" bIns="0" anchor="t">
+          <a:bodyPr wrap="square" anchor="t" lIns="0" rIns="0" tIns="0" bIns="0">
             <a:spAutoFit/>
           </a:bodyPr>
           <a:lstStyle/>
@@ -6369,7 +6035,7 @@
           <a:noFill/>
         </p:spPr>
         <p:txBody>
-          <a:bodyPr wrap="square" lIns="0" tIns="0" rIns="0" bIns="0" anchor="t">
+          <a:bodyPr wrap="square" anchor="t" lIns="0" rIns="0" tIns="0" bIns="0">
             <a:spAutoFit/>
           </a:bodyPr>
           <a:lstStyle/>
@@ -6432,7 +6098,6 @@
           <a:lstStyle/>
           <a:p>
             <a:pPr algn="ctr"/>
-            <a:endParaRPr/>
           </a:p>
         </p:txBody>
       </p:sp>
@@ -6453,7 +6118,7 @@
           <a:noFill/>
         </p:spPr>
         <p:txBody>
-          <a:bodyPr wrap="square" lIns="0" tIns="0" rIns="0" bIns="0" anchor="t">
+          <a:bodyPr wrap="square" anchor="t" lIns="0" rIns="0" tIns="0" bIns="0">
             <a:spAutoFit/>
           </a:bodyPr>
           <a:lstStyle/>
@@ -6492,7 +6157,7 @@
           <a:noFill/>
         </p:spPr>
         <p:txBody>
-          <a:bodyPr wrap="square" lIns="0" tIns="0" rIns="0" bIns="0" anchor="t">
+          <a:bodyPr wrap="square" anchor="t" lIns="0" rIns="0" tIns="0" bIns="0">
             <a:spAutoFit/>
           </a:bodyPr>
           <a:lstStyle/>
@@ -6531,7 +6196,7 @@
           <a:noFill/>
         </p:spPr>
         <p:txBody>
-          <a:bodyPr wrap="square" lIns="0" tIns="0" rIns="0" bIns="0" anchor="t">
+          <a:bodyPr wrap="square" anchor="t" lIns="0" rIns="0" tIns="0" bIns="0">
             <a:spAutoFit/>
           </a:bodyPr>
           <a:lstStyle/>
@@ -6570,7 +6235,7 @@
           <a:noFill/>
         </p:spPr>
         <p:txBody>
-          <a:bodyPr wrap="square" lIns="0" tIns="0" rIns="0" bIns="0" anchor="t">
+          <a:bodyPr wrap="square" anchor="t" lIns="0" rIns="0" tIns="0" bIns="0">
             <a:spAutoFit/>
           </a:bodyPr>
           <a:lstStyle/>
@@ -6609,7 +6274,7 @@
           <a:noFill/>
         </p:spPr>
         <p:txBody>
-          <a:bodyPr wrap="square" lIns="0" tIns="0" rIns="0" bIns="0" anchor="t">
+          <a:bodyPr wrap="square" anchor="t" lIns="0" rIns="0" tIns="0" bIns="0">
             <a:spAutoFit/>
           </a:bodyPr>
           <a:lstStyle/>
@@ -6648,7 +6313,7 @@
           <a:noFill/>
         </p:spPr>
         <p:txBody>
-          <a:bodyPr wrap="square" lIns="0" tIns="0" rIns="0" bIns="0" anchor="t">
+          <a:bodyPr wrap="square" anchor="t" lIns="0" rIns="0" tIns="0" bIns="0">
             <a:spAutoFit/>
           </a:bodyPr>
           <a:lstStyle/>
@@ -6711,7 +6376,6 @@
           <a:lstStyle/>
           <a:p>
             <a:pPr algn="ctr"/>
-            <a:endParaRPr/>
           </a:p>
         </p:txBody>
       </p:sp>
@@ -6732,7 +6396,7 @@
           <a:noFill/>
         </p:spPr>
         <p:txBody>
-          <a:bodyPr wrap="square" lIns="0" tIns="0" rIns="0" bIns="0" anchor="t">
+          <a:bodyPr wrap="square" anchor="t" lIns="0" rIns="0" tIns="0" bIns="0">
             <a:spAutoFit/>
           </a:bodyPr>
           <a:lstStyle/>
@@ -6771,7 +6435,7 @@
           <a:noFill/>
         </p:spPr>
         <p:txBody>
-          <a:bodyPr wrap="square" lIns="0" tIns="0" rIns="0" bIns="0" anchor="t">
+          <a:bodyPr wrap="square" anchor="t" lIns="0" rIns="0" tIns="0" bIns="0">
             <a:spAutoFit/>
           </a:bodyPr>
           <a:lstStyle/>
@@ -6810,7 +6474,7 @@
           <a:noFill/>
         </p:spPr>
         <p:txBody>
-          <a:bodyPr wrap="square" lIns="0" tIns="0" rIns="0" bIns="0" anchor="t">
+          <a:bodyPr wrap="square" anchor="t" lIns="0" rIns="0" tIns="0" bIns="0">
             <a:spAutoFit/>
           </a:bodyPr>
           <a:lstStyle/>
@@ -6849,7 +6513,7 @@
           <a:noFill/>
         </p:spPr>
         <p:txBody>
-          <a:bodyPr wrap="square" lIns="0" tIns="0" rIns="0" bIns="0" anchor="t">
+          <a:bodyPr wrap="square" anchor="t" lIns="0" rIns="0" tIns="0" bIns="0">
             <a:spAutoFit/>
           </a:bodyPr>
           <a:lstStyle/>
@@ -6888,7 +6552,7 @@
           <a:noFill/>
         </p:spPr>
         <p:txBody>
-          <a:bodyPr wrap="square" lIns="0" tIns="0" rIns="0" bIns="0" anchor="t">
+          <a:bodyPr wrap="square" anchor="t" lIns="0" rIns="0" tIns="0" bIns="0">
             <a:spAutoFit/>
           </a:bodyPr>
           <a:lstStyle/>
@@ -6927,7 +6591,7 @@
           <a:noFill/>
         </p:spPr>
         <p:txBody>
-          <a:bodyPr wrap="square" lIns="0" tIns="0" rIns="0" bIns="0" anchor="t">
+          <a:bodyPr wrap="square" anchor="t" lIns="0" rIns="0" tIns="0" bIns="0">
             <a:spAutoFit/>
           </a:bodyPr>
           <a:lstStyle/>
@@ -6990,7 +6654,6 @@
           <a:lstStyle/>
           <a:p>
             <a:pPr algn="ctr"/>
-            <a:endParaRPr/>
           </a:p>
         </p:txBody>
       </p:sp>
@@ -7011,7 +6674,7 @@
           <a:noFill/>
         </p:spPr>
         <p:txBody>
-          <a:bodyPr wrap="square" lIns="0" tIns="0" rIns="0" bIns="0" anchor="t">
+          <a:bodyPr wrap="square" anchor="t" lIns="0" rIns="0" tIns="0" bIns="0">
             <a:spAutoFit/>
           </a:bodyPr>
           <a:lstStyle/>
@@ -7050,7 +6713,7 @@
           <a:noFill/>
         </p:spPr>
         <p:txBody>
-          <a:bodyPr wrap="square" lIns="0" tIns="0" rIns="0" bIns="0" anchor="t">
+          <a:bodyPr wrap="square" anchor="t" lIns="0" rIns="0" tIns="0" bIns="0">
             <a:spAutoFit/>
           </a:bodyPr>
           <a:lstStyle/>
@@ -7089,7 +6752,7 @@
           <a:noFill/>
         </p:spPr>
         <p:txBody>
-          <a:bodyPr wrap="square" lIns="0" tIns="0" rIns="0" bIns="0" anchor="t">
+          <a:bodyPr wrap="square" anchor="t" lIns="0" rIns="0" tIns="0" bIns="0">
             <a:spAutoFit/>
           </a:bodyPr>
           <a:lstStyle/>
@@ -7128,7 +6791,7 @@
           <a:noFill/>
         </p:spPr>
         <p:txBody>
-          <a:bodyPr wrap="square" lIns="0" tIns="0" rIns="0" bIns="0" anchor="t">
+          <a:bodyPr wrap="square" anchor="t" lIns="0" rIns="0" tIns="0" bIns="0">
             <a:spAutoFit/>
           </a:bodyPr>
           <a:lstStyle/>
@@ -7159,7 +6822,7 @@
 </file>
 
 <file path=ppt/slides/slide3.xml><?xml version="1.0" encoding="utf-8"?>
-<p:sld xmlns:a="http://schemas.openxmlformats.org/drawingml/2006/main" xmlns:r="http://schemas.openxmlformats.org/officeDocument/2006/relationships" xmlns:p="http://schemas.openxmlformats.org/presentationml/2006/main">
+<p:sld xmlns:a="http://schemas.openxmlformats.org/drawingml/2006/main" xmlns:p="http://schemas.openxmlformats.org/presentationml/2006/main" xmlns:r="http://schemas.openxmlformats.org/officeDocument/2006/relationships">
   <p:cSld>
     <p:bg>
       <p:bgPr>
@@ -7175,14 +6838,7 @@
         <p:cNvGrpSpPr/>
         <p:nvPr/>
       </p:nvGrpSpPr>
-      <p:grpSpPr>
-        <a:xfrm>
-          <a:off x="0" y="0"/>
-          <a:ext cx="0" cy="0"/>
-          <a:chOff x="0" y="0"/>
-          <a:chExt cx="0" cy="0"/>
-        </a:xfrm>
-      </p:grpSpPr>
+      <p:grpSpPr/>
       <p:sp>
         <p:nvSpPr>
           <p:cNvPr id="2" name="TextBox 1"/>
@@ -7200,7 +6856,7 @@
           <a:noFill/>
         </p:spPr>
         <p:txBody>
-          <a:bodyPr wrap="square" lIns="0" tIns="0" rIns="0" bIns="0" anchor="t">
+          <a:bodyPr wrap="square" anchor="t" lIns="0" rIns="0" tIns="0" bIns="0">
             <a:spAutoFit/>
           </a:bodyPr>
           <a:lstStyle/>
@@ -7231,15 +6887,15 @@
         <p:spPr>
           <a:xfrm>
             <a:off x="502920" y="658368"/>
-            <a:ext cx="8138160" cy="365485"/>
-          </a:xfrm>
-          <a:prstGeom prst="rect">
-            <a:avLst/>
-          </a:prstGeom>
-          <a:noFill/>
-        </p:spPr>
-        <p:txBody>
-          <a:bodyPr wrap="square" lIns="0" tIns="0" rIns="0" bIns="0" anchor="t">
+            <a:ext cx="8138160" cy="566928"/>
+          </a:xfrm>
+          <a:prstGeom prst="rect">
+            <a:avLst/>
+          </a:prstGeom>
+          <a:noFill/>
+        </p:spPr>
+        <p:txBody>
+          <a:bodyPr wrap="square" anchor="t" lIns="0" rIns="0" tIns="0" bIns="0">
             <a:spAutoFit/>
           </a:bodyPr>
           <a:lstStyle/>
@@ -7250,22 +6906,13 @@
               </a:lnSpc>
             </a:pPr>
             <a:r>
-              <a:rPr sz="2500" b="1" dirty="0" err="1">
+              <a:rPr sz="2500" b="1">
                 <a:solidFill>
                   <a:srgbClr val="1A1A1A"/>
                 </a:solidFill>
                 <a:latin typeface="Poppins"/>
               </a:rPr>
-              <a:t>AerialVLA's</a:t>
-            </a:r>
-            <a:r>
-              <a:rPr sz="2500" b="1" dirty="0">
-                <a:solidFill>
-                  <a:srgbClr val="1A1A1A"/>
-                </a:solidFill>
-                <a:latin typeface="Poppins"/>
-              </a:rPr>
-              <a:t> language</a:t>
+              <a:t>AerialVLA's language input never reached its output.</a:t>
             </a:r>
           </a:p>
         </p:txBody>
@@ -7278,7 +6925,7 @@
         </p:nvSpPr>
         <p:spPr>
           <a:xfrm>
-            <a:off x="502920" y="1433324"/>
+            <a:off x="502920" y="1280160"/>
             <a:ext cx="8138160" cy="310896"/>
           </a:xfrm>
           <a:prstGeom prst="rect">
@@ -7287,7 +6934,7 @@
           <a:noFill/>
         </p:spPr>
         <p:txBody>
-          <a:bodyPr wrap="square" lIns="0" tIns="0" rIns="0" bIns="0" anchor="t">
+          <a:bodyPr wrap="square" anchor="t" lIns="0" rIns="0" tIns="0" bIns="0">
             <a:spAutoFit/>
           </a:bodyPr>
           <a:lstStyle/>
@@ -7350,7 +6997,6 @@
           <a:lstStyle/>
           <a:p>
             <a:pPr algn="ctr"/>
-            <a:endParaRPr/>
           </a:p>
         </p:txBody>
       </p:sp>
@@ -7371,7 +7017,7 @@
           <a:noFill/>
         </p:spPr>
         <p:txBody>
-          <a:bodyPr wrap="square" lIns="0" tIns="0" rIns="0" bIns="0" anchor="t">
+          <a:bodyPr wrap="square" anchor="t" lIns="0" rIns="0" tIns="0" bIns="0">
             <a:spAutoFit/>
           </a:bodyPr>
           <a:lstStyle/>
@@ -7401,7 +7047,7 @@
         </p:nvSpPr>
         <p:spPr>
           <a:xfrm>
-            <a:off x="502920" y="1888237"/>
+            <a:off x="502920" y="1691640"/>
             <a:ext cx="2606040" cy="932688"/>
           </a:xfrm>
           <a:prstGeom prst="roundRect">
@@ -7434,7 +7080,6 @@
           <a:lstStyle/>
           <a:p>
             <a:pPr algn="ctr"/>
-            <a:endParaRPr/>
           </a:p>
         </p:txBody>
       </p:sp>
@@ -7446,7 +7091,7 @@
         </p:nvSpPr>
         <p:spPr>
           <a:xfrm>
-            <a:off x="612648" y="2007109"/>
+            <a:off x="612648" y="1810512"/>
             <a:ext cx="2386584" cy="384048"/>
           </a:xfrm>
           <a:prstGeom prst="rect">
@@ -7455,7 +7100,7 @@
           <a:noFill/>
         </p:spPr>
         <p:txBody>
-          <a:bodyPr wrap="square" lIns="0" tIns="0" rIns="0" bIns="0" anchor="t">
+          <a:bodyPr wrap="square" anchor="t" lIns="0" rIns="0" tIns="0" bIns="0">
             <a:spAutoFit/>
           </a:bodyPr>
           <a:lstStyle/>
@@ -7485,7 +7130,7 @@
         </p:nvSpPr>
         <p:spPr>
           <a:xfrm>
-            <a:off x="612648" y="2436877"/>
+            <a:off x="612648" y="2240280"/>
             <a:ext cx="2386584" cy="310896"/>
           </a:xfrm>
           <a:prstGeom prst="rect">
@@ -7494,7 +7139,7 @@
           <a:noFill/>
         </p:spPr>
         <p:txBody>
-          <a:bodyPr wrap="square" lIns="0" tIns="0" rIns="0" bIns="0" anchor="t">
+          <a:bodyPr wrap="square" anchor="t" lIns="0" rIns="0" tIns="0" bIns="0">
             <a:spAutoFit/>
           </a:bodyPr>
           <a:lstStyle/>
@@ -7524,7 +7169,7 @@
         </p:nvSpPr>
         <p:spPr>
           <a:xfrm>
-            <a:off x="3273552" y="1888237"/>
+            <a:off x="3273552" y="1691640"/>
             <a:ext cx="2606040" cy="932688"/>
           </a:xfrm>
           <a:prstGeom prst="roundRect">
@@ -7557,7 +7202,6 @@
           <a:lstStyle/>
           <a:p>
             <a:pPr algn="ctr"/>
-            <a:endParaRPr/>
           </a:p>
         </p:txBody>
       </p:sp>
@@ -7569,7 +7213,7 @@
         </p:nvSpPr>
         <p:spPr>
           <a:xfrm>
-            <a:off x="3383280" y="2007109"/>
+            <a:off x="3383280" y="1810512"/>
             <a:ext cx="2386584" cy="384048"/>
           </a:xfrm>
           <a:prstGeom prst="rect">
@@ -7578,7 +7222,7 @@
           <a:noFill/>
         </p:spPr>
         <p:txBody>
-          <a:bodyPr wrap="square" lIns="0" tIns="0" rIns="0" bIns="0" anchor="t">
+          <a:bodyPr wrap="square" anchor="t" lIns="0" rIns="0" tIns="0" bIns="0">
             <a:spAutoFit/>
           </a:bodyPr>
           <a:lstStyle/>
@@ -7608,7 +7252,7 @@
         </p:nvSpPr>
         <p:spPr>
           <a:xfrm>
-            <a:off x="3383280" y="2436877"/>
+            <a:off x="3383280" y="2240280"/>
             <a:ext cx="2386584" cy="310896"/>
           </a:xfrm>
           <a:prstGeom prst="rect">
@@ -7617,7 +7261,7 @@
           <a:noFill/>
         </p:spPr>
         <p:txBody>
-          <a:bodyPr wrap="square" lIns="0" tIns="0" rIns="0" bIns="0" anchor="t">
+          <a:bodyPr wrap="square" anchor="t" lIns="0" rIns="0" tIns="0" bIns="0">
             <a:spAutoFit/>
           </a:bodyPr>
           <a:lstStyle/>
@@ -7647,7 +7291,7 @@
         </p:nvSpPr>
         <p:spPr>
           <a:xfrm>
-            <a:off x="6044184" y="1888237"/>
+            <a:off x="6044184" y="1691640"/>
             <a:ext cx="2596896" cy="932688"/>
           </a:xfrm>
           <a:prstGeom prst="roundRect">
@@ -7680,7 +7324,6 @@
           <a:lstStyle/>
           <a:p>
             <a:pPr algn="ctr"/>
-            <a:endParaRPr/>
           </a:p>
         </p:txBody>
       </p:sp>
@@ -7692,7 +7335,7 @@
         </p:nvSpPr>
         <p:spPr>
           <a:xfrm>
-            <a:off x="6153912" y="2007109"/>
+            <a:off x="6153912" y="1810512"/>
             <a:ext cx="2377439" cy="384048"/>
           </a:xfrm>
           <a:prstGeom prst="rect">
@@ -7701,7 +7344,7 @@
           <a:noFill/>
         </p:spPr>
         <p:txBody>
-          <a:bodyPr wrap="square" lIns="0" tIns="0" rIns="0" bIns="0" anchor="t">
+          <a:bodyPr wrap="square" anchor="t" lIns="0" rIns="0" tIns="0" bIns="0">
             <a:spAutoFit/>
           </a:bodyPr>
           <a:lstStyle/>
@@ -7731,7 +7374,7 @@
         </p:nvSpPr>
         <p:spPr>
           <a:xfrm>
-            <a:off x="6153912" y="2436877"/>
+            <a:off x="6153912" y="2240280"/>
             <a:ext cx="2377439" cy="310896"/>
           </a:xfrm>
           <a:prstGeom prst="rect">
@@ -7740,7 +7383,7 @@
           <a:noFill/>
         </p:spPr>
         <p:txBody>
-          <a:bodyPr wrap="square" lIns="0" tIns="0" rIns="0" bIns="0" anchor="t">
+          <a:bodyPr wrap="square" anchor="t" lIns="0" rIns="0" tIns="0" bIns="0">
             <a:spAutoFit/>
           </a:bodyPr>
           <a:lstStyle/>
@@ -7770,7 +7413,7 @@
         </p:nvSpPr>
         <p:spPr>
           <a:xfrm>
-            <a:off x="502920" y="3031237"/>
+            <a:off x="502920" y="2834640"/>
             <a:ext cx="8138160" cy="1417320"/>
           </a:xfrm>
           <a:prstGeom prst="roundRect">
@@ -7803,7 +7446,6 @@
           <a:lstStyle/>
           <a:p>
             <a:pPr algn="ctr"/>
-            <a:endParaRPr/>
           </a:p>
         </p:txBody>
       </p:sp>
@@ -7815,7 +7457,7 @@
         </p:nvSpPr>
         <p:spPr>
           <a:xfrm>
-            <a:off x="731520" y="3186685"/>
+            <a:off x="731520" y="2990088"/>
             <a:ext cx="7680960" cy="292608"/>
           </a:xfrm>
           <a:prstGeom prst="rect">
@@ -7824,7 +7466,7 @@
           <a:noFill/>
         </p:spPr>
         <p:txBody>
-          <a:bodyPr wrap="square" lIns="0" tIns="0" rIns="0" bIns="0" anchor="t">
+          <a:bodyPr wrap="square" anchor="t" lIns="0" rIns="0" tIns="0" bIns="0">
             <a:spAutoFit/>
           </a:bodyPr>
           <a:lstStyle/>
@@ -7854,7 +7496,7 @@
         </p:nvSpPr>
         <p:spPr>
           <a:xfrm>
-            <a:off x="731520" y="3552445"/>
+            <a:off x="731520" y="3355848"/>
             <a:ext cx="7680960" cy="1005840"/>
           </a:xfrm>
           <a:prstGeom prst="rect">
@@ -7863,7 +7505,7 @@
           <a:noFill/>
         </p:spPr>
         <p:txBody>
-          <a:bodyPr wrap="square" lIns="0" tIns="0" rIns="0" bIns="0" anchor="t">
+          <a:bodyPr wrap="square" anchor="t" lIns="0" rIns="0" tIns="0" bIns="0">
             <a:spAutoFit/>
           </a:bodyPr>
           <a:lstStyle/>
@@ -7942,7 +7584,7 @@
 </file>
 
 <file path=ppt/slides/slide4.xml><?xml version="1.0" encoding="utf-8"?>
-<p:sld xmlns:a="http://schemas.openxmlformats.org/drawingml/2006/main" xmlns:r="http://schemas.openxmlformats.org/officeDocument/2006/relationships" xmlns:p="http://schemas.openxmlformats.org/presentationml/2006/main">
+<p:sld xmlns:a="http://schemas.openxmlformats.org/drawingml/2006/main" xmlns:p="http://schemas.openxmlformats.org/presentationml/2006/main" xmlns:r="http://schemas.openxmlformats.org/officeDocument/2006/relationships">
   <p:cSld>
     <p:bg>
       <p:bgPr>
@@ -7958,14 +7600,7 @@
         <p:cNvGrpSpPr/>
         <p:nvPr/>
       </p:nvGrpSpPr>
-      <p:grpSpPr>
-        <a:xfrm>
-          <a:off x="0" y="0"/>
-          <a:ext cx="0" cy="0"/>
-          <a:chOff x="0" y="0"/>
-          <a:chExt cx="0" cy="0"/>
-        </a:xfrm>
-      </p:grpSpPr>
+      <p:grpSpPr/>
       <p:sp>
         <p:nvSpPr>
           <p:cNvPr id="2" name="TextBox 1"/>
@@ -7983,7 +7618,7 @@
           <a:noFill/>
         </p:spPr>
         <p:txBody>
-          <a:bodyPr wrap="square" lIns="0" tIns="0" rIns="0" bIns="0" anchor="t">
+          <a:bodyPr wrap="square" anchor="t" lIns="0" rIns="0" tIns="0" bIns="0">
             <a:spAutoFit/>
           </a:bodyPr>
           <a:lstStyle/>
@@ -8014,15 +7649,15 @@
         <p:spPr>
           <a:xfrm>
             <a:off x="502920" y="658368"/>
-            <a:ext cx="8138160" cy="365485"/>
-          </a:xfrm>
-          <a:prstGeom prst="rect">
-            <a:avLst/>
-          </a:prstGeom>
-          <a:noFill/>
-        </p:spPr>
-        <p:txBody>
-          <a:bodyPr wrap="square" lIns="0" tIns="0" rIns="0" bIns="0" anchor="t">
+            <a:ext cx="8138160" cy="566928"/>
+          </a:xfrm>
+          <a:prstGeom prst="rect">
+            <a:avLst/>
+          </a:prstGeom>
+          <a:noFill/>
+        </p:spPr>
+        <p:txBody>
+          <a:bodyPr wrap="square" anchor="t" lIns="0" rIns="0" tIns="0" bIns="0">
             <a:spAutoFit/>
           </a:bodyPr>
           <a:lstStyle/>
@@ -8033,20 +7668,14 @@
               </a:lnSpc>
             </a:pPr>
             <a:r>
-              <a:rPr lang="en-US" sz="2500" b="1" dirty="0">
+              <a:rPr sz="2500" b="1">
                 <a:solidFill>
                   <a:srgbClr val="1A1A1A"/>
                 </a:solidFill>
                 <a:latin typeface="Poppins"/>
               </a:rPr>
-              <a:t>Change the model</a:t>
-            </a:r>
-            <a:endParaRPr sz="2500" b="1" dirty="0">
-              <a:solidFill>
-                <a:srgbClr val="1A1A1A"/>
-              </a:solidFill>
-              <a:latin typeface="Poppins"/>
-            </a:endParaRPr>
+              <a:t>We changed the model, not the goal.</a:t>
+            </a:r>
           </a:p>
         </p:txBody>
       </p:sp>
@@ -8067,7 +7696,7 @@
           <a:noFill/>
         </p:spPr>
         <p:txBody>
-          <a:bodyPr wrap="square" lIns="0" tIns="0" rIns="0" bIns="0" anchor="t">
+          <a:bodyPr wrap="square" anchor="t" lIns="0" rIns="0" tIns="0" bIns="0">
             <a:spAutoFit/>
           </a:bodyPr>
           <a:lstStyle/>
@@ -8130,7 +7759,6 @@
           <a:lstStyle/>
           <a:p>
             <a:pPr algn="ctr"/>
-            <a:endParaRPr/>
           </a:p>
         </p:txBody>
       </p:sp>
@@ -8151,7 +7779,7 @@
           <a:noFill/>
         </p:spPr>
         <p:txBody>
-          <a:bodyPr wrap="square" lIns="0" tIns="0" rIns="0" bIns="0" anchor="t">
+          <a:bodyPr wrap="square" anchor="t" lIns="0" rIns="0" tIns="0" bIns="0">
             <a:spAutoFit/>
           </a:bodyPr>
           <a:lstStyle/>
@@ -8214,7 +7842,6 @@
           <a:lstStyle/>
           <a:p>
             <a:pPr algn="ctr"/>
-            <a:endParaRPr/>
           </a:p>
         </p:txBody>
       </p:sp>
@@ -8259,7 +7886,6 @@
           <a:lstStyle/>
           <a:p>
             <a:pPr algn="ctr"/>
-            <a:endParaRPr/>
           </a:p>
         </p:txBody>
       </p:sp>
@@ -8280,7 +7906,7 @@
           <a:noFill/>
         </p:spPr>
         <p:txBody>
-          <a:bodyPr wrap="square" lIns="0" tIns="0" rIns="0" bIns="0" anchor="t">
+          <a:bodyPr wrap="square" anchor="t" lIns="0" rIns="0" tIns="0" bIns="0">
             <a:spAutoFit/>
           </a:bodyPr>
           <a:lstStyle/>
@@ -8319,7 +7945,7 @@
           <a:noFill/>
         </p:spPr>
         <p:txBody>
-          <a:bodyPr wrap="square" lIns="0" tIns="0" rIns="0" bIns="0" anchor="t">
+          <a:bodyPr wrap="square" anchor="t" lIns="0" rIns="0" tIns="0" bIns="0">
             <a:spAutoFit/>
           </a:bodyPr>
           <a:lstStyle/>
@@ -8414,7 +8040,6 @@
           <a:lstStyle/>
           <a:p>
             <a:pPr algn="ctr"/>
-            <a:endParaRPr/>
           </a:p>
         </p:txBody>
       </p:sp>
@@ -8459,7 +8084,6 @@
           <a:lstStyle/>
           <a:p>
             <a:pPr algn="ctr"/>
-            <a:endParaRPr/>
           </a:p>
         </p:txBody>
       </p:sp>
@@ -8480,7 +8104,7 @@
           <a:noFill/>
         </p:spPr>
         <p:txBody>
-          <a:bodyPr wrap="square" lIns="0" tIns="0" rIns="0" bIns="0" anchor="t">
+          <a:bodyPr wrap="square" anchor="t" lIns="0" rIns="0" tIns="0" bIns="0">
             <a:spAutoFit/>
           </a:bodyPr>
           <a:lstStyle/>
@@ -8519,7 +8143,7 @@
           <a:noFill/>
         </p:spPr>
         <p:txBody>
-          <a:bodyPr wrap="square" lIns="0" tIns="0" rIns="0" bIns="0" anchor="t">
+          <a:bodyPr wrap="square" anchor="t" lIns="0" rIns="0" tIns="0" bIns="0">
             <a:spAutoFit/>
           </a:bodyPr>
           <a:lstStyle/>
@@ -8614,7 +8238,6 @@
           <a:lstStyle/>
           <a:p>
             <a:pPr algn="ctr"/>
-            <a:endParaRPr/>
           </a:p>
         </p:txBody>
       </p:sp>
@@ -8659,7 +8282,6 @@
           <a:lstStyle/>
           <a:p>
             <a:pPr algn="ctr"/>
-            <a:endParaRPr/>
           </a:p>
         </p:txBody>
       </p:sp>
@@ -8680,7 +8302,7 @@
           <a:noFill/>
         </p:spPr>
         <p:txBody>
-          <a:bodyPr wrap="square" lIns="0" tIns="0" rIns="0" bIns="0" anchor="t">
+          <a:bodyPr wrap="square" anchor="t" lIns="0" rIns="0" tIns="0" bIns="0">
             <a:spAutoFit/>
           </a:bodyPr>
           <a:lstStyle/>
@@ -8719,7 +8341,7 @@
           <a:noFill/>
         </p:spPr>
         <p:txBody>
-          <a:bodyPr wrap="square" lIns="0" tIns="0" rIns="0" bIns="0" anchor="t">
+          <a:bodyPr wrap="square" anchor="t" lIns="0" rIns="0" tIns="0" bIns="0">
             <a:spAutoFit/>
           </a:bodyPr>
           <a:lstStyle/>
@@ -8790,7 +8412,7 @@
           <a:noFill/>
         </p:spPr>
         <p:txBody>
-          <a:bodyPr wrap="square" lIns="0" tIns="0" rIns="0" bIns="0" anchor="t">
+          <a:bodyPr wrap="square" anchor="t" lIns="0" rIns="0" tIns="0" bIns="0">
             <a:spAutoFit/>
           </a:bodyPr>
           <a:lstStyle/>
@@ -8837,7 +8459,7 @@
 </file>
 
 <file path=ppt/slides/slide5.xml><?xml version="1.0" encoding="utf-8"?>
-<p:sld xmlns:a="http://schemas.openxmlformats.org/drawingml/2006/main" xmlns:r="http://schemas.openxmlformats.org/officeDocument/2006/relationships" xmlns:p="http://schemas.openxmlformats.org/presentationml/2006/main">
+<p:sld xmlns:a="http://schemas.openxmlformats.org/drawingml/2006/main" xmlns:p="http://schemas.openxmlformats.org/presentationml/2006/main" xmlns:r="http://schemas.openxmlformats.org/officeDocument/2006/relationships">
   <p:cSld>
     <p:bg>
       <p:bgPr>
@@ -8853,14 +8475,7 @@
         <p:cNvGrpSpPr/>
         <p:nvPr/>
       </p:nvGrpSpPr>
-      <p:grpSpPr>
-        <a:xfrm>
-          <a:off x="0" y="0"/>
-          <a:ext cx="0" cy="0"/>
-          <a:chOff x="0" y="0"/>
-          <a:chExt cx="0" cy="0"/>
-        </a:xfrm>
-      </p:grpSpPr>
+      <p:grpSpPr/>
       <p:sp>
         <p:nvSpPr>
           <p:cNvPr id="2" name="TextBox 1"/>
@@ -8878,7 +8493,7 @@
           <a:noFill/>
         </p:spPr>
         <p:txBody>
-          <a:bodyPr wrap="square" lIns="0" tIns="0" rIns="0" bIns="0" anchor="t">
+          <a:bodyPr wrap="square" anchor="t" lIns="0" rIns="0" tIns="0" bIns="0">
             <a:spAutoFit/>
           </a:bodyPr>
           <a:lstStyle/>
@@ -8909,15 +8524,15 @@
         <p:spPr>
           <a:xfrm>
             <a:off x="502920" y="658368"/>
-            <a:ext cx="8138160" cy="365485"/>
-          </a:xfrm>
-          <a:prstGeom prst="rect">
-            <a:avLst/>
-          </a:prstGeom>
-          <a:noFill/>
-        </p:spPr>
-        <p:txBody>
-          <a:bodyPr wrap="square" lIns="0" tIns="0" rIns="0" bIns="0" anchor="t">
+            <a:ext cx="8138160" cy="566928"/>
+          </a:xfrm>
+          <a:prstGeom prst="rect">
+            <a:avLst/>
+          </a:prstGeom>
+          <a:noFill/>
+        </p:spPr>
+        <p:txBody>
+          <a:bodyPr wrap="square" anchor="t" lIns="0" rIns="0" tIns="0" bIns="0">
             <a:spAutoFit/>
           </a:bodyPr>
           <a:lstStyle/>
@@ -8928,13 +8543,13 @@
               </a:lnSpc>
             </a:pPr>
             <a:r>
-              <a:rPr sz="2500" b="1" dirty="0">
+              <a:rPr sz="2500" b="1">
                 <a:solidFill>
                   <a:srgbClr val="1A1A1A"/>
                 </a:solidFill>
                 <a:latin typeface="Poppins"/>
               </a:rPr>
-              <a:t>Two flights.</a:t>
+              <a:t>Two flights, one command.</a:t>
             </a:r>
           </a:p>
         </p:txBody>
@@ -8956,7 +8571,7 @@
           <a:noFill/>
         </p:spPr>
         <p:txBody>
-          <a:bodyPr wrap="square" lIns="0" tIns="0" rIns="0" bIns="0" anchor="t">
+          <a:bodyPr wrap="square" anchor="t" lIns="0" rIns="0" tIns="0" bIns="0">
             <a:spAutoFit/>
           </a:bodyPr>
           <a:lstStyle/>
@@ -9019,7 +8634,6 @@
           <a:lstStyle/>
           <a:p>
             <a:pPr algn="ctr"/>
-            <a:endParaRPr/>
           </a:p>
         </p:txBody>
       </p:sp>
@@ -9040,7 +8654,7 @@
           <a:noFill/>
         </p:spPr>
         <p:txBody>
-          <a:bodyPr wrap="square" lIns="0" tIns="0" rIns="0" bIns="0" anchor="t">
+          <a:bodyPr wrap="square" anchor="t" lIns="0" rIns="0" tIns="0" bIns="0">
             <a:spAutoFit/>
           </a:bodyPr>
           <a:lstStyle/>
@@ -9103,7 +8717,6 @@
           <a:lstStyle/>
           <a:p>
             <a:pPr algn="ctr"/>
-            <a:endParaRPr/>
           </a:p>
         </p:txBody>
       </p:sp>
@@ -9124,7 +8737,7 @@
           <a:noFill/>
         </p:spPr>
         <p:txBody>
-          <a:bodyPr wrap="square" lIns="0" tIns="0" rIns="0" bIns="0" anchor="t">
+          <a:bodyPr wrap="square" anchor="t" lIns="0" rIns="0" tIns="0" bIns="0">
             <a:spAutoFit/>
           </a:bodyPr>
           <a:lstStyle/>
@@ -9163,7 +8776,7 @@
           <a:noFill/>
         </p:spPr>
         <p:txBody>
-          <a:bodyPr wrap="square" lIns="0" tIns="0" rIns="0" bIns="0" anchor="t">
+          <a:bodyPr wrap="square" anchor="t" lIns="0" rIns="0" tIns="0" bIns="0">
             <a:spAutoFit/>
           </a:bodyPr>
           <a:lstStyle/>
@@ -9258,7 +8871,6 @@
           <a:lstStyle/>
           <a:p>
             <a:pPr algn="ctr"/>
-            <a:endParaRPr/>
           </a:p>
         </p:txBody>
       </p:sp>
@@ -9279,7 +8891,7 @@
           <a:noFill/>
         </p:spPr>
         <p:txBody>
-          <a:bodyPr wrap="square" lIns="0" tIns="0" rIns="0" bIns="0" anchor="t">
+          <a:bodyPr wrap="square" anchor="t" lIns="0" rIns="0" tIns="0" bIns="0">
             <a:spAutoFit/>
           </a:bodyPr>
           <a:lstStyle/>
@@ -9318,7 +8930,7 @@
           <a:noFill/>
         </p:spPr>
         <p:txBody>
-          <a:bodyPr wrap="square" lIns="0" tIns="0" rIns="0" bIns="0" anchor="t">
+          <a:bodyPr wrap="square" anchor="t" lIns="0" rIns="0" tIns="0" bIns="0">
             <a:spAutoFit/>
           </a:bodyPr>
           <a:lstStyle/>
@@ -9389,7 +9001,7 @@
           <a:noFill/>
         </p:spPr>
         <p:txBody>
-          <a:bodyPr wrap="square" lIns="0" tIns="0" rIns="0" bIns="0" anchor="t">
+          <a:bodyPr wrap="square" anchor="t" lIns="0" rIns="0" tIns="0" bIns="0">
             <a:spAutoFit/>
           </a:bodyPr>
           <a:lstStyle/>
@@ -9436,7 +9048,7 @@
 </file>
 
 <file path=ppt/slides/slide6.xml><?xml version="1.0" encoding="utf-8"?>
-<p:sld xmlns:a="http://schemas.openxmlformats.org/drawingml/2006/main" xmlns:r="http://schemas.openxmlformats.org/officeDocument/2006/relationships" xmlns:p="http://schemas.openxmlformats.org/presentationml/2006/main">
+<p:sld xmlns:a="http://schemas.openxmlformats.org/drawingml/2006/main" xmlns:p="http://schemas.openxmlformats.org/presentationml/2006/main" xmlns:r="http://schemas.openxmlformats.org/officeDocument/2006/relationships">
   <p:cSld>
     <p:bg>
       <p:bgPr>
@@ -9452,14 +9064,7 @@
         <p:cNvGrpSpPr/>
         <p:nvPr/>
       </p:nvGrpSpPr>
-      <p:grpSpPr>
-        <a:xfrm>
-          <a:off x="0" y="0"/>
-          <a:ext cx="0" cy="0"/>
-          <a:chOff x="0" y="0"/>
-          <a:chExt cx="0" cy="0"/>
-        </a:xfrm>
-      </p:grpSpPr>
+      <p:grpSpPr/>
       <p:sp>
         <p:nvSpPr>
           <p:cNvPr id="2" name="TextBox 1"/>
@@ -9477,7 +9082,7 @@
           <a:noFill/>
         </p:spPr>
         <p:txBody>
-          <a:bodyPr wrap="square" lIns="0" tIns="0" rIns="0" bIns="0" anchor="t">
+          <a:bodyPr wrap="square" anchor="t" lIns="0" rIns="0" tIns="0" bIns="0">
             <a:spAutoFit/>
           </a:bodyPr>
           <a:lstStyle/>
@@ -9516,7 +9121,7 @@
           <a:noFill/>
         </p:spPr>
         <p:txBody>
-          <a:bodyPr wrap="square" lIns="0" tIns="0" rIns="0" bIns="0" anchor="t">
+          <a:bodyPr wrap="square" anchor="t" lIns="0" rIns="0" tIns="0" bIns="0">
             <a:spAutoFit/>
           </a:bodyPr>
           <a:lstStyle/>
@@ -9527,7 +9132,7 @@
               </a:lnSpc>
             </a:pPr>
             <a:r>
-              <a:rPr sz="2500" b="1" dirty="0">
+              <a:rPr sz="2500" b="1">
                 <a:solidFill>
                   <a:srgbClr val="1A1A1A"/>
                 </a:solidFill>
@@ -9555,7 +9160,7 @@
           <a:noFill/>
         </p:spPr>
         <p:txBody>
-          <a:bodyPr wrap="square" lIns="0" tIns="0" rIns="0" bIns="0" anchor="t">
+          <a:bodyPr wrap="square" anchor="t" lIns="0" rIns="0" tIns="0" bIns="0">
             <a:spAutoFit/>
           </a:bodyPr>
           <a:lstStyle/>
@@ -9572,7 +9177,7 @@
                 </a:solidFill>
                 <a:latin typeface="Poppins"/>
               </a:rPr>
-              <a:t>Car at 2.0 m/s. Separation measured against its true position, offline.</a:t>
+              <a:t>Every row re-flown 2026-08-11. Separation scored offline against ground truth.</a:t>
             </a:r>
           </a:p>
         </p:txBody>
@@ -9618,7 +9223,6 @@
           <a:lstStyle/>
           <a:p>
             <a:pPr algn="ctr"/>
-            <a:endParaRPr/>
           </a:p>
         </p:txBody>
       </p:sp>
@@ -9639,7 +9243,7 @@
           <a:noFill/>
         </p:spPr>
         <p:txBody>
-          <a:bodyPr wrap="square" lIns="0" tIns="0" rIns="0" bIns="0" anchor="t">
+          <a:bodyPr wrap="square" anchor="t" lIns="0" rIns="0" tIns="0" bIns="0">
             <a:spAutoFit/>
           </a:bodyPr>
           <a:lstStyle/>
@@ -9702,7 +9306,6 @@
           <a:lstStyle/>
           <a:p>
             <a:pPr algn="ctr"/>
-            <a:endParaRPr/>
           </a:p>
         </p:txBody>
       </p:sp>
@@ -9723,7 +9326,7 @@
           <a:noFill/>
         </p:spPr>
         <p:txBody>
-          <a:bodyPr wrap="square" lIns="0" tIns="0" rIns="0" bIns="0" anchor="t">
+          <a:bodyPr wrap="square" anchor="t" lIns="0" rIns="0" tIns="0" bIns="0">
             <a:spAutoFit/>
           </a:bodyPr>
           <a:lstStyle/>
@@ -9762,7 +9365,7 @@
           <a:noFill/>
         </p:spPr>
         <p:txBody>
-          <a:bodyPr wrap="square" lIns="0" tIns="0" rIns="0" bIns="0" anchor="t">
+          <a:bodyPr wrap="square" anchor="t" lIns="0" rIns="0" tIns="0" bIns="0">
             <a:spAutoFit/>
           </a:bodyPr>
           <a:lstStyle/>
@@ -9801,7 +9404,7 @@
           <a:noFill/>
         </p:spPr>
         <p:txBody>
-          <a:bodyPr wrap="square" lIns="0" tIns="0" rIns="0" bIns="0" anchor="t">
+          <a:bodyPr wrap="square" anchor="t" lIns="0" rIns="0" tIns="0" bIns="0">
             <a:spAutoFit/>
           </a:bodyPr>
           <a:lstStyle/>
@@ -9840,7 +9443,7 @@
           <a:noFill/>
         </p:spPr>
         <p:txBody>
-          <a:bodyPr wrap="square" lIns="0" tIns="0" rIns="0" bIns="0" anchor="t">
+          <a:bodyPr wrap="square" anchor="t" lIns="0" rIns="0" tIns="0" bIns="0">
             <a:spAutoFit/>
           </a:bodyPr>
           <a:lstStyle/>
@@ -9871,15 +9474,15 @@
         <p:spPr>
           <a:xfrm>
             <a:off x="6400800" y="1746504"/>
-            <a:ext cx="1088136" cy="201168"/>
-          </a:xfrm>
-          <a:prstGeom prst="rect">
-            <a:avLst/>
-          </a:prstGeom>
-          <a:noFill/>
-        </p:spPr>
-        <p:txBody>
-          <a:bodyPr wrap="square" lIns="0" tIns="0" rIns="0" bIns="0" anchor="t">
+            <a:ext cx="813816" cy="201168"/>
+          </a:xfrm>
+          <a:prstGeom prst="rect">
+            <a:avLst/>
+          </a:prstGeom>
+          <a:noFill/>
+        </p:spPr>
+        <p:txBody>
+          <a:bodyPr wrap="square" anchor="t" lIns="0" rIns="0" tIns="0" bIns="0">
             <a:spAutoFit/>
           </a:bodyPr>
           <a:lstStyle/>
@@ -9896,7 +9499,7 @@
                 </a:solidFill>
                 <a:latin typeface="Poppins"/>
               </a:rPr>
-              <a:t>Shield overrides</a:t>
+              <a:t>Shield</a:t>
             </a:r>
           </a:p>
         </p:txBody>
@@ -9909,16 +9512,16 @@
         </p:nvSpPr>
         <p:spPr>
           <a:xfrm>
-            <a:off x="7635240" y="1746504"/>
-            <a:ext cx="950976" cy="201168"/>
-          </a:xfrm>
-          <a:prstGeom prst="rect">
-            <a:avLst/>
-          </a:prstGeom>
-          <a:noFill/>
-        </p:spPr>
-        <p:txBody>
-          <a:bodyPr wrap="square" lIns="0" tIns="0" rIns="0" bIns="0" anchor="t">
+            <a:off x="7360920" y="1746504"/>
+            <a:ext cx="1225296" cy="201168"/>
+          </a:xfrm>
+          <a:prstGeom prst="rect">
+            <a:avLst/>
+          </a:prstGeom>
+          <a:noFill/>
+        </p:spPr>
+        <p:txBody>
+          <a:bodyPr wrap="square" anchor="t" lIns="0" rIns="0" tIns="0" bIns="0">
             <a:spAutoFit/>
           </a:bodyPr>
           <a:lstStyle/>
@@ -9935,7 +9538,7 @@
                 </a:solidFill>
                 <a:latin typeface="Poppins"/>
               </a:rPr>
-              <a:t>NFZ time</a:t>
+              <a:t>NFZ / alt</a:t>
             </a:r>
           </a:p>
         </p:txBody>
@@ -9981,7 +9584,6 @@
           <a:lstStyle/>
           <a:p>
             <a:pPr algn="ctr"/>
-            <a:endParaRPr/>
           </a:p>
         </p:txBody>
       </p:sp>
@@ -10002,7 +9604,7 @@
           <a:noFill/>
         </p:spPr>
         <p:txBody>
-          <a:bodyPr wrap="square" lIns="0" tIns="0" rIns="0" bIns="0" anchor="t">
+          <a:bodyPr wrap="square" anchor="t" lIns="0" rIns="0" tIns="0" bIns="0">
             <a:spAutoFit/>
           </a:bodyPr>
           <a:lstStyle/>
@@ -10019,7 +9621,7 @@
                 </a:solidFill>
                 <a:latin typeface="Poppins"/>
               </a:rPr>
-              <a:t>Follow: car stops twice</a:t>
+              <a:t>Follow, car stops twice</a:t>
             </a:r>
           </a:p>
         </p:txBody>
@@ -10041,7 +9643,7 @@
           <a:noFill/>
         </p:spPr>
         <p:txBody>
-          <a:bodyPr wrap="square" lIns="0" tIns="0" rIns="0" bIns="0" anchor="t">
+          <a:bodyPr wrap="square" anchor="t" lIns="0" rIns="0" tIns="0" bIns="0">
             <a:spAutoFit/>
           </a:bodyPr>
           <a:lstStyle/>
@@ -10058,7 +9660,7 @@
                 </a:solidFill>
                 <a:latin typeface="Poppins"/>
               </a:rPr>
-              <a:t>100%</a:t>
+              <a:t>99.3%</a:t>
             </a:r>
           </a:p>
         </p:txBody>
@@ -10080,7 +9682,7 @@
           <a:noFill/>
         </p:spPr>
         <p:txBody>
-          <a:bodyPr wrap="square" lIns="0" tIns="0" rIns="0" bIns="0" anchor="t">
+          <a:bodyPr wrap="square" anchor="t" lIns="0" rIns="0" tIns="0" bIns="0">
             <a:spAutoFit/>
           </a:bodyPr>
           <a:lstStyle/>
@@ -10097,7 +9699,7 @@
                 </a:solidFill>
                 <a:latin typeface="Poppins"/>
               </a:rPr>
-              <a:t>15.6 m</a:t>
+              <a:t>13.4 m</a:t>
             </a:r>
           </a:p>
         </p:txBody>
@@ -10119,7 +9721,7 @@
           <a:noFill/>
         </p:spPr>
         <p:txBody>
-          <a:bodyPr wrap="square" lIns="0" tIns="0" rIns="0" bIns="0" anchor="t">
+          <a:bodyPr wrap="square" anchor="t" lIns="0" rIns="0" tIns="0" bIns="0">
             <a:spAutoFit/>
           </a:bodyPr>
           <a:lstStyle/>
@@ -10150,15 +9752,15 @@
         <p:spPr>
           <a:xfrm>
             <a:off x="6400800" y="2020824"/>
-            <a:ext cx="1088136" cy="201168"/>
-          </a:xfrm>
-          <a:prstGeom prst="rect">
-            <a:avLst/>
-          </a:prstGeom>
-          <a:noFill/>
-        </p:spPr>
-        <p:txBody>
-          <a:bodyPr wrap="square" lIns="0" tIns="0" rIns="0" bIns="0" anchor="t">
+            <a:ext cx="813816" cy="201168"/>
+          </a:xfrm>
+          <a:prstGeom prst="rect">
+            <a:avLst/>
+          </a:prstGeom>
+          <a:noFill/>
+        </p:spPr>
+        <p:txBody>
+          <a:bodyPr wrap="square" anchor="t" lIns="0" rIns="0" tIns="0" bIns="0">
             <a:spAutoFit/>
           </a:bodyPr>
           <a:lstStyle/>
@@ -10188,16 +9790,16 @@
         </p:nvSpPr>
         <p:spPr>
           <a:xfrm>
-            <a:off x="7635240" y="2020824"/>
-            <a:ext cx="950976" cy="201168"/>
-          </a:xfrm>
-          <a:prstGeom prst="rect">
-            <a:avLst/>
-          </a:prstGeom>
-          <a:noFill/>
-        </p:spPr>
-        <p:txBody>
-          <a:bodyPr wrap="square" lIns="0" tIns="0" rIns="0" bIns="0" anchor="t">
+            <a:off x="7360920" y="2020824"/>
+            <a:ext cx="1225296" cy="201168"/>
+          </a:xfrm>
+          <a:prstGeom prst="rect">
+            <a:avLst/>
+          </a:prstGeom>
+          <a:noFill/>
+        </p:spPr>
+        <p:txBody>
+          <a:bodyPr wrap="square" anchor="t" lIns="0" rIns="0" tIns="0" bIns="0">
             <a:spAutoFit/>
           </a:bodyPr>
           <a:lstStyle/>
@@ -10236,7 +9838,7 @@
           <a:noFill/>
         </p:spPr>
         <p:txBody>
-          <a:bodyPr wrap="square" lIns="0" tIns="0" rIns="0" bIns="0" anchor="t">
+          <a:bodyPr wrap="square" anchor="t" lIns="0" rIns="0" tIns="0" bIns="0">
             <a:spAutoFit/>
           </a:bodyPr>
           <a:lstStyle/>
@@ -10253,7 +9855,7 @@
                 </a:solidFill>
                 <a:latin typeface="Poppins"/>
               </a:rPr>
-              <a:t>Follow + no-fly zone</a:t>
+              <a:t>Same again (replicate)</a:t>
             </a:r>
           </a:p>
         </p:txBody>
@@ -10275,7 +9877,7 @@
           <a:noFill/>
         </p:spPr>
         <p:txBody>
-          <a:bodyPr wrap="square" lIns="0" tIns="0" rIns="0" bIns="0" anchor="t">
+          <a:bodyPr wrap="square" anchor="t" lIns="0" rIns="0" tIns="0" bIns="0">
             <a:spAutoFit/>
           </a:bodyPr>
           <a:lstStyle/>
@@ -10292,7 +9894,7 @@
                 </a:solidFill>
                 <a:latin typeface="Poppins"/>
               </a:rPr>
-              <a:t>67.8%</a:t>
+              <a:t>100%</a:t>
             </a:r>
           </a:p>
         </p:txBody>
@@ -10314,7 +9916,7 @@
           <a:noFill/>
         </p:spPr>
         <p:txBody>
-          <a:bodyPr wrap="square" lIns="0" tIns="0" rIns="0" bIns="0" anchor="t">
+          <a:bodyPr wrap="square" anchor="t" lIns="0" rIns="0" tIns="0" bIns="0">
             <a:spAutoFit/>
           </a:bodyPr>
           <a:lstStyle/>
@@ -10331,7 +9933,7 @@
                 </a:solidFill>
                 <a:latin typeface="Poppins"/>
               </a:rPr>
-              <a:t>45.2 m</a:t>
+              <a:t>12.5 m</a:t>
             </a:r>
           </a:p>
         </p:txBody>
@@ -10353,7 +9955,7 @@
           <a:noFill/>
         </p:spPr>
         <p:txBody>
-          <a:bodyPr wrap="square" lIns="0" tIns="0" rIns="0" bIns="0" anchor="t">
+          <a:bodyPr wrap="square" anchor="t" lIns="0" rIns="0" tIns="0" bIns="0">
             <a:spAutoFit/>
           </a:bodyPr>
           <a:lstStyle/>
@@ -10366,11 +9968,11 @@
             <a:r>
               <a:rPr sz="950" b="1">
                 <a:solidFill>
-                  <a:srgbClr val="C0433F"/>
-                </a:solidFill>
-                <a:latin typeface="Poppins"/>
-              </a:rPr>
-              <a:t>28.6%</a:t>
+                  <a:srgbClr val="1B8A5A"/>
+                </a:solidFill>
+                <a:latin typeface="Poppins"/>
+              </a:rPr>
+              <a:t>100%</a:t>
             </a:r>
           </a:p>
         </p:txBody>
@@ -10384,28 +9986,28 @@
         <p:spPr>
           <a:xfrm>
             <a:off x="6400800" y="2295144"/>
-            <a:ext cx="1088136" cy="201168"/>
-          </a:xfrm>
-          <a:prstGeom prst="rect">
-            <a:avLst/>
-          </a:prstGeom>
-          <a:noFill/>
-        </p:spPr>
-        <p:txBody>
-          <a:bodyPr wrap="square" lIns="0" tIns="0" rIns="0" bIns="0" anchor="t">
-            <a:spAutoFit/>
-          </a:bodyPr>
-          <a:lstStyle/>
-          <a:p>
-            <a:pPr algn="l">
-              <a:lnSpc>
-                <a:spcPct val="100000"/>
-              </a:lnSpc>
-            </a:pPr>
-            <a:r>
-              <a:rPr sz="950" b="1">
-                <a:solidFill>
-                  <a:srgbClr val="249DB2"/>
+            <a:ext cx="813816" cy="201168"/>
+          </a:xfrm>
+          <a:prstGeom prst="rect">
+            <a:avLst/>
+          </a:prstGeom>
+          <a:noFill/>
+        </p:spPr>
+        <p:txBody>
+          <a:bodyPr wrap="square" anchor="t" lIns="0" rIns="0" tIns="0" bIns="0">
+            <a:spAutoFit/>
+          </a:bodyPr>
+          <a:lstStyle/>
+          <a:p>
+            <a:pPr algn="l">
+              <a:lnSpc>
+                <a:spcPct val="100000"/>
+              </a:lnSpc>
+            </a:pPr>
+            <a:r>
+              <a:rPr sz="950" b="0">
+                <a:solidFill>
+                  <a:srgbClr val="2B2B2B"/>
                 </a:solidFill>
                 <a:latin typeface="Poppins"/>
               </a:rPr>
@@ -10422,16 +10024,16 @@
         </p:nvSpPr>
         <p:spPr>
           <a:xfrm>
-            <a:off x="7635240" y="2295144"/>
-            <a:ext cx="950976" cy="201168"/>
-          </a:xfrm>
-          <a:prstGeom prst="rect">
-            <a:avLst/>
-          </a:prstGeom>
-          <a:noFill/>
-        </p:spPr>
-        <p:txBody>
-          <a:bodyPr wrap="square" lIns="0" tIns="0" rIns="0" bIns="0" anchor="t">
+            <a:off x="7360920" y="2295144"/>
+            <a:ext cx="1225296" cy="201168"/>
+          </a:xfrm>
+          <a:prstGeom prst="rect">
+            <a:avLst/>
+          </a:prstGeom>
+          <a:noFill/>
+        </p:spPr>
+        <p:txBody>
+          <a:bodyPr wrap="square" anchor="t" lIns="0" rIns="0" tIns="0" bIns="0">
             <a:spAutoFit/>
           </a:bodyPr>
           <a:lstStyle/>
@@ -10494,7 +10096,6 @@
           <a:lstStyle/>
           <a:p>
             <a:pPr algn="ctr"/>
-            <a:endParaRPr/>
           </a:p>
         </p:txBody>
       </p:sp>
@@ -10515,7 +10116,7 @@
           <a:noFill/>
         </p:spPr>
         <p:txBody>
-          <a:bodyPr wrap="square" lIns="0" tIns="0" rIns="0" bIns="0" anchor="t">
+          <a:bodyPr wrap="square" anchor="t" lIns="0" rIns="0" tIns="0" bIns="0">
             <a:spAutoFit/>
           </a:bodyPr>
           <a:lstStyle/>
@@ -10532,7 +10133,7 @@
                 </a:solidFill>
                 <a:latin typeface="Poppins"/>
               </a:rPr>
-              <a:t>Control: wrong colour</a:t>
+              <a:t>+ 3 identical distractors</a:t>
             </a:r>
           </a:p>
         </p:txBody>
@@ -10554,7 +10155,7 @@
           <a:noFill/>
         </p:spPr>
         <p:txBody>
-          <a:bodyPr wrap="square" lIns="0" tIns="0" rIns="0" bIns="0" anchor="t">
+          <a:bodyPr wrap="square" anchor="t" lIns="0" rIns="0" tIns="0" bIns="0">
             <a:spAutoFit/>
           </a:bodyPr>
           <a:lstStyle/>
@@ -10571,7 +10172,7 @@
                 </a:solidFill>
                 <a:latin typeface="Poppins"/>
               </a:rPr>
-              <a:t>99.0%</a:t>
+              <a:t>97.9%</a:t>
             </a:r>
           </a:p>
         </p:txBody>
@@ -10593,24 +10194,24 @@
           <a:noFill/>
         </p:spPr>
         <p:txBody>
-          <a:bodyPr wrap="square" lIns="0" tIns="0" rIns="0" bIns="0" anchor="t">
-            <a:spAutoFit/>
-          </a:bodyPr>
-          <a:lstStyle/>
-          <a:p>
-            <a:pPr algn="l">
-              <a:lnSpc>
-                <a:spcPct val="100000"/>
-              </a:lnSpc>
-            </a:pPr>
-            <a:r>
-              <a:rPr sz="950" b="1">
-                <a:solidFill>
-                  <a:srgbClr val="C0433F"/>
-                </a:solidFill>
-                <a:latin typeface="Poppins"/>
-              </a:rPr>
-              <a:t>68.5 m</a:t>
+          <a:bodyPr wrap="square" anchor="t" lIns="0" rIns="0" tIns="0" bIns="0">
+            <a:spAutoFit/>
+          </a:bodyPr>
+          <a:lstStyle/>
+          <a:p>
+            <a:pPr algn="l">
+              <a:lnSpc>
+                <a:spcPct val="100000"/>
+              </a:lnSpc>
+            </a:pPr>
+            <a:r>
+              <a:rPr sz="950" b="0">
+                <a:solidFill>
+                  <a:srgbClr val="2B2B2B"/>
+                </a:solidFill>
+                <a:latin typeface="Poppins"/>
+              </a:rPr>
+              <a:t>17.7 m</a:t>
             </a:r>
           </a:p>
         </p:txBody>
@@ -10632,7 +10233,7 @@
           <a:noFill/>
         </p:spPr>
         <p:txBody>
-          <a:bodyPr wrap="square" lIns="0" tIns="0" rIns="0" bIns="0" anchor="t">
+          <a:bodyPr wrap="square" anchor="t" lIns="0" rIns="0" tIns="0" bIns="0">
             <a:spAutoFit/>
           </a:bodyPr>
           <a:lstStyle/>
@@ -10645,33 +10246,267 @@
             <a:r>
               <a:rPr sz="950" b="1">
                 <a:solidFill>
+                  <a:srgbClr val="1B8A5A"/>
+                </a:solidFill>
+                <a:latin typeface="Poppins"/>
+              </a:rPr>
+              <a:t>100%</a:t>
+            </a:r>
+          </a:p>
+        </p:txBody>
+      </p:sp>
+      <p:sp>
+        <p:nvSpPr>
+          <p:cNvPr id="32" name="TextBox 31"/>
+          <p:cNvSpPr txBox="1"/>
+          <p:nvPr/>
+        </p:nvSpPr>
+        <p:spPr>
+          <a:xfrm>
+            <a:off x="6400800" y="2569464"/>
+            <a:ext cx="813816" cy="201168"/>
+          </a:xfrm>
+          <a:prstGeom prst="rect">
+            <a:avLst/>
+          </a:prstGeom>
+          <a:noFill/>
+        </p:spPr>
+        <p:txBody>
+          <a:bodyPr wrap="square" anchor="t" lIns="0" rIns="0" tIns="0" bIns="0">
+            <a:spAutoFit/>
+          </a:bodyPr>
+          <a:lstStyle/>
+          <a:p>
+            <a:pPr algn="l">
+              <a:lnSpc>
+                <a:spcPct val="100000"/>
+              </a:lnSpc>
+            </a:pPr>
+            <a:r>
+              <a:rPr sz="950" b="0">
+                <a:solidFill>
+                  <a:srgbClr val="2B2B2B"/>
+                </a:solidFill>
+                <a:latin typeface="Poppins"/>
+              </a:rPr>
+              <a:t>0</a:t>
+            </a:r>
+          </a:p>
+        </p:txBody>
+      </p:sp>
+      <p:sp>
+        <p:nvSpPr>
+          <p:cNvPr id="33" name="TextBox 32"/>
+          <p:cNvSpPr txBox="1"/>
+          <p:nvPr/>
+        </p:nvSpPr>
+        <p:spPr>
+          <a:xfrm>
+            <a:off x="7360920" y="2569464"/>
+            <a:ext cx="1225296" cy="201168"/>
+          </a:xfrm>
+          <a:prstGeom prst="rect">
+            <a:avLst/>
+          </a:prstGeom>
+          <a:noFill/>
+        </p:spPr>
+        <p:txBody>
+          <a:bodyPr wrap="square" anchor="t" lIns="0" rIns="0" tIns="0" bIns="0">
+            <a:spAutoFit/>
+          </a:bodyPr>
+          <a:lstStyle/>
+          <a:p>
+            <a:pPr algn="l">
+              <a:lnSpc>
+                <a:spcPct val="100000"/>
+              </a:lnSpc>
+            </a:pPr>
+            <a:r>
+              <a:rPr sz="950" b="1">
+                <a:solidFill>
+                  <a:srgbClr val="1B8A5A"/>
+                </a:solidFill>
+                <a:latin typeface="Poppins"/>
+              </a:rPr>
+              <a:t>0.0 s</a:t>
+            </a:r>
+          </a:p>
+        </p:txBody>
+      </p:sp>
+      <p:sp>
+        <p:nvSpPr>
+          <p:cNvPr id="34" name="TextBox 33"/>
+          <p:cNvSpPr txBox="1"/>
+          <p:nvPr/>
+        </p:nvSpPr>
+        <p:spPr>
+          <a:xfrm>
+            <a:off x="594360" y="2843784"/>
+            <a:ext cx="2231136" cy="201168"/>
+          </a:xfrm>
+          <a:prstGeom prst="rect">
+            <a:avLst/>
+          </a:prstGeom>
+          <a:noFill/>
+        </p:spPr>
+        <p:txBody>
+          <a:bodyPr wrap="square" anchor="t" lIns="0" rIns="0" tIns="0" bIns="0">
+            <a:spAutoFit/>
+          </a:bodyPr>
+          <a:lstStyle/>
+          <a:p>
+            <a:pPr algn="l">
+              <a:lnSpc>
+                <a:spcPct val="100000"/>
+              </a:lnSpc>
+            </a:pPr>
+            <a:r>
+              <a:rPr sz="950" b="0">
+                <a:solidFill>
+                  <a:srgbClr val="2B2B2B"/>
+                </a:solidFill>
+                <a:latin typeface="Poppins"/>
+              </a:rPr>
+              <a:t>Control: wrong colour</a:t>
+            </a:r>
+          </a:p>
+        </p:txBody>
+      </p:sp>
+      <p:sp>
+        <p:nvSpPr>
+          <p:cNvPr id="35" name="TextBox 34"/>
+          <p:cNvSpPr txBox="1"/>
+          <p:nvPr/>
+        </p:nvSpPr>
+        <p:spPr>
+          <a:xfrm>
+            <a:off x="2971800" y="2843784"/>
+            <a:ext cx="1042416" cy="201168"/>
+          </a:xfrm>
+          <a:prstGeom prst="rect">
+            <a:avLst/>
+          </a:prstGeom>
+          <a:noFill/>
+        </p:spPr>
+        <p:txBody>
+          <a:bodyPr wrap="square" anchor="t" lIns="0" rIns="0" tIns="0" bIns="0">
+            <a:spAutoFit/>
+          </a:bodyPr>
+          <a:lstStyle/>
+          <a:p>
+            <a:pPr algn="l">
+              <a:lnSpc>
+                <a:spcPct val="100000"/>
+              </a:lnSpc>
+            </a:pPr>
+            <a:r>
+              <a:rPr sz="950" b="1">
+                <a:solidFill>
                   <a:srgbClr val="C0433F"/>
                 </a:solidFill>
                 <a:latin typeface="Poppins"/>
               </a:rPr>
-              <a:t>20.7%</a:t>
-            </a:r>
-          </a:p>
-        </p:txBody>
-      </p:sp>
-      <p:sp>
-        <p:nvSpPr>
-          <p:cNvPr id="32" name="TextBox 31"/>
-          <p:cNvSpPr txBox="1"/>
-          <p:nvPr/>
-        </p:nvSpPr>
-        <p:spPr>
-          <a:xfrm>
-            <a:off x="6400800" y="2569464"/>
-            <a:ext cx="1088136" cy="201168"/>
-          </a:xfrm>
-          <a:prstGeom prst="rect">
-            <a:avLst/>
-          </a:prstGeom>
-          <a:noFill/>
-        </p:spPr>
-        <p:txBody>
-          <a:bodyPr wrap="square" lIns="0" tIns="0" rIns="0" bIns="0" anchor="t">
+              <a:t>22.1%</a:t>
+            </a:r>
+          </a:p>
+        </p:txBody>
+      </p:sp>
+      <p:sp>
+        <p:nvSpPr>
+          <p:cNvPr id="36" name="TextBox 35"/>
+          <p:cNvSpPr txBox="1"/>
+          <p:nvPr/>
+        </p:nvSpPr>
+        <p:spPr>
+          <a:xfrm>
+            <a:off x="4160520" y="2843784"/>
+            <a:ext cx="950976" cy="201168"/>
+          </a:xfrm>
+          <a:prstGeom prst="rect">
+            <a:avLst/>
+          </a:prstGeom>
+          <a:noFill/>
+        </p:spPr>
+        <p:txBody>
+          <a:bodyPr wrap="square" anchor="t" lIns="0" rIns="0" tIns="0" bIns="0">
+            <a:spAutoFit/>
+          </a:bodyPr>
+          <a:lstStyle/>
+          <a:p>
+            <a:pPr algn="l">
+              <a:lnSpc>
+                <a:spcPct val="100000"/>
+              </a:lnSpc>
+            </a:pPr>
+            <a:r>
+              <a:rPr sz="950" b="1">
+                <a:solidFill>
+                  <a:srgbClr val="C0433F"/>
+                </a:solidFill>
+                <a:latin typeface="Poppins"/>
+              </a:rPr>
+              <a:t>71.8 m</a:t>
+            </a:r>
+          </a:p>
+        </p:txBody>
+      </p:sp>
+      <p:sp>
+        <p:nvSpPr>
+          <p:cNvPr id="37" name="TextBox 36"/>
+          <p:cNvSpPr txBox="1"/>
+          <p:nvPr/>
+        </p:nvSpPr>
+        <p:spPr>
+          <a:xfrm>
+            <a:off x="5257800" y="2843784"/>
+            <a:ext cx="996696" cy="201168"/>
+          </a:xfrm>
+          <a:prstGeom prst="rect">
+            <a:avLst/>
+          </a:prstGeom>
+          <a:noFill/>
+        </p:spPr>
+        <p:txBody>
+          <a:bodyPr wrap="square" anchor="t" lIns="0" rIns="0" tIns="0" bIns="0">
+            <a:spAutoFit/>
+          </a:bodyPr>
+          <a:lstStyle/>
+          <a:p>
+            <a:pPr algn="l">
+              <a:lnSpc>
+                <a:spcPct val="100000"/>
+              </a:lnSpc>
+            </a:pPr>
+            <a:r>
+              <a:rPr sz="950" b="1">
+                <a:solidFill>
+                  <a:srgbClr val="C0433F"/>
+                </a:solidFill>
+                <a:latin typeface="Poppins"/>
+              </a:rPr>
+              <a:t>24.1%</a:t>
+            </a:r>
+          </a:p>
+        </p:txBody>
+      </p:sp>
+      <p:sp>
+        <p:nvSpPr>
+          <p:cNvPr id="38" name="TextBox 37"/>
+          <p:cNvSpPr txBox="1"/>
+          <p:nvPr/>
+        </p:nvSpPr>
+        <p:spPr>
+          <a:xfrm>
+            <a:off x="6400800" y="2843784"/>
+            <a:ext cx="813816" cy="201168"/>
+          </a:xfrm>
+          <a:prstGeom prst="rect">
+            <a:avLst/>
+          </a:prstGeom>
+          <a:noFill/>
+        </p:spPr>
+        <p:txBody>
+          <a:bodyPr wrap="square" anchor="t" lIns="0" rIns="0" tIns="0" bIns="0">
             <a:spAutoFit/>
           </a:bodyPr>
           <a:lstStyle/>
@@ -10688,20 +10523,181 @@
                 </a:solidFill>
                 <a:latin typeface="Poppins"/>
               </a:rPr>
-              <a:t>27</a:t>
-            </a:r>
-          </a:p>
-        </p:txBody>
-      </p:sp>
-      <p:sp>
-        <p:nvSpPr>
-          <p:cNvPr id="33" name="TextBox 32"/>
-          <p:cNvSpPr txBox="1"/>
-          <p:nvPr/>
-        </p:nvSpPr>
-        <p:spPr>
-          <a:xfrm>
-            <a:off x="7635240" y="2569464"/>
+              <a:t>10</a:t>
+            </a:r>
+          </a:p>
+        </p:txBody>
+      </p:sp>
+      <p:sp>
+        <p:nvSpPr>
+          <p:cNvPr id="39" name="TextBox 38"/>
+          <p:cNvSpPr txBox="1"/>
+          <p:nvPr/>
+        </p:nvSpPr>
+        <p:spPr>
+          <a:xfrm>
+            <a:off x="7360920" y="2843784"/>
+            <a:ext cx="1225296" cy="201168"/>
+          </a:xfrm>
+          <a:prstGeom prst="rect">
+            <a:avLst/>
+          </a:prstGeom>
+          <a:noFill/>
+        </p:spPr>
+        <p:txBody>
+          <a:bodyPr wrap="square" anchor="t" lIns="0" rIns="0" tIns="0" bIns="0">
+            <a:spAutoFit/>
+          </a:bodyPr>
+          <a:lstStyle/>
+          <a:p>
+            <a:pPr algn="l">
+              <a:lnSpc>
+                <a:spcPct val="100000"/>
+              </a:lnSpc>
+            </a:pPr>
+            <a:r>
+              <a:rPr sz="950" b="0">
+                <a:solidFill>
+                  <a:srgbClr val="2B2B2B"/>
+                </a:solidFill>
+                <a:latin typeface="Poppins"/>
+              </a:rPr>
+              <a:t>0.0 s</a:t>
+            </a:r>
+          </a:p>
+        </p:txBody>
+      </p:sp>
+      <p:sp>
+        <p:nvSpPr>
+          <p:cNvPr id="40" name="Rectangle 39"/>
+          <p:cNvSpPr/>
+          <p:nvPr/>
+        </p:nvSpPr>
+        <p:spPr>
+          <a:xfrm>
+            <a:off x="502920" y="3063239"/>
+            <a:ext cx="8138160" cy="274320"/>
+          </a:xfrm>
+          <a:prstGeom prst="rect">
+            <a:avLst/>
+          </a:prstGeom>
+          <a:solidFill>
+            <a:srgbClr val="F4F7F9"/>
+          </a:solidFill>
+          <a:ln>
+            <a:noFill/>
+          </a:ln>
+          <a:effectLst/>
+        </p:spPr>
+        <p:style>
+          <a:lnRef idx="1">
+            <a:schemeClr val="accent1"/>
+          </a:lnRef>
+          <a:fillRef idx="3">
+            <a:schemeClr val="accent1"/>
+          </a:fillRef>
+          <a:effectRef idx="2">
+            <a:schemeClr val="accent1"/>
+          </a:effectRef>
+          <a:fontRef idx="minor">
+            <a:schemeClr val="lt1"/>
+          </a:fontRef>
+        </p:style>
+        <p:txBody>
+          <a:bodyPr rtlCol="0" anchor="ctr"/>
+          <a:lstStyle/>
+          <a:p>
+            <a:pPr algn="ctr"/>
+          </a:p>
+        </p:txBody>
+      </p:sp>
+      <p:sp>
+        <p:nvSpPr>
+          <p:cNvPr id="41" name="TextBox 40"/>
+          <p:cNvSpPr txBox="1"/>
+          <p:nvPr/>
+        </p:nvSpPr>
+        <p:spPr>
+          <a:xfrm>
+            <a:off x="594360" y="3118103"/>
+            <a:ext cx="2231136" cy="201168"/>
+          </a:xfrm>
+          <a:prstGeom prst="rect">
+            <a:avLst/>
+          </a:prstGeom>
+          <a:noFill/>
+        </p:spPr>
+        <p:txBody>
+          <a:bodyPr wrap="square" anchor="t" lIns="0" rIns="0" tIns="0" bIns="0">
+            <a:spAutoFit/>
+          </a:bodyPr>
+          <a:lstStyle/>
+          <a:p>
+            <a:pPr algn="l">
+              <a:lnSpc>
+                <a:spcPct val="100000"/>
+              </a:lnSpc>
+            </a:pPr>
+            <a:r>
+              <a:rPr sz="950" b="0">
+                <a:solidFill>
+                  <a:srgbClr val="2B2B2B"/>
+                </a:solidFill>
+                <a:latin typeface="Poppins"/>
+              </a:rPr>
+              <a:t>No-fly zone across road</a:t>
+            </a:r>
+          </a:p>
+        </p:txBody>
+      </p:sp>
+      <p:sp>
+        <p:nvSpPr>
+          <p:cNvPr id="42" name="TextBox 41"/>
+          <p:cNvSpPr txBox="1"/>
+          <p:nvPr/>
+        </p:nvSpPr>
+        <p:spPr>
+          <a:xfrm>
+            <a:off x="2971800" y="3118103"/>
+            <a:ext cx="1042416" cy="201168"/>
+          </a:xfrm>
+          <a:prstGeom prst="rect">
+            <a:avLst/>
+          </a:prstGeom>
+          <a:noFill/>
+        </p:spPr>
+        <p:txBody>
+          <a:bodyPr wrap="square" anchor="t" lIns="0" rIns="0" tIns="0" bIns="0">
+            <a:spAutoFit/>
+          </a:bodyPr>
+          <a:lstStyle/>
+          <a:p>
+            <a:pPr algn="l">
+              <a:lnSpc>
+                <a:spcPct val="100000"/>
+              </a:lnSpc>
+            </a:pPr>
+            <a:r>
+              <a:rPr sz="950" b="0">
+                <a:solidFill>
+                  <a:srgbClr val="2B2B2B"/>
+                </a:solidFill>
+                <a:latin typeface="Poppins"/>
+              </a:rPr>
+              <a:t>100%</a:t>
+            </a:r>
+          </a:p>
+        </p:txBody>
+      </p:sp>
+      <p:sp>
+        <p:nvSpPr>
+          <p:cNvPr id="43" name="TextBox 42"/>
+          <p:cNvSpPr txBox="1"/>
+          <p:nvPr/>
+        </p:nvSpPr>
+        <p:spPr>
+          <a:xfrm>
+            <a:off x="4160520" y="3118103"/>
             <a:ext cx="950976" cy="201168"/>
           </a:xfrm>
           <a:prstGeom prst="rect">
@@ -10710,7 +10706,7 @@
           <a:noFill/>
         </p:spPr>
         <p:txBody>
-          <a:bodyPr wrap="square" lIns="0" tIns="0" rIns="0" bIns="0" anchor="t">
+          <a:bodyPr wrap="square" anchor="t" lIns="0" rIns="0" tIns="0" bIns="0">
             <a:spAutoFit/>
           </a:bodyPr>
           <a:lstStyle/>
@@ -10727,6 +10723,123 @@
                 </a:solidFill>
                 <a:latin typeface="Poppins"/>
               </a:rPr>
+              <a:t>38.8 m</a:t>
+            </a:r>
+          </a:p>
+        </p:txBody>
+      </p:sp>
+      <p:sp>
+        <p:nvSpPr>
+          <p:cNvPr id="44" name="TextBox 43"/>
+          <p:cNvSpPr txBox="1"/>
+          <p:nvPr/>
+        </p:nvSpPr>
+        <p:spPr>
+          <a:xfrm>
+            <a:off x="5257800" y="3118103"/>
+            <a:ext cx="996696" cy="201168"/>
+          </a:xfrm>
+          <a:prstGeom prst="rect">
+            <a:avLst/>
+          </a:prstGeom>
+          <a:noFill/>
+        </p:spPr>
+        <p:txBody>
+          <a:bodyPr wrap="square" anchor="t" lIns="0" rIns="0" tIns="0" bIns="0">
+            <a:spAutoFit/>
+          </a:bodyPr>
+          <a:lstStyle/>
+          <a:p>
+            <a:pPr algn="l">
+              <a:lnSpc>
+                <a:spcPct val="100000"/>
+              </a:lnSpc>
+            </a:pPr>
+            <a:r>
+              <a:rPr sz="950" b="0">
+                <a:solidFill>
+                  <a:srgbClr val="2B2B2B"/>
+                </a:solidFill>
+                <a:latin typeface="Poppins"/>
+              </a:rPr>
+              <a:t>34.9%</a:t>
+            </a:r>
+          </a:p>
+        </p:txBody>
+      </p:sp>
+      <p:sp>
+        <p:nvSpPr>
+          <p:cNvPr id="45" name="TextBox 44"/>
+          <p:cNvSpPr txBox="1"/>
+          <p:nvPr/>
+        </p:nvSpPr>
+        <p:spPr>
+          <a:xfrm>
+            <a:off x="6400800" y="3118103"/>
+            <a:ext cx="813816" cy="201168"/>
+          </a:xfrm>
+          <a:prstGeom prst="rect">
+            <a:avLst/>
+          </a:prstGeom>
+          <a:noFill/>
+        </p:spPr>
+        <p:txBody>
+          <a:bodyPr wrap="square" anchor="t" lIns="0" rIns="0" tIns="0" bIns="0">
+            <a:spAutoFit/>
+          </a:bodyPr>
+          <a:lstStyle/>
+          <a:p>
+            <a:pPr algn="l">
+              <a:lnSpc>
+                <a:spcPct val="100000"/>
+              </a:lnSpc>
+            </a:pPr>
+            <a:r>
+              <a:rPr sz="950" b="1">
+                <a:solidFill>
+                  <a:srgbClr val="249DB2"/>
+                </a:solidFill>
+                <a:latin typeface="Poppins"/>
+              </a:rPr>
+              <a:t>0</a:t>
+            </a:r>
+          </a:p>
+        </p:txBody>
+      </p:sp>
+      <p:sp>
+        <p:nvSpPr>
+          <p:cNvPr id="46" name="TextBox 45"/>
+          <p:cNvSpPr txBox="1"/>
+          <p:nvPr/>
+        </p:nvSpPr>
+        <p:spPr>
+          <a:xfrm>
+            <a:off x="7360920" y="3118103"/>
+            <a:ext cx="1225296" cy="201168"/>
+          </a:xfrm>
+          <a:prstGeom prst="rect">
+            <a:avLst/>
+          </a:prstGeom>
+          <a:noFill/>
+        </p:spPr>
+        <p:txBody>
+          <a:bodyPr wrap="square" anchor="t" lIns="0" rIns="0" tIns="0" bIns="0">
+            <a:spAutoFit/>
+          </a:bodyPr>
+          <a:lstStyle/>
+          <a:p>
+            <a:pPr algn="l">
+              <a:lnSpc>
+                <a:spcPct val="100000"/>
+              </a:lnSpc>
+            </a:pPr>
+            <a:r>
+              <a:rPr sz="950" b="1">
+                <a:solidFill>
+                  <a:srgbClr val="1B8A5A"/>
+                </a:solidFill>
+                <a:latin typeface="Poppins"/>
+              </a:rPr>
               <a:t>0.0 s</a:t>
             </a:r>
           </a:p>
@@ -10734,22 +10847,22 @@
       </p:sp>
       <p:sp>
         <p:nvSpPr>
-          <p:cNvPr id="34" name="TextBox 33"/>
-          <p:cNvSpPr txBox="1"/>
-          <p:nvPr/>
-        </p:nvSpPr>
-        <p:spPr>
-          <a:xfrm>
-            <a:off x="502920" y="2926080"/>
-            <a:ext cx="8138160" cy="1143000"/>
-          </a:xfrm>
-          <a:prstGeom prst="rect">
-            <a:avLst/>
-          </a:prstGeom>
-          <a:noFill/>
-        </p:spPr>
-        <p:txBody>
-          <a:bodyPr wrap="square" lIns="0" tIns="0" rIns="0" bIns="0" anchor="t">
+          <p:cNvPr id="47" name="TextBox 46"/>
+          <p:cNvSpPr txBox="1"/>
+          <p:nvPr/>
+        </p:nvSpPr>
+        <p:spPr>
+          <a:xfrm>
+            <a:off x="502920" y="3264408"/>
+            <a:ext cx="8138160" cy="914400"/>
+          </a:xfrm>
+          <a:prstGeom prst="rect">
+            <a:avLst/>
+          </a:prstGeom>
+          <a:noFill/>
+        </p:spPr>
+        <p:txBody>
+          <a:bodyPr wrap="square" anchor="t" lIns="0" rIns="0" tIns="0" bIns="0">
             <a:spAutoFit/>
           </a:bodyPr>
           <a:lstStyle/>
@@ -10766,7 +10879,7 @@
                 </a:solidFill>
                 <a:latin typeface="Poppins"/>
               </a:rPr>
-              <a:t>Row 1: the drone stops when the car stops — 1.17 m/s while the car moves against 0.36 m/s while it is</a:t>
+              <a:t>Rows 1 and 2 are the same flight twice — both 100%. Row 3 is the harder task: three MORE cars, same</a:t>
             </a:r>
           </a:p>
           <a:p>
@@ -10782,7 +10895,7 @@
                 </a:solidFill>
                 <a:latin typeface="Poppins"/>
               </a:rPr>
-              <a:t>parked, correlation +0.55. A follower has to stop, so this is the evidence that it tracks the car</a:t>
+              <a:t>mesh, only colour differs, so the noun cannot separate them and only the colour test can. Still 100%.</a:t>
             </a:r>
           </a:p>
           <a:p>
@@ -10798,7 +10911,7 @@
                 </a:solidFill>
                 <a:latin typeface="Poppins"/>
               </a:rPr>
-              <a:t>rather than just flying down the same street.</a:t>
+              <a:t>Row 5 is a deliberate failure — the fence spans the whole road, so the car escapes and tracking must</a:t>
             </a:r>
           </a:p>
           <a:p>
@@ -10814,39 +10927,7 @@
                 </a:solidFill>
                 <a:latin typeface="Poppins"/>
               </a:rPr>
-              <a:t>Row 2 is a deliberate failure: the fence has no way round, so the car escapes and tracking collapses</a:t>
-            </a:r>
-          </a:p>
-          <a:p>
-            <a:pPr algn="l">
-              <a:lnSpc>
-                <a:spcPct val="100000"/>
-              </a:lnSpc>
-            </a:pPr>
-            <a:r>
-              <a:rPr sz="1000" b="0">
-                <a:solidFill>
-                  <a:srgbClr val="6B7280"/>
-                </a:solidFill>
-                <a:latin typeface="Poppins"/>
-              </a:rPr>
-              <a:t>to 28.6% — with zero Shield overrides, because the controller now stops itself, and the zone still</a:t>
-            </a:r>
-          </a:p>
-          <a:p>
-            <a:pPr algn="l">
-              <a:lnSpc>
-                <a:spcPct val="100000"/>
-              </a:lnSpc>
-            </a:pPr>
-            <a:r>
-              <a:rPr sz="1000" b="0">
-                <a:solidFill>
-                  <a:srgbClr val="6B7280"/>
-                </a:solidFill>
-                <a:latin typeface="Poppins"/>
-              </a:rPr>
-              <a:t>never entered.</a:t>
+              <a:t>collapse. Zero Shield overrides, because the controller stops itself.</a:t>
             </a:r>
           </a:p>
         </p:txBody>
@@ -10860,7 +10941,7 @@
 </file>
 
 <file path=ppt/slides/slide7.xml><?xml version="1.0" encoding="utf-8"?>
-<p:sld xmlns:a="http://schemas.openxmlformats.org/drawingml/2006/main" xmlns:r="http://schemas.openxmlformats.org/officeDocument/2006/relationships" xmlns:p="http://schemas.openxmlformats.org/presentationml/2006/main">
+<p:sld xmlns:a="http://schemas.openxmlformats.org/drawingml/2006/main" xmlns:p="http://schemas.openxmlformats.org/presentationml/2006/main" xmlns:r="http://schemas.openxmlformats.org/officeDocument/2006/relationships">
   <p:cSld>
     <p:bg>
       <p:bgPr>
@@ -10876,14 +10957,7 @@
         <p:cNvGrpSpPr/>
         <p:nvPr/>
       </p:nvGrpSpPr>
-      <p:grpSpPr>
-        <a:xfrm>
-          <a:off x="0" y="0"/>
-          <a:ext cx="0" cy="0"/>
-          <a:chOff x="0" y="0"/>
-          <a:chExt cx="0" cy="0"/>
-        </a:xfrm>
-      </p:grpSpPr>
+      <p:grpSpPr/>
       <p:sp>
         <p:nvSpPr>
           <p:cNvPr id="2" name="TextBox 1"/>
@@ -10901,7 +10975,7 @@
           <a:noFill/>
         </p:spPr>
         <p:txBody>
-          <a:bodyPr wrap="square" lIns="0" tIns="0" rIns="0" bIns="0" anchor="t">
+          <a:bodyPr wrap="square" anchor="t" lIns="0" rIns="0" tIns="0" bIns="0">
             <a:spAutoFit/>
           </a:bodyPr>
           <a:lstStyle/>
@@ -10932,15 +11006,15 @@
         <p:spPr>
           <a:xfrm>
             <a:off x="502920" y="658368"/>
-            <a:ext cx="8138160" cy="365485"/>
-          </a:xfrm>
-          <a:prstGeom prst="rect">
-            <a:avLst/>
-          </a:prstGeom>
-          <a:noFill/>
-        </p:spPr>
-        <p:txBody>
-          <a:bodyPr wrap="square" lIns="0" tIns="0" rIns="0" bIns="0" anchor="t">
+            <a:ext cx="8138160" cy="566928"/>
+          </a:xfrm>
+          <a:prstGeom prst="rect">
+            <a:avLst/>
+          </a:prstGeom>
+          <a:noFill/>
+        </p:spPr>
+        <p:txBody>
+          <a:bodyPr wrap="square" anchor="t" lIns="0" rIns="0" tIns="0" bIns="0">
             <a:spAutoFit/>
           </a:bodyPr>
           <a:lstStyle/>
@@ -10951,20 +11025,14 @@
               </a:lnSpc>
             </a:pPr>
             <a:r>
-              <a:rPr lang="en-US" sz="2500" b="1" dirty="0">
+              <a:rPr sz="2500" b="1">
                 <a:solidFill>
                   <a:srgbClr val="1A1A1A"/>
                 </a:solidFill>
                 <a:latin typeface="Poppins"/>
               </a:rPr>
-              <a:t>Use language as control</a:t>
-            </a:r>
-            <a:endParaRPr sz="2500" b="1" dirty="0">
-              <a:solidFill>
-                <a:srgbClr val="1A1A1A"/>
-              </a:solidFill>
-              <a:latin typeface="Poppins"/>
-            </a:endParaRPr>
+              <a:t>One word decides whether it follows.</a:t>
+            </a:r>
           </a:p>
         </p:txBody>
       </p:sp>
@@ -10985,7 +11053,7 @@
           <a:noFill/>
         </p:spPr>
         <p:txBody>
-          <a:bodyPr wrap="square" lIns="0" tIns="0" rIns="0" bIns="0" anchor="t">
+          <a:bodyPr wrap="square" anchor="t" lIns="0" rIns="0" tIns="0" bIns="0">
             <a:spAutoFit/>
           </a:bodyPr>
           <a:lstStyle/>
@@ -11002,7 +11070,7 @@
                 </a:solidFill>
                 <a:latin typeface="Poppins"/>
               </a:rPr>
-              <a:t>Identical scene, identical orange car, identical settings.</a:t>
+              <a:t>Identical scene, identical white car, identical settings.</a:t>
             </a:r>
           </a:p>
         </p:txBody>
@@ -11048,7 +11116,6 @@
           <a:lstStyle/>
           <a:p>
             <a:pPr algn="ctr"/>
-            <a:endParaRPr/>
           </a:p>
         </p:txBody>
       </p:sp>
@@ -11069,7 +11136,7 @@
           <a:noFill/>
         </p:spPr>
         <p:txBody>
-          <a:bodyPr wrap="square" lIns="0" tIns="0" rIns="0" bIns="0" anchor="t">
+          <a:bodyPr wrap="square" anchor="t" lIns="0" rIns="0" tIns="0" bIns="0">
             <a:spAutoFit/>
           </a:bodyPr>
           <a:lstStyle/>
@@ -11132,7 +11199,6 @@
           <a:lstStyle/>
           <a:p>
             <a:pPr algn="ctr"/>
-            <a:endParaRPr/>
           </a:p>
         </p:txBody>
       </p:sp>
@@ -11153,7 +11219,7 @@
           <a:noFill/>
         </p:spPr>
         <p:txBody>
-          <a:bodyPr wrap="square" lIns="0" tIns="0" rIns="0" bIns="0" anchor="t">
+          <a:bodyPr wrap="square" anchor="t" lIns="0" rIns="0" tIns="0" bIns="0">
             <a:spAutoFit/>
           </a:bodyPr>
           <a:lstStyle/>
@@ -11170,7 +11236,7 @@
                 </a:solidFill>
                 <a:latin typeface="Poppins"/>
               </a:rPr>
-              <a:t>"an orange car"</a:t>
+              <a:t>"a white car"</a:t>
             </a:r>
           </a:p>
         </p:txBody>
@@ -11192,7 +11258,7 @@
           <a:noFill/>
         </p:spPr>
         <p:txBody>
-          <a:bodyPr wrap="square" lIns="0" tIns="0" rIns="0" bIns="0" anchor="t">
+          <a:bodyPr wrap="square" anchor="t" lIns="0" rIns="0" tIns="0" bIns="0">
             <a:spAutoFit/>
           </a:bodyPr>
           <a:lstStyle/>
@@ -11225,7 +11291,7 @@
                 </a:solidFill>
                 <a:latin typeface="Poppins"/>
               </a:rPr>
-              <a:t>mean separation 15.6 m</a:t>
+              <a:t>detector hit rate 99.3%</a:t>
             </a:r>
           </a:p>
         </p:txBody>
@@ -11271,7 +11337,6 @@
           <a:lstStyle/>
           <a:p>
             <a:pPr algn="ctr"/>
-            <a:endParaRPr/>
           </a:p>
         </p:txBody>
       </p:sp>
@@ -11292,7 +11357,7 @@
           <a:noFill/>
         </p:spPr>
         <p:txBody>
-          <a:bodyPr wrap="square" lIns="0" tIns="0" rIns="0" bIns="0" anchor="t">
+          <a:bodyPr wrap="square" anchor="t" lIns="0" rIns="0" tIns="0" bIns="0">
             <a:spAutoFit/>
           </a:bodyPr>
           <a:lstStyle/>
@@ -11309,7 +11374,7 @@
                 </a:solidFill>
                 <a:latin typeface="Poppins"/>
               </a:rPr>
-              <a:t>"a blue car"</a:t>
+              <a:t>"a red car"</a:t>
             </a:r>
           </a:p>
         </p:txBody>
@@ -11331,7 +11396,7 @@
           <a:noFill/>
         </p:spPr>
         <p:txBody>
-          <a:bodyPr wrap="square" lIns="0" tIns="0" rIns="0" bIns="0" anchor="t">
+          <a:bodyPr wrap="square" anchor="t" lIns="0" rIns="0" tIns="0" bIns="0">
             <a:spAutoFit/>
           </a:bodyPr>
           <a:lstStyle/>
@@ -11348,7 +11413,7 @@
                 </a:solidFill>
                 <a:latin typeface="Poppins"/>
               </a:rPr>
-              <a:t>20.7% within 30 m</a:t>
+              <a:t>24.1% within 30 m</a:t>
             </a:r>
           </a:p>
           <a:p>
@@ -11364,7 +11429,7 @@
                 </a:solidFill>
                 <a:latin typeface="Poppins"/>
               </a:rPr>
-              <a:t>mean separation 68.5 m</a:t>
+              <a:t>detector hit rate 22.1%</a:t>
             </a:r>
           </a:p>
         </p:txBody>
@@ -11378,15 +11443,15 @@
         <p:spPr>
           <a:xfrm>
             <a:off x="502920" y="3566160"/>
-            <a:ext cx="8138160" cy="731520"/>
-          </a:xfrm>
-          <a:prstGeom prst="rect">
-            <a:avLst/>
-          </a:prstGeom>
-          <a:noFill/>
-        </p:spPr>
-        <p:txBody>
-          <a:bodyPr wrap="square" lIns="0" tIns="0" rIns="0" bIns="0" anchor="t">
+            <a:ext cx="8138160" cy="777240"/>
+          </a:xfrm>
+          <a:prstGeom prst="rect">
+            <a:avLst/>
+          </a:prstGeom>
+          <a:noFill/>
+        </p:spPr>
+        <p:txBody>
+          <a:bodyPr wrap="square" anchor="t" lIns="0" rIns="0" tIns="0" bIns="0">
             <a:spAutoFit/>
           </a:bodyPr>
           <a:lstStyle/>
@@ -11403,7 +11468,7 @@
                 </a:solidFill>
                 <a:latin typeface="Poppins"/>
               </a:rPr>
-              <a:t>This is the control that matters. Without it, "the drone ended up near the car" could just be drift.</a:t>
+              <a:t>It does not follow badly — it FAILS TO ACQUIRE. The hit rate collapses from 99.3% to 22.1%, because</a:t>
             </a:r>
           </a:p>
           <a:p>
@@ -11419,7 +11484,7 @@
                 </a:solidFill>
                 <a:latin typeface="Poppins"/>
               </a:rPr>
-              <a:t>The colour word is verified against the pixels in the box — the detector grounds the noun,</a:t>
+              <a:t>the colour gate rejects nearly every candidate outright. The detector grounds the noun; a fixed HSV</a:t>
             </a:r>
           </a:p>
           <a:p>
@@ -11435,7 +11500,7 @@
                 </a:solidFill>
                 <a:latin typeface="Poppins"/>
               </a:rPr>
-              <a:t>an HSV check grounds the adjective.</a:t>
+              <a:t>rule grounds the adjective. Two different mechanisms, and we say so rather than blur them.</a:t>
             </a:r>
           </a:p>
         </p:txBody>
@@ -11449,7 +11514,7 @@
 </file>
 
 <file path=ppt/slides/slide8.xml><?xml version="1.0" encoding="utf-8"?>
-<p:sld xmlns:a="http://schemas.openxmlformats.org/drawingml/2006/main" xmlns:r="http://schemas.openxmlformats.org/officeDocument/2006/relationships" xmlns:p="http://schemas.openxmlformats.org/presentationml/2006/main">
+<p:sld xmlns:a="http://schemas.openxmlformats.org/drawingml/2006/main" xmlns:p="http://schemas.openxmlformats.org/presentationml/2006/main" xmlns:r="http://schemas.openxmlformats.org/officeDocument/2006/relationships">
   <p:cSld>
     <p:bg>
       <p:bgPr>
@@ -11465,14 +11530,7 @@
         <p:cNvGrpSpPr/>
         <p:nvPr/>
       </p:nvGrpSpPr>
-      <p:grpSpPr>
-        <a:xfrm>
-          <a:off x="0" y="0"/>
-          <a:ext cx="0" cy="0"/>
-          <a:chOff x="0" y="0"/>
-          <a:chExt cx="0" cy="0"/>
-        </a:xfrm>
-      </p:grpSpPr>
+      <p:grpSpPr/>
       <p:sp>
         <p:nvSpPr>
           <p:cNvPr id="2" name="TextBox 1"/>
@@ -11490,7 +11548,7 @@
           <a:noFill/>
         </p:spPr>
         <p:txBody>
-          <a:bodyPr wrap="square" lIns="0" tIns="0" rIns="0" bIns="0" anchor="t">
+          <a:bodyPr wrap="square" anchor="t" lIns="0" rIns="0" tIns="0" bIns="0">
             <a:spAutoFit/>
           </a:bodyPr>
           <a:lstStyle/>
@@ -11521,15 +11579,15 @@
         <p:spPr>
           <a:xfrm>
             <a:off x="502920" y="658368"/>
-            <a:ext cx="8138160" cy="365485"/>
-          </a:xfrm>
-          <a:prstGeom prst="rect">
-            <a:avLst/>
-          </a:prstGeom>
-          <a:noFill/>
-        </p:spPr>
-        <p:txBody>
-          <a:bodyPr wrap="square" lIns="0" tIns="0" rIns="0" bIns="0" anchor="t">
+            <a:ext cx="8138160" cy="566928"/>
+          </a:xfrm>
+          <a:prstGeom prst="rect">
+            <a:avLst/>
+          </a:prstGeom>
+          <a:noFill/>
+        </p:spPr>
+        <p:txBody>
+          <a:bodyPr wrap="square" anchor="t" lIns="0" rIns="0" tIns="0" bIns="0">
             <a:spAutoFit/>
           </a:bodyPr>
           <a:lstStyle/>
@@ -11540,20 +11598,14 @@
               </a:lnSpc>
             </a:pPr>
             <a:r>
-              <a:rPr lang="en-US" sz="2500" b="1" dirty="0">
+              <a:rPr sz="2500" b="1">
                 <a:solidFill>
                   <a:srgbClr val="1A1A1A"/>
                 </a:solidFill>
                 <a:latin typeface="Poppins"/>
               </a:rPr>
-              <a:t>Guardrail safety</a:t>
-            </a:r>
-            <a:endParaRPr sz="2500" b="1" dirty="0">
-              <a:solidFill>
-                <a:srgbClr val="1A1A1A"/>
-              </a:solidFill>
-              <a:latin typeface="Poppins"/>
-            </a:endParaRPr>
+              <a:t>The guardrail never changed — and it caught a real one.</a:t>
+            </a:r>
           </a:p>
         </p:txBody>
       </p:sp>
@@ -11574,7 +11626,7 @@
           <a:noFill/>
         </p:spPr>
         <p:txBody>
-          <a:bodyPr wrap="square" lIns="0" tIns="0" rIns="0" bIns="0" anchor="t">
+          <a:bodyPr wrap="square" anchor="t" lIns="0" rIns="0" tIns="0" bIns="0">
             <a:spAutoFit/>
           </a:bodyPr>
           <a:lstStyle/>
@@ -11591,7 +11643,7 @@
                 </a:solidFill>
                 <a:latin typeface="Poppins"/>
               </a:rPr>
-              <a:t>The no-fly-zone flight, before and after the controller learned about fences.</a:t>
+              <a:t>Not one line of shield.py or any policy was edited for any of this work.</a:t>
             </a:r>
           </a:p>
         </p:txBody>
@@ -11637,7 +11689,6 @@
           <a:lstStyle/>
           <a:p>
             <a:pPr algn="ctr"/>
-            <a:endParaRPr/>
           </a:p>
         </p:txBody>
       </p:sp>
@@ -11658,7 +11709,7 @@
           <a:noFill/>
         </p:spPr>
         <p:txBody>
-          <a:bodyPr wrap="square" lIns="0" tIns="0" rIns="0" bIns="0" anchor="t">
+          <a:bodyPr wrap="square" anchor="t" lIns="0" rIns="0" tIns="0" bIns="0">
             <a:spAutoFit/>
           </a:bodyPr>
           <a:lstStyle/>
@@ -11721,7 +11772,6 @@
           <a:lstStyle/>
           <a:p>
             <a:pPr algn="ctr"/>
-            <a:endParaRPr/>
           </a:p>
         </p:txBody>
       </p:sp>
@@ -11742,7 +11792,7 @@
           <a:noFill/>
         </p:spPr>
         <p:txBody>
-          <a:bodyPr wrap="square" lIns="0" tIns="0" rIns="0" bIns="0" anchor="t">
+          <a:bodyPr wrap="square" anchor="t" lIns="0" rIns="0" tIns="0" bIns="0">
             <a:spAutoFit/>
           </a:bodyPr>
           <a:lstStyle/>
@@ -11759,7 +11809,7 @@
                 </a:solidFill>
                 <a:latin typeface="Poppins"/>
               </a:rPr>
-              <a:t>659 → 0</a:t>
+              <a:t>0.0 s</a:t>
             </a:r>
           </a:p>
         </p:txBody>
@@ -11781,7 +11831,7 @@
           <a:noFill/>
         </p:spPr>
         <p:txBody>
-          <a:bodyPr wrap="square" lIns="0" tIns="0" rIns="0" bIns="0" anchor="t">
+          <a:bodyPr wrap="square" anchor="t" lIns="0" rIns="0" tIns="0" bIns="0">
             <a:spAutoFit/>
           </a:bodyPr>
           <a:lstStyle/>
@@ -11798,7 +11848,7 @@
                 </a:solidFill>
                 <a:latin typeface="Poppins"/>
               </a:rPr>
-              <a:t>Shield overrides, after the fix</a:t>
+              <a:t>in the zone, every flight ever</a:t>
             </a:r>
           </a:p>
         </p:txBody>
@@ -11844,7 +11894,6 @@
           <a:lstStyle/>
           <a:p>
             <a:pPr algn="ctr"/>
-            <a:endParaRPr/>
           </a:p>
         </p:txBody>
       </p:sp>
@@ -11865,7 +11914,7 @@
           <a:noFill/>
         </p:spPr>
         <p:txBody>
-          <a:bodyPr wrap="square" lIns="0" tIns="0" rIns="0" bIns="0" anchor="t">
+          <a:bodyPr wrap="square" anchor="t" lIns="0" rIns="0" tIns="0" bIns="0">
             <a:spAutoFit/>
           </a:bodyPr>
           <a:lstStyle/>
@@ -11882,7 +11931,7 @@
                 </a:solidFill>
                 <a:latin typeface="Poppins"/>
               </a:rPr>
-              <a:t>3.00 m</a:t>
+              <a:t>659 -&gt; 0</a:t>
             </a:r>
           </a:p>
         </p:txBody>
@@ -11904,7 +11953,7 @@
           <a:noFill/>
         </p:spPr>
         <p:txBody>
-          <a:bodyPr wrap="square" lIns="0" tIns="0" rIns="0" bIns="0" anchor="t">
+          <a:bodyPr wrap="square" anchor="t" lIns="0" rIns="0" tIns="0" bIns="0">
             <a:spAutoFit/>
           </a:bodyPr>
           <a:lstStyle/>
@@ -11921,7 +11970,7 @@
                 </a:solidFill>
                 <a:latin typeface="Poppins"/>
               </a:rPr>
-              <a:t>closest approach; stand-off is 3 m</a:t>
+              <a:t>Shield overrides, after the fix</a:t>
             </a:r>
           </a:p>
         </p:txBody>
@@ -11967,7 +12016,6 @@
           <a:lstStyle/>
           <a:p>
             <a:pPr algn="ctr"/>
-            <a:endParaRPr/>
           </a:p>
         </p:txBody>
       </p:sp>
@@ -11988,7 +12036,7 @@
           <a:noFill/>
         </p:spPr>
         <p:txBody>
-          <a:bodyPr wrap="square" lIns="0" tIns="0" rIns="0" bIns="0" anchor="t">
+          <a:bodyPr wrap="square" anchor="t" lIns="0" rIns="0" tIns="0" bIns="0">
             <a:spAutoFit/>
           </a:bodyPr>
           <a:lstStyle/>
@@ -12001,11 +12049,11 @@
             <a:r>
               <a:rPr sz="2100" b="1">
                 <a:solidFill>
-                  <a:srgbClr val="1B8A5A"/>
-                </a:solidFill>
-                <a:latin typeface="Poppins"/>
-              </a:rPr>
-              <a:t>0.0 s</a:t>
+                  <a:srgbClr val="C0433F"/>
+                </a:solidFill>
+                <a:latin typeface="Poppins"/>
+              </a:rPr>
+              <a:t>NaN</a:t>
             </a:r>
           </a:p>
         </p:txBody>
@@ -12027,7 +12075,7 @@
           <a:noFill/>
         </p:spPr>
         <p:txBody>
-          <a:bodyPr wrap="square" lIns="0" tIns="0" rIns="0" bIns="0" anchor="t">
+          <a:bodyPr wrap="square" anchor="t" lIns="0" rIns="0" tIns="0" bIns="0">
             <a:spAutoFit/>
           </a:bodyPr>
           <a:lstStyle/>
@@ -12044,7 +12092,7 @@
                 </a:solidFill>
                 <a:latin typeface="Poppins"/>
               </a:rPr>
-              <a:t>inside the zone, every flight</a:t>
+              <a:t>was passing straight through</a:t>
             </a:r>
           </a:p>
         </p:txBody>
@@ -12058,7 +12106,7 @@
         <p:spPr>
           <a:xfrm>
             <a:off x="502920" y="2834640"/>
-            <a:ext cx="8138160" cy="1371600"/>
+            <a:ext cx="8138160" cy="1417320"/>
           </a:xfrm>
           <a:prstGeom prst="roundRect">
             <a:avLst/>
@@ -12090,7 +12138,6 @@
           <a:lstStyle/>
           <a:p>
             <a:pPr algn="ctr"/>
-            <a:endParaRPr/>
           </a:p>
         </p:txBody>
       </p:sp>
@@ -12111,7 +12158,7 @@
           <a:noFill/>
         </p:spPr>
         <p:txBody>
-          <a:bodyPr wrap="square" lIns="0" tIns="0" rIns="0" bIns="0" anchor="t">
+          <a:bodyPr wrap="square" anchor="t" lIns="0" rIns="0" tIns="0" bIns="0">
             <a:spAutoFit/>
           </a:bodyPr>
           <a:lstStyle/>
@@ -12128,7 +12175,7 @@
                 </a:solidFill>
                 <a:latin typeface="Poppins"/>
               </a:rPr>
-              <a:t>Two layers arguing ten times a second looks exactly as unsafe as it is.</a:t>
+              <a:t>A safety layer that fails OPEN is worse than none, and ours did.</a:t>
             </a:r>
           </a:p>
         </p:txBody>
@@ -12142,15 +12189,15 @@
         <p:spPr>
           <a:xfrm>
             <a:off x="731520" y="3337560"/>
-            <a:ext cx="7680960" cy="868680"/>
-          </a:xfrm>
-          <a:prstGeom prst="rect">
-            <a:avLst/>
-          </a:prstGeom>
-          <a:noFill/>
-        </p:spPr>
-        <p:txBody>
-          <a:bodyPr wrap="square" lIns="0" tIns="0" rIns="0" bIns="0" anchor="t">
+            <a:ext cx="7680960" cy="1005840"/>
+          </a:xfrm>
+          <a:prstGeom prst="rect">
+            <a:avLst/>
+          </a:prstGeom>
+          <a:noFill/>
+        </p:spPr>
+        <p:txBody>
+          <a:bodyPr wrap="square" anchor="t" lIns="0" rIns="0" tIns="0" bIns="0">
             <a:spAutoFit/>
           </a:bodyPr>
           <a:lstStyle/>
@@ -12167,7 +12214,7 @@
                 </a:solidFill>
                 <a:latin typeface="Poppins"/>
               </a:rPr>
-              <a:t>The servo asked to close on the car every tick and the Shield refused every tick. Neither changed its</a:t>
+              <a:t>NaN loses every comparison, so an action carrying one raised zero violations and took the untouched</a:t>
             </a:r>
           </a:p>
           <a:p>
@@ -12183,7 +12230,7 @@
                 </a:solidFill>
                 <a:latin typeface="Poppins"/>
               </a:rPr>
-              <a:t>mind, so the aircraft chattered against the boundary — 659 corrections in 795 ticks. The controller</a:t>
+              <a:t>passthrough branch — reaching the autopilot byte-identical. Infinity was worse: the speed clamp</a:t>
             </a:r>
           </a:p>
           <a:p>
@@ -12199,7 +12246,7 @@
                 </a:solidFill>
                 <a:latin typeface="Poppins"/>
               </a:rPr>
-              <a:t>now knows the geofence itself (mission data, not target data), brakes from 12 m and holds at 3 m,</a:t>
+              <a:t>scales by cap/hypot, and inf times 0 is NaN, so a BOUNDED repair operator manufactured the poison.</a:t>
             </a:r>
           </a:p>
           <a:p>
@@ -12215,7 +12262,7 @@
                 </a:solidFill>
                 <a:latin typeface="Poppins"/>
               </a:rPr>
-              <a:t>while yaw keeps tracking so the target stays in view. HUD reads NFZ AHEAD — HOLDING.</a:t>
+              <a:t>Found by a new coverage suite, not by a flight. A non-finite command is now not a command.</a:t>
             </a:r>
           </a:p>
         </p:txBody>
@@ -12229,7 +12276,7 @@
 </file>
 
 <file path=ppt/slides/slide9.xml><?xml version="1.0" encoding="utf-8"?>
-<p:sld xmlns:a="http://schemas.openxmlformats.org/drawingml/2006/main" xmlns:r="http://schemas.openxmlformats.org/officeDocument/2006/relationships" xmlns:p="http://schemas.openxmlformats.org/presentationml/2006/main">
+<p:sld xmlns:a="http://schemas.openxmlformats.org/drawingml/2006/main" xmlns:p="http://schemas.openxmlformats.org/presentationml/2006/main" xmlns:r="http://schemas.openxmlformats.org/officeDocument/2006/relationships">
   <p:cSld>
     <p:bg>
       <p:bgPr>
@@ -12245,14 +12292,7 @@
         <p:cNvGrpSpPr/>
         <p:nvPr/>
       </p:nvGrpSpPr>
-      <p:grpSpPr>
-        <a:xfrm>
-          <a:off x="0" y="0"/>
-          <a:ext cx="0" cy="0"/>
-          <a:chOff x="0" y="0"/>
-          <a:chExt cx="0" cy="0"/>
-        </a:xfrm>
-      </p:grpSpPr>
+      <p:grpSpPr/>
       <p:sp>
         <p:nvSpPr>
           <p:cNvPr id="2" name="TextBox 1"/>
@@ -12270,7 +12310,7 @@
           <a:noFill/>
         </p:spPr>
         <p:txBody>
-          <a:bodyPr wrap="square" lIns="0" tIns="0" rIns="0" bIns="0" anchor="t">
+          <a:bodyPr wrap="square" anchor="t" lIns="0" rIns="0" tIns="0" bIns="0">
             <a:spAutoFit/>
           </a:bodyPr>
           <a:lstStyle/>
@@ -12309,7 +12349,7 @@
           <a:noFill/>
         </p:spPr>
         <p:txBody>
-          <a:bodyPr wrap="square" lIns="0" tIns="0" rIns="0" bIns="0" anchor="t">
+          <a:bodyPr wrap="square" anchor="t" lIns="0" rIns="0" tIns="0" bIns="0">
             <a:spAutoFit/>
           </a:bodyPr>
           <a:lstStyle/>
@@ -12348,7 +12388,7 @@
           <a:noFill/>
         </p:spPr>
         <p:txBody>
-          <a:bodyPr wrap="square" lIns="0" tIns="0" rIns="0" bIns="0" anchor="t">
+          <a:bodyPr wrap="square" anchor="t" lIns="0" rIns="0" tIns="0" bIns="0">
             <a:spAutoFit/>
           </a:bodyPr>
           <a:lstStyle/>
@@ -12411,7 +12451,6 @@
           <a:lstStyle/>
           <a:p>
             <a:pPr algn="ctr"/>
-            <a:endParaRPr/>
           </a:p>
         </p:txBody>
       </p:sp>
@@ -12432,7 +12471,7 @@
           <a:noFill/>
         </p:spPr>
         <p:txBody>
-          <a:bodyPr wrap="square" lIns="0" tIns="0" rIns="0" bIns="0" anchor="t">
+          <a:bodyPr wrap="square" anchor="t" lIns="0" rIns="0" tIns="0" bIns="0">
             <a:spAutoFit/>
           </a:bodyPr>
           <a:lstStyle/>
@@ -12495,7 +12534,6 @@
           <a:lstStyle/>
           <a:p>
             <a:pPr algn="ctr"/>
-            <a:endParaRPr/>
           </a:p>
         </p:txBody>
       </p:sp>
@@ -12516,7 +12554,7 @@
           <a:noFill/>
         </p:spPr>
         <p:txBody>
-          <a:bodyPr wrap="square" lIns="0" tIns="0" rIns="0" bIns="0" anchor="t">
+          <a:bodyPr wrap="square" anchor="t" lIns="0" rIns="0" tIns="0" bIns="0">
             <a:spAutoFit/>
           </a:bodyPr>
           <a:lstStyle/>
@@ -12555,7 +12593,7 @@
           <a:noFill/>
         </p:spPr>
         <p:txBody>
-          <a:bodyPr wrap="square" lIns="0" tIns="0" rIns="0" bIns="0" anchor="t">
+          <a:bodyPr wrap="square" anchor="t" lIns="0" rIns="0" tIns="0" bIns="0">
             <a:spAutoFit/>
           </a:bodyPr>
           <a:lstStyle/>
@@ -12666,7 +12704,6 @@
           <a:lstStyle/>
           <a:p>
             <a:pPr algn="ctr"/>
-            <a:endParaRPr/>
           </a:p>
         </p:txBody>
       </p:sp>
@@ -12687,7 +12724,7 @@
           <a:noFill/>
         </p:spPr>
         <p:txBody>
-          <a:bodyPr wrap="square" lIns="0" tIns="0" rIns="0" bIns="0" anchor="t">
+          <a:bodyPr wrap="square" anchor="t" lIns="0" rIns="0" tIns="0" bIns="0">
             <a:spAutoFit/>
           </a:bodyPr>
           <a:lstStyle/>
@@ -12726,7 +12763,7 @@
           <a:noFill/>
         </p:spPr>
         <p:txBody>
-          <a:bodyPr wrap="square" lIns="0" tIns="0" rIns="0" bIns="0" anchor="t">
+          <a:bodyPr wrap="square" anchor="t" lIns="0" rIns="0" tIns="0" bIns="0">
             <a:spAutoFit/>
           </a:bodyPr>
           <a:lstStyle/>
@@ -12813,7 +12850,7 @@
           <a:noFill/>
         </p:spPr>
         <p:txBody>
-          <a:bodyPr wrap="square" lIns="0" tIns="0" rIns="0" bIns="0" anchor="t">
+          <a:bodyPr wrap="square" anchor="t" lIns="0" rIns="0" tIns="0" bIns="0">
             <a:spAutoFit/>
           </a:bodyPr>
           <a:lstStyle/>
@@ -12876,7 +12913,6 @@
           <a:lstStyle/>
           <a:p>
             <a:pPr algn="ctr"/>
-            <a:endParaRPr/>
           </a:p>
         </p:txBody>
       </p:sp>
@@ -12897,7 +12933,7 @@
           <a:noFill/>
         </p:spPr>
         <p:txBody>
-          <a:bodyPr wrap="square" lIns="0" tIns="0" rIns="0" bIns="0" anchor="t">
+          <a:bodyPr wrap="square" anchor="t" lIns="0" rIns="0" tIns="0" bIns="0">
             <a:spAutoFit/>
           </a:bodyPr>
           <a:lstStyle/>
@@ -12936,7 +12972,7 @@
           <a:noFill/>
         </p:spPr>
         <p:txBody>
-          <a:bodyPr wrap="square" lIns="0" tIns="0" rIns="0" bIns="0" anchor="t">
+          <a:bodyPr wrap="square" anchor="t" lIns="0" rIns="0" tIns="0" bIns="0">
             <a:spAutoFit/>
           </a:bodyPr>
           <a:lstStyle/>
@@ -12975,7 +13011,7 @@
           <a:noFill/>
         </p:spPr>
         <p:txBody>
-          <a:bodyPr wrap="square" lIns="0" tIns="0" rIns="0" bIns="0" anchor="t">
+          <a:bodyPr wrap="square" anchor="t" lIns="0" rIns="0" tIns="0" bIns="0">
             <a:spAutoFit/>
           </a:bodyPr>
           <a:lstStyle/>
@@ -13014,7 +13050,7 @@
           <a:noFill/>
         </p:spPr>
         <p:txBody>
-          <a:bodyPr wrap="square" lIns="0" tIns="0" rIns="0" bIns="0" anchor="t">
+          <a:bodyPr wrap="square" anchor="t" lIns="0" rIns="0" tIns="0" bIns="0">
             <a:spAutoFit/>
           </a:bodyPr>
           <a:lstStyle/>
@@ -13077,7 +13113,6 @@
           <a:lstStyle/>
           <a:p>
             <a:pPr algn="ctr"/>
-            <a:endParaRPr/>
           </a:p>
         </p:txBody>
       </p:sp>
@@ -13098,7 +13133,7 @@
           <a:noFill/>
         </p:spPr>
         <p:txBody>
-          <a:bodyPr wrap="square" lIns="0" tIns="0" rIns="0" bIns="0" anchor="t">
+          <a:bodyPr wrap="square" anchor="t" lIns="0" rIns="0" tIns="0" bIns="0">
             <a:spAutoFit/>
           </a:bodyPr>
           <a:lstStyle/>
@@ -13137,7 +13172,7 @@
           <a:noFill/>
         </p:spPr>
         <p:txBody>
-          <a:bodyPr wrap="square" lIns="0" tIns="0" rIns="0" bIns="0" anchor="t">
+          <a:bodyPr wrap="square" anchor="t" lIns="0" rIns="0" tIns="0" bIns="0">
             <a:spAutoFit/>
           </a:bodyPr>
           <a:lstStyle/>
@@ -13176,7 +13211,7 @@
           <a:noFill/>
         </p:spPr>
         <p:txBody>
-          <a:bodyPr wrap="square" lIns="0" tIns="0" rIns="0" bIns="0" anchor="t">
+          <a:bodyPr wrap="square" anchor="t" lIns="0" rIns="0" tIns="0" bIns="0">
             <a:spAutoFit/>
           </a:bodyPr>
           <a:lstStyle/>
@@ -13215,7 +13250,7 @@
           <a:noFill/>
         </p:spPr>
         <p:txBody>
-          <a:bodyPr wrap="square" lIns="0" tIns="0" rIns="0" bIns="0" anchor="t">
+          <a:bodyPr wrap="square" anchor="t" lIns="0" rIns="0" tIns="0" bIns="0">
             <a:spAutoFit/>
           </a:bodyPr>
           <a:lstStyle/>
@@ -13254,7 +13289,7 @@
           <a:noFill/>
         </p:spPr>
         <p:txBody>
-          <a:bodyPr wrap="square" lIns="0" tIns="0" rIns="0" bIns="0" anchor="t">
+          <a:bodyPr wrap="square" anchor="t" lIns="0" rIns="0" tIns="0" bIns="0">
             <a:spAutoFit/>
           </a:bodyPr>
           <a:lstStyle/>
@@ -13293,7 +13328,7 @@
           <a:noFill/>
         </p:spPr>
         <p:txBody>
-          <a:bodyPr wrap="square" lIns="0" tIns="0" rIns="0" bIns="0" anchor="t">
+          <a:bodyPr wrap="square" anchor="t" lIns="0" rIns="0" tIns="0" bIns="0">
             <a:spAutoFit/>
           </a:bodyPr>
           <a:lstStyle/>
@@ -13332,7 +13367,7 @@
           <a:noFill/>
         </p:spPr>
         <p:txBody>
-          <a:bodyPr wrap="square" lIns="0" tIns="0" rIns="0" bIns="0" anchor="t">
+          <a:bodyPr wrap="square" anchor="t" lIns="0" rIns="0" tIns="0" bIns="0">
             <a:spAutoFit/>
           </a:bodyPr>
           <a:lstStyle/>
@@ -13371,7 +13406,7 @@
           <a:noFill/>
         </p:spPr>
         <p:txBody>
-          <a:bodyPr wrap="square" lIns="0" tIns="0" rIns="0" bIns="0" anchor="t">
+          <a:bodyPr wrap="square" anchor="t" lIns="0" rIns="0" tIns="0" bIns="0">
             <a:spAutoFit/>
           </a:bodyPr>
           <a:lstStyle/>
@@ -13401,7 +13436,7 @@
         </p:nvSpPr>
         <p:spPr>
           <a:xfrm>
-            <a:off x="502920" y="4389120"/>
+            <a:off x="502920" y="4215384"/>
             <a:ext cx="8138160" cy="292608"/>
           </a:xfrm>
           <a:prstGeom prst="rect">
@@ -13434,7 +13469,6 @@
           <a:lstStyle/>
           <a:p>
             <a:pPr algn="ctr"/>
-            <a:endParaRPr/>
           </a:p>
         </p:txBody>
       </p:sp>
@@ -13455,7 +13489,7 @@
           <a:noFill/>
         </p:spPr>
         <p:txBody>
-          <a:bodyPr wrap="square" lIns="0" tIns="0" rIns="0" bIns="0" anchor="t">
+          <a:bodyPr wrap="square" anchor="t" lIns="0" rIns="0" tIns="0" bIns="0">
             <a:spAutoFit/>
           </a:bodyPr>
           <a:lstStyle/>
@@ -13494,7 +13528,7 @@
           <a:noFill/>
         </p:spPr>
         <p:txBody>
-          <a:bodyPr wrap="square" lIns="0" tIns="0" rIns="0" bIns="0" anchor="t">
+          <a:bodyPr wrap="square" anchor="t" lIns="0" rIns="0" tIns="0" bIns="0">
             <a:spAutoFit/>
           </a:bodyPr>
           <a:lstStyle/>
@@ -13533,7 +13567,7 @@
           <a:noFill/>
         </p:spPr>
         <p:txBody>
-          <a:bodyPr wrap="square" lIns="0" tIns="0" rIns="0" bIns="0" anchor="t">
+          <a:bodyPr wrap="square" anchor="t" lIns="0" rIns="0" tIns="0" bIns="0">
             <a:spAutoFit/>
           </a:bodyPr>
           <a:lstStyle/>
@@ -13572,7 +13606,7 @@
           <a:noFill/>
         </p:spPr>
         <p:txBody>
-          <a:bodyPr wrap="square" lIns="0" tIns="0" rIns="0" bIns="0" anchor="t">
+          <a:bodyPr wrap="square" anchor="t" lIns="0" rIns="0" tIns="0" bIns="0">
             <a:spAutoFit/>
           </a:bodyPr>
           <a:lstStyle/>
@@ -13602,7 +13636,7 @@
         </p:nvSpPr>
         <p:spPr>
           <a:xfrm>
-            <a:off x="502920" y="4517136"/>
+            <a:off x="502920" y="4343400"/>
             <a:ext cx="8138160" cy="274320"/>
           </a:xfrm>
           <a:prstGeom prst="rect">
@@ -13611,60 +13645,24 @@
           <a:noFill/>
         </p:spPr>
         <p:txBody>
-          <a:bodyPr wrap="square" lIns="0" tIns="0" rIns="0" bIns="0" anchor="t">
-            <a:spAutoFit/>
-          </a:bodyPr>
-          <a:lstStyle/>
-          <a:p>
-            <a:pPr algn="l">
-              <a:lnSpc>
-                <a:spcPct val="100000"/>
-              </a:lnSpc>
-            </a:pPr>
-            <a:r>
-              <a:rPr sz="950" b="0" dirty="0">
+          <a:bodyPr wrap="square" anchor="t" lIns="0" rIns="0" tIns="0" bIns="0">
+            <a:spAutoFit/>
+          </a:bodyPr>
+          <a:lstStyle/>
+          <a:p>
+            <a:pPr algn="l">
+              <a:lnSpc>
+                <a:spcPct val="100000"/>
+              </a:lnSpc>
+            </a:pPr>
+            <a:r>
+              <a:rPr sz="950" b="0">
                 <a:solidFill>
                   <a:srgbClr val="6B7280"/>
                 </a:solidFill>
                 <a:latin typeface="Poppins"/>
               </a:rPr>
-              <a:t>Real ticks from demo/out/*/</a:t>
-            </a:r>
-            <a:r>
-              <a:rPr sz="950" b="0" dirty="0" err="1">
-                <a:solidFill>
-                  <a:srgbClr val="6B7280"/>
-                </a:solidFill>
-                <a:latin typeface="Poppins"/>
-              </a:rPr>
-              <a:t>flight_log.jsonl</a:t>
-            </a:r>
-            <a:r>
-              <a:rPr sz="950" b="0" dirty="0">
-                <a:solidFill>
-                  <a:srgbClr val="6B7280"/>
-                </a:solidFill>
-                <a:latin typeface="Poppins"/>
-              </a:rPr>
-              <a:t>. </a:t>
-            </a:r>
-            <a:r>
-              <a:rPr sz="950" b="0" dirty="0" err="1">
-                <a:solidFill>
-                  <a:srgbClr val="6B7280"/>
-                </a:solidFill>
-                <a:latin typeface="Poppins"/>
-              </a:rPr>
-              <a:t>yaw_rate</a:t>
-            </a:r>
-            <a:r>
-              <a:rPr sz="950" b="0" dirty="0">
-                <a:solidFill>
-                  <a:srgbClr val="6B7280"/>
-                </a:solidFill>
-                <a:latin typeface="Poppins"/>
-              </a:rPr>
-              <a:t> is identical in all three — the Shield never touches heading.</a:t>
+              <a:t>Real ticks from demo/out/*/flight_log.jsonl. yaw_rate is identical in all three — the Shield never touches heading.</a:t>
             </a:r>
           </a:p>
         </p:txBody>
